--- a/Documents/Layout.pptx
+++ b/Documents/Layout.pptx
@@ -8,6 +8,14 @@
     <p:sldId id="256" r:id="rId2"/>
     <p:sldId id="257" r:id="rId3"/>
     <p:sldId id="258" r:id="rId4"/>
+    <p:sldId id="263" r:id="rId5"/>
+    <p:sldId id="259" r:id="rId6"/>
+    <p:sldId id="260" r:id="rId7"/>
+    <p:sldId id="261" r:id="rId8"/>
+    <p:sldId id="262" r:id="rId9"/>
+    <p:sldId id="264" r:id="rId10"/>
+    <p:sldId id="265" r:id="rId11"/>
+    <p:sldId id="266" r:id="rId12"/>
   </p:sldIdLst>
   <p:sldSz cx="12192000" cy="6858000"/>
   <p:notesSz cx="6858000" cy="9144000"/>
@@ -3414,8 +3422,8 @@
         </p:nvSpPr>
         <p:spPr>
           <a:xfrm>
-            <a:off x="3545840" y="396240"/>
-            <a:ext cx="4297680" cy="5069840"/>
+            <a:off x="7437120" y="254000"/>
+            <a:ext cx="4297680" cy="5953760"/>
           </a:xfrm>
           <a:prstGeom prst="rect">
             <a:avLst/>
@@ -3473,7 +3481,7 @@
         </p:nvSpPr>
         <p:spPr>
           <a:xfrm>
-            <a:off x="3698240" y="1026160"/>
+            <a:off x="7589520" y="883920"/>
             <a:ext cx="4003040" cy="944880"/>
           </a:xfrm>
           <a:prstGeom prst="roundRect">
@@ -3554,7 +3562,7 @@
         </p:nvSpPr>
         <p:spPr>
           <a:xfrm>
-            <a:off x="3698240" y="2123440"/>
+            <a:off x="7589520" y="1981200"/>
             <a:ext cx="4003040" cy="944880"/>
           </a:xfrm>
           <a:prstGeom prst="roundRect">
@@ -3608,6 +3616,17 @@
           <a:p>
             <a:pPr algn="ctr"/>
             <a:r>
+              <a:rPr lang="pt-PT" sz="3200" dirty="0" err="1">
+                <a:solidFill>
+                  <a:schemeClr val="tx1"/>
+                </a:solidFill>
+                <a:latin typeface="Aptos Mono" panose="020B0009020202020204" pitchFamily="49" charset="0"/>
+                <a:ea typeface="Tahoma" panose="020B0604030504040204" pitchFamily="34" charset="0"/>
+                <a:cs typeface="Tahoma" panose="020B0604030504040204" pitchFamily="34" charset="0"/>
+              </a:rPr>
+              <a:t>Radios</a:t>
+            </a:r>
+            <a:r>
               <a:rPr lang="pt-PT" sz="3200" dirty="0">
                 <a:solidFill>
                   <a:schemeClr val="tx1"/>
@@ -3616,7 +3635,7 @@
                 <a:ea typeface="Tahoma" panose="020B0604030504040204" pitchFamily="34" charset="0"/>
                 <a:cs typeface="Tahoma" panose="020B0604030504040204" pitchFamily="34" charset="0"/>
               </a:rPr>
-              <a:t>Radio Online</a:t>
+              <a:t> Online</a:t>
             </a:r>
           </a:p>
         </p:txBody>
@@ -3635,7 +3654,7 @@
         </p:nvSpPr>
         <p:spPr>
           <a:xfrm>
-            <a:off x="3698240" y="3220720"/>
+            <a:off x="7589520" y="3078480"/>
             <a:ext cx="4003040" cy="944880"/>
           </a:xfrm>
           <a:prstGeom prst="roundRect">
@@ -3716,7 +3735,7 @@
         </p:nvSpPr>
         <p:spPr>
           <a:xfrm>
-            <a:off x="3698240" y="4318000"/>
+            <a:off x="7589520" y="4175760"/>
             <a:ext cx="4003040" cy="944880"/>
           </a:xfrm>
           <a:prstGeom prst="roundRect">
@@ -3783,10 +3802,566 @@
           </a:p>
         </p:txBody>
       </p:sp>
+      <p:sp>
+        <p:nvSpPr>
+          <p:cNvPr id="24" name="TextBox 23">
+            <a:extLst>
+              <a:ext uri="{FF2B5EF4-FFF2-40B4-BE49-F238E27FC236}">
+                <a16:creationId xmlns:a16="http://schemas.microsoft.com/office/drawing/2014/main" id="{400DE75D-2A7B-9FEA-758E-AD2D671E9065}"/>
+              </a:ext>
+            </a:extLst>
+          </p:cNvPr>
+          <p:cNvSpPr txBox="1"/>
+          <p:nvPr/>
+        </p:nvSpPr>
+        <p:spPr>
+          <a:xfrm>
+            <a:off x="934720" y="329922"/>
+            <a:ext cx="2658100" cy="553998"/>
+          </a:xfrm>
+          <a:prstGeom prst="rect">
+            <a:avLst/>
+          </a:prstGeom>
+          <a:noFill/>
+        </p:spPr>
+        <p:txBody>
+          <a:bodyPr wrap="none" rtlCol="0">
+            <a:spAutoFit/>
+          </a:bodyPr>
+          <a:lstStyle/>
+          <a:p>
+            <a:r>
+              <a:rPr lang="pt-PT" sz="3000" dirty="0"/>
+              <a:t>Menu principal</a:t>
+            </a:r>
+          </a:p>
+        </p:txBody>
+      </p:sp>
     </p:spTree>
     <p:extLst>
       <p:ext uri="{BB962C8B-B14F-4D97-AF65-F5344CB8AC3E}">
         <p14:creationId xmlns:p14="http://schemas.microsoft.com/office/powerpoint/2010/main" val="3635380679"/>
+      </p:ext>
+    </p:extLst>
+  </p:cSld>
+  <p:clrMapOvr>
+    <a:masterClrMapping/>
+  </p:clrMapOvr>
+</p:sld>
+</file>
+
+<file path=ppt/slides/slide10.xml><?xml version="1.0" encoding="utf-8"?>
+<p:sld xmlns:a="http://schemas.openxmlformats.org/drawingml/2006/main" xmlns:r="http://schemas.openxmlformats.org/officeDocument/2006/relationships" xmlns:p="http://schemas.openxmlformats.org/presentationml/2006/main">
+  <p:cSld>
+    <p:spTree>
+      <p:nvGrpSpPr>
+        <p:cNvPr id="1" name="">
+          <a:extLst>
+            <a:ext uri="{FF2B5EF4-FFF2-40B4-BE49-F238E27FC236}">
+              <a16:creationId xmlns:a16="http://schemas.microsoft.com/office/drawing/2014/main" id="{F51B6A9D-CAA8-EDF5-8027-0FAF848F5E58}"/>
+            </a:ext>
+          </a:extLst>
+        </p:cNvPr>
+        <p:cNvGrpSpPr/>
+        <p:nvPr/>
+      </p:nvGrpSpPr>
+      <p:grpSpPr>
+        <a:xfrm>
+          <a:off x="0" y="0"/>
+          <a:ext cx="0" cy="0"/>
+          <a:chOff x="0" y="0"/>
+          <a:chExt cx="0" cy="0"/>
+        </a:xfrm>
+      </p:grpSpPr>
+      <p:sp>
+        <p:nvSpPr>
+          <p:cNvPr id="23" name="Rectangle 22">
+            <a:extLst>
+              <a:ext uri="{FF2B5EF4-FFF2-40B4-BE49-F238E27FC236}">
+                <a16:creationId xmlns:a16="http://schemas.microsoft.com/office/drawing/2014/main" id="{189D3E3C-B4C1-C0B6-6299-C1335DE86CF0}"/>
+              </a:ext>
+            </a:extLst>
+          </p:cNvPr>
+          <p:cNvSpPr/>
+          <p:nvPr/>
+        </p:nvSpPr>
+        <p:spPr>
+          <a:xfrm>
+            <a:off x="7051040" y="435987"/>
+            <a:ext cx="4297680" cy="5986026"/>
+          </a:xfrm>
+          <a:prstGeom prst="rect">
+            <a:avLst/>
+          </a:prstGeom>
+          <a:solidFill>
+            <a:schemeClr val="tx2">
+              <a:lumMod val="50000"/>
+              <a:lumOff val="50000"/>
+            </a:schemeClr>
+          </a:solidFill>
+        </p:spPr>
+        <p:style>
+          <a:lnRef idx="2">
+            <a:schemeClr val="accent1">
+              <a:shade val="15000"/>
+            </a:schemeClr>
+          </a:lnRef>
+          <a:fillRef idx="1">
+            <a:schemeClr val="accent1"/>
+          </a:fillRef>
+          <a:effectRef idx="0">
+            <a:schemeClr val="accent1"/>
+          </a:effectRef>
+          <a:fontRef idx="minor">
+            <a:schemeClr val="lt1"/>
+          </a:fontRef>
+        </p:style>
+        <p:txBody>
+          <a:bodyPr rtlCol="0" anchor="t" anchorCtr="0"/>
+          <a:lstStyle/>
+          <a:p>
+            <a:pPr algn="ctr"/>
+            <a:endParaRPr lang="pt-PT" sz="3000" dirty="0">
+              <a:solidFill>
+                <a:schemeClr val="bg1"/>
+              </a:solidFill>
+            </a:endParaRPr>
+          </a:p>
+        </p:txBody>
+      </p:sp>
+      <p:sp>
+        <p:nvSpPr>
+          <p:cNvPr id="3" name="Rectangle: Rounded Corners 2">
+            <a:extLst>
+              <a:ext uri="{FF2B5EF4-FFF2-40B4-BE49-F238E27FC236}">
+                <a16:creationId xmlns:a16="http://schemas.microsoft.com/office/drawing/2014/main" id="{23D424B6-0CAA-AE17-BE08-DEB2E5C632C9}"/>
+              </a:ext>
+            </a:extLst>
+          </p:cNvPr>
+          <p:cNvSpPr/>
+          <p:nvPr/>
+        </p:nvSpPr>
+        <p:spPr>
+          <a:xfrm>
+            <a:off x="7229532" y="964307"/>
+            <a:ext cx="3940695" cy="476566"/>
+          </a:xfrm>
+          <a:prstGeom prst="roundRect">
+            <a:avLst/>
+          </a:prstGeom>
+          <a:gradFill>
+            <a:gsLst>
+              <a:gs pos="0">
+                <a:schemeClr val="accent6">
+                  <a:lumMod val="75000"/>
+                </a:schemeClr>
+              </a:gs>
+              <a:gs pos="92000">
+                <a:schemeClr val="accent6">
+                  <a:lumMod val="105000"/>
+                  <a:satMod val="103000"/>
+                  <a:tint val="73000"/>
+                </a:schemeClr>
+              </a:gs>
+              <a:gs pos="100000">
+                <a:schemeClr val="accent6">
+                  <a:lumMod val="105000"/>
+                  <a:satMod val="109000"/>
+                  <a:tint val="81000"/>
+                </a:schemeClr>
+              </a:gs>
+            </a:gsLst>
+            <a:lin ang="5400000" scaled="0"/>
+          </a:gradFill>
+          <a:ln>
+            <a:noFill/>
+          </a:ln>
+        </p:spPr>
+        <p:style>
+          <a:lnRef idx="0">
+            <a:scrgbClr r="0" g="0" b="0"/>
+          </a:lnRef>
+          <a:fillRef idx="0">
+            <a:scrgbClr r="0" g="0" b="0"/>
+          </a:fillRef>
+          <a:effectRef idx="0">
+            <a:scrgbClr r="0" g="0" b="0"/>
+          </a:effectRef>
+          <a:fontRef idx="minor">
+            <a:schemeClr val="lt1"/>
+          </a:fontRef>
+        </p:style>
+        <p:txBody>
+          <a:bodyPr rtlCol="0" anchor="ctr"/>
+          <a:lstStyle/>
+          <a:p>
+            <a:pPr algn="ctr"/>
+            <a:r>
+              <a:rPr lang="pt-PT" sz="1200" dirty="0">
+                <a:solidFill>
+                  <a:schemeClr val="tx1"/>
+                </a:solidFill>
+                <a:latin typeface="Aptos Mono" panose="020F0502020204030204" pitchFamily="49" charset="0"/>
+                <a:ea typeface="Tahoma" panose="020B0604030504040204" pitchFamily="34" charset="0"/>
+                <a:cs typeface="Tahoma" panose="020B0604030504040204" pitchFamily="34" charset="0"/>
+              </a:rPr>
+              <a:t>Mostra um equalizador</a:t>
+            </a:r>
+          </a:p>
+        </p:txBody>
+      </p:sp>
+      <p:sp>
+        <p:nvSpPr>
+          <p:cNvPr id="4" name="TextBox 3">
+            <a:extLst>
+              <a:ext uri="{FF2B5EF4-FFF2-40B4-BE49-F238E27FC236}">
+                <a16:creationId xmlns:a16="http://schemas.microsoft.com/office/drawing/2014/main" id="{EAC29CB3-3E79-B750-D72F-8A9F49701A55}"/>
+              </a:ext>
+            </a:extLst>
+          </p:cNvPr>
+          <p:cNvSpPr txBox="1"/>
+          <p:nvPr/>
+        </p:nvSpPr>
+        <p:spPr>
+          <a:xfrm>
+            <a:off x="7081520" y="515481"/>
+            <a:ext cx="747384" cy="369332"/>
+          </a:xfrm>
+          <a:prstGeom prst="rect">
+            <a:avLst/>
+          </a:prstGeom>
+          <a:noFill/>
+        </p:spPr>
+        <p:txBody>
+          <a:bodyPr wrap="none" rtlCol="0">
+            <a:spAutoFit/>
+          </a:bodyPr>
+          <a:lstStyle/>
+          <a:p>
+            <a:r>
+              <a:rPr lang="pt-PT" dirty="0">
+                <a:solidFill>
+                  <a:schemeClr val="bg1"/>
+                </a:solidFill>
+              </a:rPr>
+              <a:t>voltar</a:t>
+            </a:r>
+          </a:p>
+        </p:txBody>
+      </p:sp>
+      <p:sp>
+        <p:nvSpPr>
+          <p:cNvPr id="28" name="TextBox 27">
+            <a:extLst>
+              <a:ext uri="{FF2B5EF4-FFF2-40B4-BE49-F238E27FC236}">
+                <a16:creationId xmlns:a16="http://schemas.microsoft.com/office/drawing/2014/main" id="{DEDF96D5-6164-0B07-AF04-51657DCC1591}"/>
+              </a:ext>
+            </a:extLst>
+          </p:cNvPr>
+          <p:cNvSpPr txBox="1"/>
+          <p:nvPr/>
+        </p:nvSpPr>
+        <p:spPr>
+          <a:xfrm>
+            <a:off x="934719" y="329922"/>
+            <a:ext cx="4297679" cy="5170646"/>
+          </a:xfrm>
+          <a:prstGeom prst="rect">
+            <a:avLst/>
+          </a:prstGeom>
+          <a:noFill/>
+        </p:spPr>
+        <p:txBody>
+          <a:bodyPr wrap="square" rtlCol="0">
+            <a:spAutoFit/>
+          </a:bodyPr>
+          <a:lstStyle/>
+          <a:p>
+            <a:r>
+              <a:rPr lang="pt-PT" sz="3000" dirty="0"/>
+              <a:t>Menu reprodução</a:t>
+            </a:r>
+          </a:p>
+          <a:p>
+            <a:endParaRPr lang="pt-PT" sz="3000" dirty="0"/>
+          </a:p>
+          <a:p>
+            <a:r>
+              <a:rPr lang="pt-PT" sz="3000" dirty="0"/>
+              <a:t>Aqui ao clicar e arrastar para a esquerda no botão que mostra o nome da musica passa para a próxima musica.</a:t>
+            </a:r>
+            <a:br>
+              <a:rPr lang="pt-PT" sz="3000" dirty="0"/>
+            </a:br>
+            <a:r>
+              <a:rPr lang="pt-PT" sz="3000" dirty="0"/>
+              <a:t>Ao fazer o mesmo movimento para a direita passa para a musica anterior</a:t>
+            </a:r>
+          </a:p>
+        </p:txBody>
+      </p:sp>
+      <p:sp>
+        <p:nvSpPr>
+          <p:cNvPr id="12" name="Rectangle: Rounded Corners 11">
+            <a:extLst>
+              <a:ext uri="{FF2B5EF4-FFF2-40B4-BE49-F238E27FC236}">
+                <a16:creationId xmlns:a16="http://schemas.microsoft.com/office/drawing/2014/main" id="{2591788D-C685-4A89-8393-488785299B76}"/>
+              </a:ext>
+            </a:extLst>
+          </p:cNvPr>
+          <p:cNvSpPr/>
+          <p:nvPr/>
+        </p:nvSpPr>
+        <p:spPr>
+          <a:xfrm>
+            <a:off x="7229530" y="1717964"/>
+            <a:ext cx="3940695" cy="3495519"/>
+          </a:xfrm>
+          <a:prstGeom prst="roundRect">
+            <a:avLst/>
+          </a:prstGeom>
+          <a:gradFill>
+            <a:gsLst>
+              <a:gs pos="0">
+                <a:schemeClr val="accent6">
+                  <a:lumMod val="75000"/>
+                </a:schemeClr>
+              </a:gs>
+              <a:gs pos="92000">
+                <a:schemeClr val="accent6">
+                  <a:lumMod val="105000"/>
+                  <a:satMod val="103000"/>
+                  <a:tint val="73000"/>
+                </a:schemeClr>
+              </a:gs>
+              <a:gs pos="100000">
+                <a:schemeClr val="accent6">
+                  <a:lumMod val="105000"/>
+                  <a:satMod val="109000"/>
+                  <a:tint val="81000"/>
+                </a:schemeClr>
+              </a:gs>
+            </a:gsLst>
+            <a:lin ang="5400000" scaled="0"/>
+          </a:gradFill>
+          <a:ln>
+            <a:noFill/>
+          </a:ln>
+        </p:spPr>
+        <p:style>
+          <a:lnRef idx="0">
+            <a:scrgbClr r="0" g="0" b="0"/>
+          </a:lnRef>
+          <a:fillRef idx="0">
+            <a:scrgbClr r="0" g="0" b="0"/>
+          </a:fillRef>
+          <a:effectRef idx="0">
+            <a:scrgbClr r="0" g="0" b="0"/>
+          </a:effectRef>
+          <a:fontRef idx="minor">
+            <a:schemeClr val="lt1"/>
+          </a:fontRef>
+        </p:style>
+        <p:txBody>
+          <a:bodyPr rtlCol="0" anchor="ctr"/>
+          <a:lstStyle/>
+          <a:p>
+            <a:pPr algn="ctr"/>
+            <a:r>
+              <a:rPr lang="pt-PT" dirty="0">
+                <a:solidFill>
+                  <a:schemeClr val="tx1"/>
+                </a:solidFill>
+                <a:latin typeface="Aptos Mono" panose="020F0502020204030204" pitchFamily="49" charset="0"/>
+                <a:ea typeface="Tahoma" panose="020B0604030504040204" pitchFamily="34" charset="0"/>
+                <a:cs typeface="Tahoma" panose="020B0604030504040204" pitchFamily="34" charset="0"/>
+              </a:rPr>
+              <a:t>Mostra nome da musica a reproduzir + algum + artista</a:t>
+            </a:r>
+            <a:endParaRPr lang="pt-PT" sz="1200" dirty="0">
+              <a:solidFill>
+                <a:schemeClr val="tx1"/>
+              </a:solidFill>
+              <a:latin typeface="Aptos Mono" panose="020F0502020204030204" pitchFamily="49" charset="0"/>
+              <a:ea typeface="Tahoma" panose="020B0604030504040204" pitchFamily="34" charset="0"/>
+              <a:cs typeface="Tahoma" panose="020B0604030504040204" pitchFamily="34" charset="0"/>
+            </a:endParaRPr>
+          </a:p>
+        </p:txBody>
+      </p:sp>
+      <p:sp>
+        <p:nvSpPr>
+          <p:cNvPr id="15" name="Rectangle: Rounded Corners 14">
+            <a:extLst>
+              <a:ext uri="{FF2B5EF4-FFF2-40B4-BE49-F238E27FC236}">
+                <a16:creationId xmlns:a16="http://schemas.microsoft.com/office/drawing/2014/main" id="{05AAB3CF-8C09-1CA0-F11F-AC7C71B23B0A}"/>
+              </a:ext>
+            </a:extLst>
+          </p:cNvPr>
+          <p:cNvSpPr/>
+          <p:nvPr/>
+        </p:nvSpPr>
+        <p:spPr>
+          <a:xfrm>
+            <a:off x="7229531" y="5391581"/>
+            <a:ext cx="3940695" cy="852335"/>
+          </a:xfrm>
+          <a:prstGeom prst="roundRect">
+            <a:avLst/>
+          </a:prstGeom>
+          <a:gradFill>
+            <a:gsLst>
+              <a:gs pos="0">
+                <a:schemeClr val="accent6">
+                  <a:lumMod val="75000"/>
+                </a:schemeClr>
+              </a:gs>
+              <a:gs pos="92000">
+                <a:schemeClr val="accent6">
+                  <a:lumMod val="105000"/>
+                  <a:satMod val="103000"/>
+                  <a:tint val="73000"/>
+                </a:schemeClr>
+              </a:gs>
+              <a:gs pos="100000">
+                <a:schemeClr val="accent6">
+                  <a:lumMod val="105000"/>
+                  <a:satMod val="109000"/>
+                  <a:tint val="81000"/>
+                </a:schemeClr>
+              </a:gs>
+            </a:gsLst>
+            <a:lin ang="5400000" scaled="0"/>
+          </a:gradFill>
+          <a:ln>
+            <a:noFill/>
+          </a:ln>
+        </p:spPr>
+        <p:style>
+          <a:lnRef idx="0">
+            <a:scrgbClr r="0" g="0" b="0"/>
+          </a:lnRef>
+          <a:fillRef idx="0">
+            <a:scrgbClr r="0" g="0" b="0"/>
+          </a:fillRef>
+          <a:effectRef idx="0">
+            <a:scrgbClr r="0" g="0" b="0"/>
+          </a:effectRef>
+          <a:fontRef idx="minor">
+            <a:schemeClr val="lt1"/>
+          </a:fontRef>
+        </p:style>
+        <p:txBody>
+          <a:bodyPr rtlCol="0" anchor="t"/>
+          <a:lstStyle/>
+          <a:p>
+            <a:pPr algn="ctr"/>
+            <a:r>
+              <a:rPr lang="pt-PT" sz="1200" dirty="0">
+                <a:solidFill>
+                  <a:schemeClr val="tx1"/>
+                </a:solidFill>
+                <a:latin typeface="Aptos Mono" panose="020F0502020204030204" pitchFamily="49" charset="0"/>
+                <a:ea typeface="Tahoma" panose="020B0604030504040204" pitchFamily="34" charset="0"/>
+                <a:cs typeface="Tahoma" panose="020B0604030504040204" pitchFamily="34" charset="0"/>
+              </a:rPr>
+              <a:t>Mostra linha temporal</a:t>
+            </a:r>
+          </a:p>
+          <a:p>
+            <a:pPr algn="ctr"/>
+            <a:r>
+              <a:rPr lang="pt-PT" sz="1200" dirty="0">
+                <a:solidFill>
+                  <a:schemeClr val="tx1"/>
+                </a:solidFill>
+                <a:latin typeface="Aptos Mono" panose="020F0502020204030204" pitchFamily="49" charset="0"/>
+                <a:ea typeface="Tahoma" panose="020B0604030504040204" pitchFamily="34" charset="0"/>
+                <a:cs typeface="Tahoma" panose="020B0604030504040204" pitchFamily="34" charset="0"/>
+              </a:rPr>
+              <a:t>Controlos de:</a:t>
+            </a:r>
+          </a:p>
+          <a:p>
+            <a:pPr algn="ctr"/>
+            <a:r>
+              <a:rPr lang="pt-PT" sz="1200" dirty="0">
+                <a:solidFill>
+                  <a:schemeClr val="tx1"/>
+                </a:solidFill>
+                <a:latin typeface="Aptos Mono" panose="020F0502020204030204" pitchFamily="49" charset="0"/>
+                <a:ea typeface="Tahoma" panose="020B0604030504040204" pitchFamily="34" charset="0"/>
+                <a:cs typeface="Tahoma" panose="020B0604030504040204" pitchFamily="34" charset="0"/>
+              </a:rPr>
+              <a:t>Anterior + pause/play + próximo</a:t>
+            </a:r>
+          </a:p>
+        </p:txBody>
+      </p:sp>
+    </p:spTree>
+    <p:extLst>
+      <p:ext uri="{BB962C8B-B14F-4D97-AF65-F5344CB8AC3E}">
+        <p14:creationId xmlns:p14="http://schemas.microsoft.com/office/powerpoint/2010/main" val="1875110804"/>
+      </p:ext>
+    </p:extLst>
+  </p:cSld>
+  <p:clrMapOvr>
+    <a:masterClrMapping/>
+  </p:clrMapOvr>
+</p:sld>
+</file>
+
+<file path=ppt/slides/slide11.xml><?xml version="1.0" encoding="utf-8"?>
+<p:sld xmlns:a="http://schemas.openxmlformats.org/drawingml/2006/main" xmlns:r="http://schemas.openxmlformats.org/officeDocument/2006/relationships" xmlns:p="http://schemas.openxmlformats.org/presentationml/2006/main">
+  <p:cSld>
+    <p:spTree>
+      <p:nvGrpSpPr>
+        <p:cNvPr id="1" name=""/>
+        <p:cNvGrpSpPr/>
+        <p:nvPr/>
+      </p:nvGrpSpPr>
+      <p:grpSpPr>
+        <a:xfrm>
+          <a:off x="0" y="0"/>
+          <a:ext cx="0" cy="0"/>
+          <a:chOff x="0" y="0"/>
+          <a:chExt cx="0" cy="0"/>
+        </a:xfrm>
+      </p:grpSpPr>
+      <p:pic>
+        <p:nvPicPr>
+          <p:cNvPr id="5" name="Picture 4">
+            <a:extLst>
+              <a:ext uri="{FF2B5EF4-FFF2-40B4-BE49-F238E27FC236}">
+                <a16:creationId xmlns:a16="http://schemas.microsoft.com/office/drawing/2014/main" id="{ACBED762-3EDF-24FC-7C2C-118207BDCA38}"/>
+              </a:ext>
+            </a:extLst>
+          </p:cNvPr>
+          <p:cNvPicPr>
+            <a:picLocks noChangeAspect="1"/>
+          </p:cNvPicPr>
+          <p:nvPr/>
+        </p:nvPicPr>
+        <p:blipFill>
+          <a:blip r:embed="rId2"/>
+          <a:stretch>
+            <a:fillRect/>
+          </a:stretch>
+        </p:blipFill>
+        <p:spPr>
+          <a:xfrm>
+            <a:off x="1355639" y="0"/>
+            <a:ext cx="9480722" cy="6858000"/>
+          </a:xfrm>
+          <a:prstGeom prst="rect">
+            <a:avLst/>
+          </a:prstGeom>
+        </p:spPr>
+      </p:pic>
+    </p:spTree>
+    <p:extLst>
+      <p:ext uri="{BB962C8B-B14F-4D97-AF65-F5344CB8AC3E}">
+        <p14:creationId xmlns:p14="http://schemas.microsoft.com/office/powerpoint/2010/main" val="203864322"/>
       </p:ext>
     </p:extLst>
   </p:cSld>
@@ -3841,8 +4416,8 @@
         </p:nvSpPr>
         <p:spPr>
           <a:xfrm>
-            <a:off x="3545840" y="396240"/>
-            <a:ext cx="4297680" cy="5069840"/>
+            <a:off x="7335520" y="233680"/>
+            <a:ext cx="4297680" cy="6116320"/>
           </a:xfrm>
           <a:prstGeom prst="rect">
             <a:avLst/>
@@ -3900,7 +4475,7 @@
         </p:nvSpPr>
         <p:spPr>
           <a:xfrm>
-            <a:off x="3698240" y="1026160"/>
+            <a:off x="7487920" y="863600"/>
             <a:ext cx="1960880" cy="944880"/>
           </a:xfrm>
           <a:prstGeom prst="roundRect">
@@ -3981,7 +4556,7 @@
         </p:nvSpPr>
         <p:spPr>
           <a:xfrm>
-            <a:off x="3698240" y="2123440"/>
+            <a:off x="7487920" y="1960880"/>
             <a:ext cx="1960880" cy="944880"/>
           </a:xfrm>
           <a:prstGeom prst="roundRect">
@@ -4062,7 +4637,7 @@
         </p:nvSpPr>
         <p:spPr>
           <a:xfrm>
-            <a:off x="3698240" y="3220720"/>
+            <a:off x="7487920" y="3058160"/>
             <a:ext cx="3962400" cy="944880"/>
           </a:xfrm>
           <a:prstGeom prst="roundRect">
@@ -4143,7 +4718,7 @@
         </p:nvSpPr>
         <p:spPr>
           <a:xfrm>
-            <a:off x="3698240" y="4318000"/>
+            <a:off x="7487920" y="4155440"/>
             <a:ext cx="4003040" cy="944880"/>
           </a:xfrm>
           <a:prstGeom prst="roundRect">
@@ -4224,7 +4799,7 @@
         </p:nvSpPr>
         <p:spPr>
           <a:xfrm>
-            <a:off x="5811520" y="1016000"/>
+            <a:off x="9601200" y="853440"/>
             <a:ext cx="1889760" cy="944880"/>
           </a:xfrm>
           <a:prstGeom prst="roundRect">
@@ -4305,7 +4880,7 @@
         </p:nvSpPr>
         <p:spPr>
           <a:xfrm>
-            <a:off x="5770880" y="2113280"/>
+            <a:off x="9560560" y="1950720"/>
             <a:ext cx="1889760" cy="944880"/>
           </a:xfrm>
           <a:prstGeom prst="roundRect">
@@ -4377,6 +4952,41 @@
               <a:ea typeface="Tahoma" panose="020B0604030504040204" pitchFamily="34" charset="0"/>
               <a:cs typeface="Tahoma" panose="020B0604030504040204" pitchFamily="34" charset="0"/>
             </a:endParaRPr>
+          </a:p>
+        </p:txBody>
+      </p:sp>
+      <p:sp>
+        <p:nvSpPr>
+          <p:cNvPr id="7" name="TextBox 6">
+            <a:extLst>
+              <a:ext uri="{FF2B5EF4-FFF2-40B4-BE49-F238E27FC236}">
+                <a16:creationId xmlns:a16="http://schemas.microsoft.com/office/drawing/2014/main" id="{72EAD905-2E10-64F9-F44F-921B20CA4D3B}"/>
+              </a:ext>
+            </a:extLst>
+          </p:cNvPr>
+          <p:cNvSpPr txBox="1"/>
+          <p:nvPr/>
+        </p:nvSpPr>
+        <p:spPr>
+          <a:xfrm>
+            <a:off x="934720" y="329922"/>
+            <a:ext cx="2586927" cy="553998"/>
+          </a:xfrm>
+          <a:prstGeom prst="rect">
+            <a:avLst/>
+          </a:prstGeom>
+          <a:noFill/>
+        </p:spPr>
+        <p:txBody>
+          <a:bodyPr wrap="none" rtlCol="0">
+            <a:spAutoFit/>
+          </a:bodyPr>
+          <a:lstStyle/>
+          <a:p>
+            <a:r>
+              <a:rPr lang="pt-PT" sz="3000" dirty="0"/>
+              <a:t>Menu Musicas</a:t>
+            </a:r>
           </a:p>
         </p:txBody>
       </p:sp>
@@ -4438,7 +5048,7 @@
         </p:nvSpPr>
         <p:spPr>
           <a:xfrm>
-            <a:off x="3545840" y="396240"/>
+            <a:off x="7051040" y="435987"/>
             <a:ext cx="4297680" cy="5986026"/>
           </a:xfrm>
           <a:prstGeom prst="rect">
@@ -4494,7 +5104,7 @@
         </p:nvSpPr>
         <p:spPr>
           <a:xfrm>
-            <a:off x="3698240" y="1026160"/>
+            <a:off x="7203440" y="1065907"/>
             <a:ext cx="1849120" cy="369332"/>
           </a:xfrm>
           <a:prstGeom prst="roundRect">
@@ -4583,7 +5193,7 @@
         </p:nvSpPr>
         <p:spPr>
           <a:xfrm>
-            <a:off x="3693160" y="1474986"/>
+            <a:off x="7198360" y="1514733"/>
             <a:ext cx="3911600" cy="548640"/>
           </a:xfrm>
           <a:prstGeom prst="roundRect">
@@ -4665,7 +5275,7 @@
                 <a:ea typeface="Tahoma" panose="020B0604030504040204" pitchFamily="34" charset="0"/>
                 <a:cs typeface="Tahoma" panose="020B0604030504040204" pitchFamily="34" charset="0"/>
               </a:rPr>
-              <a:t>Artista  </a:t>
+              <a:t>          Artista  </a:t>
             </a:r>
             <a:r>
               <a:rPr lang="pt-PT" dirty="0" err="1">
@@ -4703,7 +5313,7 @@
         </p:nvSpPr>
         <p:spPr>
           <a:xfrm>
-            <a:off x="3576320" y="475734"/>
+            <a:off x="7081520" y="515481"/>
             <a:ext cx="747384" cy="369332"/>
           </a:xfrm>
           <a:prstGeom prst="rect">
@@ -4742,7 +5352,7 @@
         </p:nvSpPr>
         <p:spPr>
           <a:xfrm>
-            <a:off x="4390368" y="475734"/>
+            <a:off x="7895568" y="515481"/>
             <a:ext cx="1461792" cy="369332"/>
           </a:xfrm>
           <a:prstGeom prst="rect">
@@ -4782,7 +5392,7 @@
         </p:nvSpPr>
         <p:spPr>
           <a:xfrm>
-            <a:off x="5755640" y="1026160"/>
+            <a:off x="9260840" y="1065907"/>
             <a:ext cx="1849120" cy="369332"/>
           </a:xfrm>
           <a:prstGeom prst="roundRect">
@@ -4863,7 +5473,7 @@
         </p:nvSpPr>
         <p:spPr>
           <a:xfrm>
-            <a:off x="3693160" y="2103120"/>
+            <a:off x="7198360" y="2142867"/>
             <a:ext cx="3911600" cy="548640"/>
           </a:xfrm>
           <a:prstGeom prst="roundRect">
@@ -4945,7 +5555,7 @@
                 <a:ea typeface="Tahoma" panose="020B0604030504040204" pitchFamily="34" charset="0"/>
                 <a:cs typeface="Tahoma" panose="020B0604030504040204" pitchFamily="34" charset="0"/>
               </a:rPr>
-              <a:t>Artista  </a:t>
+              <a:t>         Artista  </a:t>
             </a:r>
             <a:r>
               <a:rPr lang="pt-PT" dirty="0" err="1">
@@ -4983,7 +5593,7 @@
         </p:nvSpPr>
         <p:spPr>
           <a:xfrm>
-            <a:off x="3693160" y="2731254"/>
+            <a:off x="7198360" y="2771001"/>
             <a:ext cx="3911600" cy="548640"/>
           </a:xfrm>
           <a:prstGeom prst="roundRect">
@@ -5065,7 +5675,7 @@
                 <a:ea typeface="Tahoma" panose="020B0604030504040204" pitchFamily="34" charset="0"/>
                 <a:cs typeface="Tahoma" panose="020B0604030504040204" pitchFamily="34" charset="0"/>
               </a:rPr>
-              <a:t>Artista  </a:t>
+              <a:t>         Artista  </a:t>
             </a:r>
             <a:r>
               <a:rPr lang="pt-PT" dirty="0" err="1">
@@ -5103,7 +5713,7 @@
         </p:nvSpPr>
         <p:spPr>
           <a:xfrm>
-            <a:off x="3693160" y="3398798"/>
+            <a:off x="7198360" y="3438545"/>
             <a:ext cx="3911600" cy="548640"/>
           </a:xfrm>
           <a:prstGeom prst="roundRect">
@@ -5185,7 +5795,7 @@
                 <a:ea typeface="Tahoma" panose="020B0604030504040204" pitchFamily="34" charset="0"/>
                 <a:cs typeface="Tahoma" panose="020B0604030504040204" pitchFamily="34" charset="0"/>
               </a:rPr>
-              <a:t>Artista  </a:t>
+              <a:t>         Artista  </a:t>
             </a:r>
             <a:r>
               <a:rPr lang="pt-PT" dirty="0" err="1">
@@ -5223,7 +5833,7 @@
         </p:nvSpPr>
         <p:spPr>
           <a:xfrm>
-            <a:off x="3693160" y="4066342"/>
+            <a:off x="7198360" y="4106089"/>
             <a:ext cx="3911600" cy="548640"/>
           </a:xfrm>
           <a:prstGeom prst="roundRect">
@@ -5305,7 +5915,7 @@
                 <a:ea typeface="Tahoma" panose="020B0604030504040204" pitchFamily="34" charset="0"/>
                 <a:cs typeface="Tahoma" panose="020B0604030504040204" pitchFamily="34" charset="0"/>
               </a:rPr>
-              <a:t>Artista  </a:t>
+              <a:t>         Artista  </a:t>
             </a:r>
             <a:r>
               <a:rPr lang="pt-PT" dirty="0" err="1">
@@ -5343,7 +5953,7 @@
         </p:nvSpPr>
         <p:spPr>
           <a:xfrm>
-            <a:off x="3693160" y="4732774"/>
+            <a:off x="7198360" y="4772521"/>
             <a:ext cx="3911600" cy="548640"/>
           </a:xfrm>
           <a:prstGeom prst="roundRect">
@@ -5425,7 +6035,7 @@
                 <a:ea typeface="Tahoma" panose="020B0604030504040204" pitchFamily="34" charset="0"/>
                 <a:cs typeface="Tahoma" panose="020B0604030504040204" pitchFamily="34" charset="0"/>
               </a:rPr>
-              <a:t>Artista  </a:t>
+              <a:t>         Artista  </a:t>
             </a:r>
             <a:r>
               <a:rPr lang="pt-PT" dirty="0" err="1">
@@ -5463,7 +6073,7 @@
         </p:nvSpPr>
         <p:spPr>
           <a:xfrm>
-            <a:off x="3693160" y="5399206"/>
+            <a:off x="7198360" y="5438953"/>
             <a:ext cx="3911600" cy="548640"/>
           </a:xfrm>
           <a:prstGeom prst="roundRect">
@@ -5545,7 +6155,7 @@
                 <a:ea typeface="Tahoma" panose="020B0604030504040204" pitchFamily="34" charset="0"/>
                 <a:cs typeface="Tahoma" panose="020B0604030504040204" pitchFamily="34" charset="0"/>
               </a:rPr>
-              <a:t>Artista  </a:t>
+              <a:t>         Artista  </a:t>
             </a:r>
             <a:r>
               <a:rPr lang="pt-PT" dirty="0" err="1">
@@ -5583,7 +6193,7 @@
         </p:nvSpPr>
         <p:spPr>
           <a:xfrm>
-            <a:off x="3576320" y="5831840"/>
+            <a:off x="7081520" y="5871587"/>
             <a:ext cx="4246880" cy="548640"/>
           </a:xfrm>
           <a:prstGeom prst="rect">
@@ -5625,10 +6235,5009 @@
           </a:p>
         </p:txBody>
       </p:sp>
+      <p:sp>
+        <p:nvSpPr>
+          <p:cNvPr id="28" name="TextBox 27">
+            <a:extLst>
+              <a:ext uri="{FF2B5EF4-FFF2-40B4-BE49-F238E27FC236}">
+                <a16:creationId xmlns:a16="http://schemas.microsoft.com/office/drawing/2014/main" id="{B4D53BA5-B9A7-1B65-9C6B-220F0146D756}"/>
+              </a:ext>
+            </a:extLst>
+          </p:cNvPr>
+          <p:cNvSpPr txBox="1"/>
+          <p:nvPr/>
+        </p:nvSpPr>
+        <p:spPr>
+          <a:xfrm>
+            <a:off x="934720" y="329922"/>
+            <a:ext cx="2250424" cy="553998"/>
+          </a:xfrm>
+          <a:prstGeom prst="rect">
+            <a:avLst/>
+          </a:prstGeom>
+          <a:noFill/>
+        </p:spPr>
+        <p:txBody>
+          <a:bodyPr wrap="none" rtlCol="0">
+            <a:spAutoFit/>
+          </a:bodyPr>
+          <a:lstStyle/>
+          <a:p>
+            <a:r>
+              <a:rPr lang="pt-PT" sz="3000" dirty="0"/>
+              <a:t>Menu Faixas</a:t>
+            </a:r>
+          </a:p>
+        </p:txBody>
+      </p:sp>
     </p:spTree>
     <p:extLst>
       <p:ext uri="{BB962C8B-B14F-4D97-AF65-F5344CB8AC3E}">
         <p14:creationId xmlns:p14="http://schemas.microsoft.com/office/powerpoint/2010/main" val="2819408273"/>
+      </p:ext>
+    </p:extLst>
+  </p:cSld>
+  <p:clrMapOvr>
+    <a:masterClrMapping/>
+  </p:clrMapOvr>
+</p:sld>
+</file>
+
+<file path=ppt/slides/slide4.xml><?xml version="1.0" encoding="utf-8"?>
+<p:sld xmlns:a="http://schemas.openxmlformats.org/drawingml/2006/main" xmlns:r="http://schemas.openxmlformats.org/officeDocument/2006/relationships" xmlns:p="http://schemas.openxmlformats.org/presentationml/2006/main">
+  <p:cSld>
+    <p:spTree>
+      <p:nvGrpSpPr>
+        <p:cNvPr id="1" name="">
+          <a:extLst>
+            <a:ext uri="{FF2B5EF4-FFF2-40B4-BE49-F238E27FC236}">
+              <a16:creationId xmlns:a16="http://schemas.microsoft.com/office/drawing/2014/main" id="{24565B96-BF81-418D-9A9B-AB31CA018153}"/>
+            </a:ext>
+          </a:extLst>
+        </p:cNvPr>
+        <p:cNvGrpSpPr/>
+        <p:nvPr/>
+      </p:nvGrpSpPr>
+      <p:grpSpPr>
+        <a:xfrm>
+          <a:off x="0" y="0"/>
+          <a:ext cx="0" cy="0"/>
+          <a:chOff x="0" y="0"/>
+          <a:chExt cx="0" cy="0"/>
+        </a:xfrm>
+      </p:grpSpPr>
+      <p:sp>
+        <p:nvSpPr>
+          <p:cNvPr id="23" name="Rectangle 22">
+            <a:extLst>
+              <a:ext uri="{FF2B5EF4-FFF2-40B4-BE49-F238E27FC236}">
+                <a16:creationId xmlns:a16="http://schemas.microsoft.com/office/drawing/2014/main" id="{A05B1E15-4689-39E7-17D2-2D4803652537}"/>
+              </a:ext>
+            </a:extLst>
+          </p:cNvPr>
+          <p:cNvSpPr/>
+          <p:nvPr/>
+        </p:nvSpPr>
+        <p:spPr>
+          <a:xfrm>
+            <a:off x="7051040" y="435987"/>
+            <a:ext cx="4297680" cy="5986026"/>
+          </a:xfrm>
+          <a:prstGeom prst="rect">
+            <a:avLst/>
+          </a:prstGeom>
+          <a:solidFill>
+            <a:schemeClr val="tx2">
+              <a:lumMod val="50000"/>
+              <a:lumOff val="50000"/>
+            </a:schemeClr>
+          </a:solidFill>
+        </p:spPr>
+        <p:style>
+          <a:lnRef idx="2">
+            <a:schemeClr val="accent1">
+              <a:shade val="15000"/>
+            </a:schemeClr>
+          </a:lnRef>
+          <a:fillRef idx="1">
+            <a:schemeClr val="accent1"/>
+          </a:fillRef>
+          <a:effectRef idx="0">
+            <a:schemeClr val="accent1"/>
+          </a:effectRef>
+          <a:fontRef idx="minor">
+            <a:schemeClr val="lt1"/>
+          </a:fontRef>
+        </p:style>
+        <p:txBody>
+          <a:bodyPr rtlCol="0" anchor="t" anchorCtr="0"/>
+          <a:lstStyle/>
+          <a:p>
+            <a:pPr algn="ctr"/>
+            <a:endParaRPr lang="pt-PT" sz="3000" dirty="0">
+              <a:solidFill>
+                <a:schemeClr val="bg1"/>
+              </a:solidFill>
+            </a:endParaRPr>
+          </a:p>
+        </p:txBody>
+      </p:sp>
+      <p:sp>
+        <p:nvSpPr>
+          <p:cNvPr id="3" name="Rectangle: Rounded Corners 2">
+            <a:extLst>
+              <a:ext uri="{FF2B5EF4-FFF2-40B4-BE49-F238E27FC236}">
+                <a16:creationId xmlns:a16="http://schemas.microsoft.com/office/drawing/2014/main" id="{239FAE12-9771-2767-7D9E-C7801D44EC88}"/>
+              </a:ext>
+            </a:extLst>
+          </p:cNvPr>
+          <p:cNvSpPr/>
+          <p:nvPr/>
+        </p:nvSpPr>
+        <p:spPr>
+          <a:xfrm>
+            <a:off x="7211129" y="1103590"/>
+            <a:ext cx="3911600" cy="548640"/>
+          </a:xfrm>
+          <a:prstGeom prst="roundRect">
+            <a:avLst/>
+          </a:prstGeom>
+          <a:gradFill>
+            <a:gsLst>
+              <a:gs pos="0">
+                <a:schemeClr val="accent6">
+                  <a:lumMod val="75000"/>
+                </a:schemeClr>
+              </a:gs>
+              <a:gs pos="92000">
+                <a:schemeClr val="accent6">
+                  <a:lumMod val="105000"/>
+                  <a:satMod val="103000"/>
+                  <a:tint val="73000"/>
+                </a:schemeClr>
+              </a:gs>
+              <a:gs pos="100000">
+                <a:schemeClr val="accent6">
+                  <a:lumMod val="105000"/>
+                  <a:satMod val="109000"/>
+                  <a:tint val="81000"/>
+                </a:schemeClr>
+              </a:gs>
+            </a:gsLst>
+            <a:lin ang="5400000" scaled="0"/>
+          </a:gradFill>
+          <a:ln>
+            <a:noFill/>
+          </a:ln>
+        </p:spPr>
+        <p:style>
+          <a:lnRef idx="0">
+            <a:scrgbClr r="0" g="0" b="0"/>
+          </a:lnRef>
+          <a:fillRef idx="0">
+            <a:scrgbClr r="0" g="0" b="0"/>
+          </a:fillRef>
+          <a:effectRef idx="0">
+            <a:scrgbClr r="0" g="0" b="0"/>
+          </a:effectRef>
+          <a:fontRef idx="minor">
+            <a:schemeClr val="lt1"/>
+          </a:fontRef>
+        </p:style>
+        <p:txBody>
+          <a:bodyPr rtlCol="0" anchor="ctr"/>
+          <a:lstStyle/>
+          <a:p>
+            <a:r>
+              <a:rPr lang="pt-PT" dirty="0">
+                <a:solidFill>
+                  <a:schemeClr val="tx1"/>
+                </a:solidFill>
+                <a:latin typeface="Aptos Mono" panose="020F0502020204030204" pitchFamily="49" charset="0"/>
+                <a:ea typeface="Tahoma" panose="020B0604030504040204" pitchFamily="34" charset="0"/>
+                <a:cs typeface="Tahoma" panose="020B0604030504040204" pitchFamily="34" charset="0"/>
+              </a:rPr>
+              <a:t>Definir pasta musicas</a:t>
+            </a:r>
+          </a:p>
+        </p:txBody>
+      </p:sp>
+      <p:sp>
+        <p:nvSpPr>
+          <p:cNvPr id="4" name="TextBox 3">
+            <a:extLst>
+              <a:ext uri="{FF2B5EF4-FFF2-40B4-BE49-F238E27FC236}">
+                <a16:creationId xmlns:a16="http://schemas.microsoft.com/office/drawing/2014/main" id="{79DC29DF-5832-877B-8206-AA1A304AC503}"/>
+              </a:ext>
+            </a:extLst>
+          </p:cNvPr>
+          <p:cNvSpPr txBox="1"/>
+          <p:nvPr/>
+        </p:nvSpPr>
+        <p:spPr>
+          <a:xfrm>
+            <a:off x="7081520" y="515481"/>
+            <a:ext cx="747384" cy="369332"/>
+          </a:xfrm>
+          <a:prstGeom prst="rect">
+            <a:avLst/>
+          </a:prstGeom>
+          <a:noFill/>
+        </p:spPr>
+        <p:txBody>
+          <a:bodyPr wrap="none" rtlCol="0">
+            <a:spAutoFit/>
+          </a:bodyPr>
+          <a:lstStyle/>
+          <a:p>
+            <a:r>
+              <a:rPr lang="pt-PT" dirty="0">
+                <a:solidFill>
+                  <a:schemeClr val="bg1"/>
+                </a:solidFill>
+              </a:rPr>
+              <a:t>voltar</a:t>
+            </a:r>
+          </a:p>
+        </p:txBody>
+      </p:sp>
+      <p:sp>
+        <p:nvSpPr>
+          <p:cNvPr id="7" name="TextBox 6">
+            <a:extLst>
+              <a:ext uri="{FF2B5EF4-FFF2-40B4-BE49-F238E27FC236}">
+                <a16:creationId xmlns:a16="http://schemas.microsoft.com/office/drawing/2014/main" id="{43FA6614-72E1-CE98-9F8C-0B20E049A83F}"/>
+              </a:ext>
+            </a:extLst>
+          </p:cNvPr>
+          <p:cNvSpPr txBox="1"/>
+          <p:nvPr/>
+        </p:nvSpPr>
+        <p:spPr>
+          <a:xfrm>
+            <a:off x="9454504" y="515481"/>
+            <a:ext cx="1461792" cy="369332"/>
+          </a:xfrm>
+          <a:prstGeom prst="rect">
+            <a:avLst/>
+          </a:prstGeom>
+          <a:noFill/>
+        </p:spPr>
+        <p:txBody>
+          <a:bodyPr wrap="square" rtlCol="0">
+            <a:spAutoFit/>
+          </a:bodyPr>
+          <a:lstStyle/>
+          <a:p>
+            <a:pPr algn="ctr"/>
+            <a:r>
+              <a:rPr lang="pt-PT" dirty="0">
+                <a:solidFill>
+                  <a:schemeClr val="bg1"/>
+                </a:solidFill>
+              </a:rPr>
+              <a:t>Gravar</a:t>
+            </a:r>
+          </a:p>
+        </p:txBody>
+      </p:sp>
+      <p:sp>
+        <p:nvSpPr>
+          <p:cNvPr id="11" name="Rectangle: Rounded Corners 10">
+            <a:extLst>
+              <a:ext uri="{FF2B5EF4-FFF2-40B4-BE49-F238E27FC236}">
+                <a16:creationId xmlns:a16="http://schemas.microsoft.com/office/drawing/2014/main" id="{345AFFDE-B0AC-0C19-01E6-B9D77B819D78}"/>
+              </a:ext>
+            </a:extLst>
+          </p:cNvPr>
+          <p:cNvSpPr/>
+          <p:nvPr/>
+        </p:nvSpPr>
+        <p:spPr>
+          <a:xfrm>
+            <a:off x="7198360" y="1827351"/>
+            <a:ext cx="3911600" cy="548640"/>
+          </a:xfrm>
+          <a:prstGeom prst="roundRect">
+            <a:avLst/>
+          </a:prstGeom>
+          <a:gradFill>
+            <a:gsLst>
+              <a:gs pos="0">
+                <a:schemeClr val="accent6">
+                  <a:lumMod val="75000"/>
+                </a:schemeClr>
+              </a:gs>
+              <a:gs pos="92000">
+                <a:schemeClr val="accent6">
+                  <a:lumMod val="105000"/>
+                  <a:satMod val="103000"/>
+                  <a:tint val="73000"/>
+                </a:schemeClr>
+              </a:gs>
+              <a:gs pos="100000">
+                <a:schemeClr val="accent6">
+                  <a:lumMod val="105000"/>
+                  <a:satMod val="109000"/>
+                  <a:tint val="81000"/>
+                </a:schemeClr>
+              </a:gs>
+            </a:gsLst>
+            <a:lin ang="5400000" scaled="0"/>
+          </a:gradFill>
+          <a:ln>
+            <a:noFill/>
+          </a:ln>
+        </p:spPr>
+        <p:style>
+          <a:lnRef idx="0">
+            <a:scrgbClr r="0" g="0" b="0"/>
+          </a:lnRef>
+          <a:fillRef idx="0">
+            <a:scrgbClr r="0" g="0" b="0"/>
+          </a:fillRef>
+          <a:effectRef idx="0">
+            <a:scrgbClr r="0" g="0" b="0"/>
+          </a:effectRef>
+          <a:fontRef idx="minor">
+            <a:schemeClr val="lt1"/>
+          </a:fontRef>
+        </p:style>
+        <p:txBody>
+          <a:bodyPr rtlCol="0" anchor="ctr"/>
+          <a:lstStyle/>
+          <a:p>
+            <a:r>
+              <a:rPr lang="pt-PT" dirty="0">
+                <a:solidFill>
+                  <a:schemeClr val="tx1"/>
+                </a:solidFill>
+                <a:latin typeface="Aptos Mono" panose="020F0502020204030204" pitchFamily="49" charset="0"/>
+                <a:ea typeface="Tahoma" panose="020B0604030504040204" pitchFamily="34" charset="0"/>
+                <a:cs typeface="Tahoma" panose="020B0604030504040204" pitchFamily="34" charset="0"/>
+              </a:rPr>
+              <a:t>Analisar ao abrir a App</a:t>
+            </a:r>
+          </a:p>
+        </p:txBody>
+      </p:sp>
+      <p:sp>
+        <p:nvSpPr>
+          <p:cNvPr id="14" name="Rectangle: Rounded Corners 13">
+            <a:extLst>
+              <a:ext uri="{FF2B5EF4-FFF2-40B4-BE49-F238E27FC236}">
+                <a16:creationId xmlns:a16="http://schemas.microsoft.com/office/drawing/2014/main" id="{06E816DB-A6F5-A2C5-B9E7-8A1CF8A640E4}"/>
+              </a:ext>
+            </a:extLst>
+          </p:cNvPr>
+          <p:cNvSpPr/>
+          <p:nvPr/>
+        </p:nvSpPr>
+        <p:spPr>
+          <a:xfrm>
+            <a:off x="7198360" y="2534305"/>
+            <a:ext cx="3911600" cy="548640"/>
+          </a:xfrm>
+          <a:prstGeom prst="roundRect">
+            <a:avLst/>
+          </a:prstGeom>
+          <a:gradFill>
+            <a:gsLst>
+              <a:gs pos="0">
+                <a:schemeClr val="accent6">
+                  <a:lumMod val="75000"/>
+                </a:schemeClr>
+              </a:gs>
+              <a:gs pos="92000">
+                <a:schemeClr val="accent6">
+                  <a:lumMod val="105000"/>
+                  <a:satMod val="103000"/>
+                  <a:tint val="73000"/>
+                </a:schemeClr>
+              </a:gs>
+              <a:gs pos="100000">
+                <a:schemeClr val="accent6">
+                  <a:lumMod val="105000"/>
+                  <a:satMod val="109000"/>
+                  <a:tint val="81000"/>
+                </a:schemeClr>
+              </a:gs>
+            </a:gsLst>
+            <a:lin ang="5400000" scaled="0"/>
+          </a:gradFill>
+          <a:ln>
+            <a:noFill/>
+          </a:ln>
+        </p:spPr>
+        <p:style>
+          <a:lnRef idx="0">
+            <a:scrgbClr r="0" g="0" b="0"/>
+          </a:lnRef>
+          <a:fillRef idx="0">
+            <a:scrgbClr r="0" g="0" b="0"/>
+          </a:fillRef>
+          <a:effectRef idx="0">
+            <a:scrgbClr r="0" g="0" b="0"/>
+          </a:effectRef>
+          <a:fontRef idx="minor">
+            <a:schemeClr val="lt1"/>
+          </a:fontRef>
+        </p:style>
+        <p:txBody>
+          <a:bodyPr rtlCol="0" anchor="ctr"/>
+          <a:lstStyle/>
+          <a:p>
+            <a:r>
+              <a:rPr lang="pt-PT" dirty="0">
+                <a:solidFill>
+                  <a:schemeClr val="tx1"/>
+                </a:solidFill>
+                <a:latin typeface="Aptos Mono" panose="020F0502020204030204" pitchFamily="49" charset="0"/>
+                <a:ea typeface="Tahoma" panose="020B0604030504040204" pitchFamily="34" charset="0"/>
+                <a:cs typeface="Tahoma" panose="020B0604030504040204" pitchFamily="34" charset="0"/>
+              </a:rPr>
+              <a:t>Modo light/</a:t>
+            </a:r>
+            <a:r>
+              <a:rPr lang="pt-PT" dirty="0" err="1">
+                <a:solidFill>
+                  <a:schemeClr val="tx1"/>
+                </a:solidFill>
+                <a:latin typeface="Aptos Mono" panose="020F0502020204030204" pitchFamily="49" charset="0"/>
+                <a:ea typeface="Tahoma" panose="020B0604030504040204" pitchFamily="34" charset="0"/>
+                <a:cs typeface="Tahoma" panose="020B0604030504040204" pitchFamily="34" charset="0"/>
+              </a:rPr>
+              <a:t>dark</a:t>
+            </a:r>
+            <a:endParaRPr lang="pt-PT" dirty="0">
+              <a:solidFill>
+                <a:schemeClr val="tx1"/>
+              </a:solidFill>
+              <a:latin typeface="Aptos Mono" panose="020F0502020204030204" pitchFamily="49" charset="0"/>
+              <a:ea typeface="Tahoma" panose="020B0604030504040204" pitchFamily="34" charset="0"/>
+              <a:cs typeface="Tahoma" panose="020B0604030504040204" pitchFamily="34" charset="0"/>
+            </a:endParaRPr>
+          </a:p>
+        </p:txBody>
+      </p:sp>
+      <p:sp>
+        <p:nvSpPr>
+          <p:cNvPr id="17" name="Rectangle: Rounded Corners 16">
+            <a:extLst>
+              <a:ext uri="{FF2B5EF4-FFF2-40B4-BE49-F238E27FC236}">
+                <a16:creationId xmlns:a16="http://schemas.microsoft.com/office/drawing/2014/main" id="{5CCD64D8-E85B-8BB6-7BC7-98C64F3416CD}"/>
+              </a:ext>
+            </a:extLst>
+          </p:cNvPr>
+          <p:cNvSpPr/>
+          <p:nvPr/>
+        </p:nvSpPr>
+        <p:spPr>
+          <a:xfrm>
+            <a:off x="7198360" y="3238019"/>
+            <a:ext cx="3911600" cy="548640"/>
+          </a:xfrm>
+          <a:prstGeom prst="roundRect">
+            <a:avLst/>
+          </a:prstGeom>
+          <a:gradFill>
+            <a:gsLst>
+              <a:gs pos="0">
+                <a:schemeClr val="accent6">
+                  <a:lumMod val="75000"/>
+                </a:schemeClr>
+              </a:gs>
+              <a:gs pos="92000">
+                <a:schemeClr val="accent6">
+                  <a:lumMod val="105000"/>
+                  <a:satMod val="103000"/>
+                  <a:tint val="73000"/>
+                </a:schemeClr>
+              </a:gs>
+              <a:gs pos="100000">
+                <a:schemeClr val="accent6">
+                  <a:lumMod val="105000"/>
+                  <a:satMod val="109000"/>
+                  <a:tint val="81000"/>
+                </a:schemeClr>
+              </a:gs>
+            </a:gsLst>
+            <a:lin ang="5400000" scaled="0"/>
+          </a:gradFill>
+          <a:ln>
+            <a:noFill/>
+          </a:ln>
+        </p:spPr>
+        <p:style>
+          <a:lnRef idx="0">
+            <a:scrgbClr r="0" g="0" b="0"/>
+          </a:lnRef>
+          <a:fillRef idx="0">
+            <a:scrgbClr r="0" g="0" b="0"/>
+          </a:fillRef>
+          <a:effectRef idx="0">
+            <a:scrgbClr r="0" g="0" b="0"/>
+          </a:effectRef>
+          <a:fontRef idx="minor">
+            <a:schemeClr val="lt1"/>
+          </a:fontRef>
+        </p:style>
+        <p:txBody>
+          <a:bodyPr rtlCol="0" anchor="ctr"/>
+          <a:lstStyle/>
+          <a:p>
+            <a:r>
+              <a:rPr lang="pt-PT" dirty="0">
+                <a:solidFill>
+                  <a:schemeClr val="tx1"/>
+                </a:solidFill>
+                <a:latin typeface="Aptos Mono" panose="020F0502020204030204" pitchFamily="49" charset="0"/>
+                <a:ea typeface="Tahoma" panose="020B0604030504040204" pitchFamily="34" charset="0"/>
+                <a:cs typeface="Tahoma" panose="020B0604030504040204" pitchFamily="34" charset="0"/>
+              </a:rPr>
+              <a:t>Configurar rádios online</a:t>
+            </a:r>
+          </a:p>
+        </p:txBody>
+      </p:sp>
+      <p:sp>
+        <p:nvSpPr>
+          <p:cNvPr id="19" name="Rectangle: Rounded Corners 18">
+            <a:extLst>
+              <a:ext uri="{FF2B5EF4-FFF2-40B4-BE49-F238E27FC236}">
+                <a16:creationId xmlns:a16="http://schemas.microsoft.com/office/drawing/2014/main" id="{B842B3EC-BF8A-3295-A03B-6F2771DE52DD}"/>
+              </a:ext>
+            </a:extLst>
+          </p:cNvPr>
+          <p:cNvSpPr/>
+          <p:nvPr/>
+        </p:nvSpPr>
+        <p:spPr>
+          <a:xfrm>
+            <a:off x="7211129" y="3928626"/>
+            <a:ext cx="3911600" cy="548640"/>
+          </a:xfrm>
+          <a:prstGeom prst="roundRect">
+            <a:avLst/>
+          </a:prstGeom>
+          <a:gradFill>
+            <a:gsLst>
+              <a:gs pos="0">
+                <a:schemeClr val="accent6">
+                  <a:lumMod val="75000"/>
+                </a:schemeClr>
+              </a:gs>
+              <a:gs pos="92000">
+                <a:schemeClr val="accent6">
+                  <a:lumMod val="105000"/>
+                  <a:satMod val="103000"/>
+                  <a:tint val="73000"/>
+                </a:schemeClr>
+              </a:gs>
+              <a:gs pos="100000">
+                <a:schemeClr val="accent6">
+                  <a:lumMod val="105000"/>
+                  <a:satMod val="109000"/>
+                  <a:tint val="81000"/>
+                </a:schemeClr>
+              </a:gs>
+            </a:gsLst>
+            <a:lin ang="5400000" scaled="0"/>
+          </a:gradFill>
+          <a:ln>
+            <a:noFill/>
+          </a:ln>
+        </p:spPr>
+        <p:style>
+          <a:lnRef idx="0">
+            <a:scrgbClr r="0" g="0" b="0"/>
+          </a:lnRef>
+          <a:fillRef idx="0">
+            <a:scrgbClr r="0" g="0" b="0"/>
+          </a:fillRef>
+          <a:effectRef idx="0">
+            <a:scrgbClr r="0" g="0" b="0"/>
+          </a:effectRef>
+          <a:fontRef idx="minor">
+            <a:schemeClr val="lt1"/>
+          </a:fontRef>
+        </p:style>
+        <p:txBody>
+          <a:bodyPr rtlCol="0" anchor="ctr"/>
+          <a:lstStyle/>
+          <a:p>
+            <a:r>
+              <a:rPr lang="pt-PT" dirty="0">
+                <a:solidFill>
+                  <a:schemeClr val="tx1"/>
+                </a:solidFill>
+                <a:latin typeface="Aptos Mono" panose="020F0502020204030204" pitchFamily="49" charset="0"/>
+                <a:ea typeface="Tahoma" panose="020B0604030504040204" pitchFamily="34" charset="0"/>
+                <a:cs typeface="Tahoma" panose="020B0604030504040204" pitchFamily="34" charset="0"/>
+              </a:rPr>
+              <a:t>Configurar imagem de fundo</a:t>
+            </a:r>
+          </a:p>
+        </p:txBody>
+      </p:sp>
+      <p:sp>
+        <p:nvSpPr>
+          <p:cNvPr id="28" name="TextBox 27">
+            <a:extLst>
+              <a:ext uri="{FF2B5EF4-FFF2-40B4-BE49-F238E27FC236}">
+                <a16:creationId xmlns:a16="http://schemas.microsoft.com/office/drawing/2014/main" id="{94CE25FB-CC7F-159B-C1C8-5F1DDCE29259}"/>
+              </a:ext>
+            </a:extLst>
+          </p:cNvPr>
+          <p:cNvSpPr txBox="1"/>
+          <p:nvPr/>
+        </p:nvSpPr>
+        <p:spPr>
+          <a:xfrm>
+            <a:off x="934720" y="329922"/>
+            <a:ext cx="3618042" cy="553998"/>
+          </a:xfrm>
+          <a:prstGeom prst="rect">
+            <a:avLst/>
+          </a:prstGeom>
+          <a:noFill/>
+        </p:spPr>
+        <p:txBody>
+          <a:bodyPr wrap="none" rtlCol="0">
+            <a:spAutoFit/>
+          </a:bodyPr>
+          <a:lstStyle/>
+          <a:p>
+            <a:r>
+              <a:rPr lang="pt-PT" sz="3000" dirty="0"/>
+              <a:t>Menu Configurações</a:t>
+            </a:r>
+          </a:p>
+        </p:txBody>
+      </p:sp>
+    </p:spTree>
+    <p:extLst>
+      <p:ext uri="{BB962C8B-B14F-4D97-AF65-F5344CB8AC3E}">
+        <p14:creationId xmlns:p14="http://schemas.microsoft.com/office/powerpoint/2010/main" val="3029100446"/>
+      </p:ext>
+    </p:extLst>
+  </p:cSld>
+  <p:clrMapOvr>
+    <a:masterClrMapping/>
+  </p:clrMapOvr>
+</p:sld>
+</file>
+
+<file path=ppt/slides/slide5.xml><?xml version="1.0" encoding="utf-8"?>
+<p:sld xmlns:a="http://schemas.openxmlformats.org/drawingml/2006/main" xmlns:r="http://schemas.openxmlformats.org/officeDocument/2006/relationships" xmlns:p="http://schemas.openxmlformats.org/presentationml/2006/main">
+  <p:cSld>
+    <p:spTree>
+      <p:nvGrpSpPr>
+        <p:cNvPr id="1" name="">
+          <a:extLst>
+            <a:ext uri="{FF2B5EF4-FFF2-40B4-BE49-F238E27FC236}">
+              <a16:creationId xmlns:a16="http://schemas.microsoft.com/office/drawing/2014/main" id="{8124BD3D-ACFA-F909-01F4-F6CEA870302F}"/>
+            </a:ext>
+          </a:extLst>
+        </p:cNvPr>
+        <p:cNvGrpSpPr/>
+        <p:nvPr/>
+      </p:nvGrpSpPr>
+      <p:grpSpPr>
+        <a:xfrm>
+          <a:off x="0" y="0"/>
+          <a:ext cx="0" cy="0"/>
+          <a:chOff x="0" y="0"/>
+          <a:chExt cx="0" cy="0"/>
+        </a:xfrm>
+      </p:grpSpPr>
+      <p:sp>
+        <p:nvSpPr>
+          <p:cNvPr id="23" name="Rectangle 22">
+            <a:extLst>
+              <a:ext uri="{FF2B5EF4-FFF2-40B4-BE49-F238E27FC236}">
+                <a16:creationId xmlns:a16="http://schemas.microsoft.com/office/drawing/2014/main" id="{CB69D8C6-B13C-43DC-521F-0BD3B4934E7B}"/>
+              </a:ext>
+            </a:extLst>
+          </p:cNvPr>
+          <p:cNvSpPr/>
+          <p:nvPr/>
+        </p:nvSpPr>
+        <p:spPr>
+          <a:xfrm>
+            <a:off x="7051040" y="435987"/>
+            <a:ext cx="4297680" cy="5986026"/>
+          </a:xfrm>
+          <a:prstGeom prst="rect">
+            <a:avLst/>
+          </a:prstGeom>
+          <a:solidFill>
+            <a:schemeClr val="tx2">
+              <a:lumMod val="50000"/>
+              <a:lumOff val="50000"/>
+            </a:schemeClr>
+          </a:solidFill>
+        </p:spPr>
+        <p:style>
+          <a:lnRef idx="2">
+            <a:schemeClr val="accent1">
+              <a:shade val="15000"/>
+            </a:schemeClr>
+          </a:lnRef>
+          <a:fillRef idx="1">
+            <a:schemeClr val="accent1"/>
+          </a:fillRef>
+          <a:effectRef idx="0">
+            <a:schemeClr val="accent1"/>
+          </a:effectRef>
+          <a:fontRef idx="minor">
+            <a:schemeClr val="lt1"/>
+          </a:fontRef>
+        </p:style>
+        <p:txBody>
+          <a:bodyPr rtlCol="0" anchor="t" anchorCtr="0"/>
+          <a:lstStyle/>
+          <a:p>
+            <a:pPr algn="ctr"/>
+            <a:endParaRPr lang="pt-PT" sz="3000" dirty="0">
+              <a:solidFill>
+                <a:schemeClr val="bg1"/>
+              </a:solidFill>
+            </a:endParaRPr>
+          </a:p>
+        </p:txBody>
+      </p:sp>
+      <p:sp>
+        <p:nvSpPr>
+          <p:cNvPr id="3" name="Rectangle: Rounded Corners 2">
+            <a:extLst>
+              <a:ext uri="{FF2B5EF4-FFF2-40B4-BE49-F238E27FC236}">
+                <a16:creationId xmlns:a16="http://schemas.microsoft.com/office/drawing/2014/main" id="{5F36F4D1-446B-A236-C2D4-F1299AD829E3}"/>
+              </a:ext>
+            </a:extLst>
+          </p:cNvPr>
+          <p:cNvSpPr/>
+          <p:nvPr/>
+        </p:nvSpPr>
+        <p:spPr>
+          <a:xfrm>
+            <a:off x="7198360" y="1159807"/>
+            <a:ext cx="1894840" cy="864156"/>
+          </a:xfrm>
+          <a:prstGeom prst="roundRect">
+            <a:avLst/>
+          </a:prstGeom>
+          <a:gradFill>
+            <a:gsLst>
+              <a:gs pos="0">
+                <a:schemeClr val="accent6">
+                  <a:lumMod val="75000"/>
+                </a:schemeClr>
+              </a:gs>
+              <a:gs pos="92000">
+                <a:schemeClr val="accent6">
+                  <a:lumMod val="105000"/>
+                  <a:satMod val="103000"/>
+                  <a:tint val="73000"/>
+                </a:schemeClr>
+              </a:gs>
+              <a:gs pos="100000">
+                <a:schemeClr val="accent6">
+                  <a:lumMod val="105000"/>
+                  <a:satMod val="109000"/>
+                  <a:tint val="81000"/>
+                </a:schemeClr>
+              </a:gs>
+            </a:gsLst>
+            <a:lin ang="5400000" scaled="0"/>
+          </a:gradFill>
+          <a:ln>
+            <a:noFill/>
+          </a:ln>
+        </p:spPr>
+        <p:style>
+          <a:lnRef idx="0">
+            <a:scrgbClr r="0" g="0" b="0"/>
+          </a:lnRef>
+          <a:fillRef idx="0">
+            <a:scrgbClr r="0" g="0" b="0"/>
+          </a:fillRef>
+          <a:effectRef idx="0">
+            <a:scrgbClr r="0" g="0" b="0"/>
+          </a:effectRef>
+          <a:fontRef idx="minor">
+            <a:schemeClr val="lt1"/>
+          </a:fontRef>
+        </p:style>
+        <p:txBody>
+          <a:bodyPr rtlCol="0" anchor="ctr"/>
+          <a:lstStyle/>
+          <a:p>
+            <a:pPr algn="ctr"/>
+            <a:r>
+              <a:rPr lang="pt-PT" dirty="0">
+                <a:solidFill>
+                  <a:schemeClr val="tx1"/>
+                </a:solidFill>
+                <a:latin typeface="Aptos Mono" panose="020F0502020204030204" pitchFamily="49" charset="0"/>
+                <a:ea typeface="Tahoma" panose="020B0604030504040204" pitchFamily="34" charset="0"/>
+                <a:cs typeface="Tahoma" panose="020B0604030504040204" pitchFamily="34" charset="0"/>
+              </a:rPr>
+              <a:t>Nome da pasta</a:t>
+            </a:r>
+          </a:p>
+        </p:txBody>
+      </p:sp>
+      <p:sp>
+        <p:nvSpPr>
+          <p:cNvPr id="4" name="TextBox 3">
+            <a:extLst>
+              <a:ext uri="{FF2B5EF4-FFF2-40B4-BE49-F238E27FC236}">
+                <a16:creationId xmlns:a16="http://schemas.microsoft.com/office/drawing/2014/main" id="{5EB4CADB-C3ED-7021-3080-242901BABF9C}"/>
+              </a:ext>
+            </a:extLst>
+          </p:cNvPr>
+          <p:cNvSpPr txBox="1"/>
+          <p:nvPr/>
+        </p:nvSpPr>
+        <p:spPr>
+          <a:xfrm>
+            <a:off x="7081520" y="515481"/>
+            <a:ext cx="747384" cy="369332"/>
+          </a:xfrm>
+          <a:prstGeom prst="rect">
+            <a:avLst/>
+          </a:prstGeom>
+          <a:noFill/>
+        </p:spPr>
+        <p:txBody>
+          <a:bodyPr wrap="none" rtlCol="0">
+            <a:spAutoFit/>
+          </a:bodyPr>
+          <a:lstStyle/>
+          <a:p>
+            <a:r>
+              <a:rPr lang="pt-PT" dirty="0">
+                <a:solidFill>
+                  <a:schemeClr val="bg1"/>
+                </a:solidFill>
+              </a:rPr>
+              <a:t>voltar</a:t>
+            </a:r>
+          </a:p>
+        </p:txBody>
+      </p:sp>
+      <p:sp>
+        <p:nvSpPr>
+          <p:cNvPr id="28" name="TextBox 27">
+            <a:extLst>
+              <a:ext uri="{FF2B5EF4-FFF2-40B4-BE49-F238E27FC236}">
+                <a16:creationId xmlns:a16="http://schemas.microsoft.com/office/drawing/2014/main" id="{CDD3E3C1-D359-7210-FA53-672077AA9300}"/>
+              </a:ext>
+            </a:extLst>
+          </p:cNvPr>
+          <p:cNvSpPr txBox="1"/>
+          <p:nvPr/>
+        </p:nvSpPr>
+        <p:spPr>
+          <a:xfrm>
+            <a:off x="934720" y="329922"/>
+            <a:ext cx="2312813" cy="553998"/>
+          </a:xfrm>
+          <a:prstGeom prst="rect">
+            <a:avLst/>
+          </a:prstGeom>
+          <a:noFill/>
+        </p:spPr>
+        <p:txBody>
+          <a:bodyPr wrap="none" rtlCol="0">
+            <a:spAutoFit/>
+          </a:bodyPr>
+          <a:lstStyle/>
+          <a:p>
+            <a:r>
+              <a:rPr lang="pt-PT" sz="3000" dirty="0"/>
+              <a:t>Menu Pastas</a:t>
+            </a:r>
+          </a:p>
+        </p:txBody>
+      </p:sp>
+      <p:sp>
+        <p:nvSpPr>
+          <p:cNvPr id="6" name="Rectangle: Rounded Corners 5">
+            <a:extLst>
+              <a:ext uri="{FF2B5EF4-FFF2-40B4-BE49-F238E27FC236}">
+                <a16:creationId xmlns:a16="http://schemas.microsoft.com/office/drawing/2014/main" id="{1D3DD328-B6A8-CBAE-2B10-50ACF8172A86}"/>
+              </a:ext>
+            </a:extLst>
+          </p:cNvPr>
+          <p:cNvSpPr/>
+          <p:nvPr/>
+        </p:nvSpPr>
+        <p:spPr>
+          <a:xfrm>
+            <a:off x="9240520" y="1159807"/>
+            <a:ext cx="1894840" cy="864156"/>
+          </a:xfrm>
+          <a:prstGeom prst="roundRect">
+            <a:avLst/>
+          </a:prstGeom>
+          <a:gradFill>
+            <a:gsLst>
+              <a:gs pos="0">
+                <a:schemeClr val="accent6">
+                  <a:lumMod val="75000"/>
+                </a:schemeClr>
+              </a:gs>
+              <a:gs pos="92000">
+                <a:schemeClr val="accent6">
+                  <a:lumMod val="105000"/>
+                  <a:satMod val="103000"/>
+                  <a:tint val="73000"/>
+                </a:schemeClr>
+              </a:gs>
+              <a:gs pos="100000">
+                <a:schemeClr val="accent6">
+                  <a:lumMod val="105000"/>
+                  <a:satMod val="109000"/>
+                  <a:tint val="81000"/>
+                </a:schemeClr>
+              </a:gs>
+            </a:gsLst>
+            <a:lin ang="5400000" scaled="0"/>
+          </a:gradFill>
+          <a:ln>
+            <a:noFill/>
+          </a:ln>
+        </p:spPr>
+        <p:style>
+          <a:lnRef idx="0">
+            <a:scrgbClr r="0" g="0" b="0"/>
+          </a:lnRef>
+          <a:fillRef idx="0">
+            <a:scrgbClr r="0" g="0" b="0"/>
+          </a:fillRef>
+          <a:effectRef idx="0">
+            <a:scrgbClr r="0" g="0" b="0"/>
+          </a:effectRef>
+          <a:fontRef idx="minor">
+            <a:schemeClr val="lt1"/>
+          </a:fontRef>
+        </p:style>
+        <p:txBody>
+          <a:bodyPr rtlCol="0" anchor="ctr"/>
+          <a:lstStyle/>
+          <a:p>
+            <a:pPr algn="ctr"/>
+            <a:r>
+              <a:rPr lang="pt-PT" dirty="0">
+                <a:solidFill>
+                  <a:schemeClr val="tx1"/>
+                </a:solidFill>
+                <a:latin typeface="Aptos Mono" panose="020F0502020204030204" pitchFamily="49" charset="0"/>
+                <a:ea typeface="Tahoma" panose="020B0604030504040204" pitchFamily="34" charset="0"/>
+                <a:cs typeface="Tahoma" panose="020B0604030504040204" pitchFamily="34" charset="0"/>
+              </a:rPr>
+              <a:t>Nome da pasta</a:t>
+            </a:r>
+          </a:p>
+        </p:txBody>
+      </p:sp>
+      <p:sp>
+        <p:nvSpPr>
+          <p:cNvPr id="10" name="Rectangle: Rounded Corners 9">
+            <a:extLst>
+              <a:ext uri="{FF2B5EF4-FFF2-40B4-BE49-F238E27FC236}">
+                <a16:creationId xmlns:a16="http://schemas.microsoft.com/office/drawing/2014/main" id="{B4AB8EC9-6B29-938C-5B64-B9BD327C90B5}"/>
+              </a:ext>
+            </a:extLst>
+          </p:cNvPr>
+          <p:cNvSpPr/>
+          <p:nvPr/>
+        </p:nvSpPr>
+        <p:spPr>
+          <a:xfrm>
+            <a:off x="7198360" y="2219682"/>
+            <a:ext cx="1894840" cy="864156"/>
+          </a:xfrm>
+          <a:prstGeom prst="roundRect">
+            <a:avLst/>
+          </a:prstGeom>
+          <a:gradFill>
+            <a:gsLst>
+              <a:gs pos="0">
+                <a:schemeClr val="accent6">
+                  <a:lumMod val="75000"/>
+                </a:schemeClr>
+              </a:gs>
+              <a:gs pos="92000">
+                <a:schemeClr val="accent6">
+                  <a:lumMod val="105000"/>
+                  <a:satMod val="103000"/>
+                  <a:tint val="73000"/>
+                </a:schemeClr>
+              </a:gs>
+              <a:gs pos="100000">
+                <a:schemeClr val="accent6">
+                  <a:lumMod val="105000"/>
+                  <a:satMod val="109000"/>
+                  <a:tint val="81000"/>
+                </a:schemeClr>
+              </a:gs>
+            </a:gsLst>
+            <a:lin ang="5400000" scaled="0"/>
+          </a:gradFill>
+          <a:ln>
+            <a:noFill/>
+          </a:ln>
+        </p:spPr>
+        <p:style>
+          <a:lnRef idx="0">
+            <a:scrgbClr r="0" g="0" b="0"/>
+          </a:lnRef>
+          <a:fillRef idx="0">
+            <a:scrgbClr r="0" g="0" b="0"/>
+          </a:fillRef>
+          <a:effectRef idx="0">
+            <a:scrgbClr r="0" g="0" b="0"/>
+          </a:effectRef>
+          <a:fontRef idx="minor">
+            <a:schemeClr val="lt1"/>
+          </a:fontRef>
+        </p:style>
+        <p:txBody>
+          <a:bodyPr rtlCol="0" anchor="ctr"/>
+          <a:lstStyle/>
+          <a:p>
+            <a:pPr algn="ctr"/>
+            <a:r>
+              <a:rPr lang="pt-PT" dirty="0">
+                <a:solidFill>
+                  <a:schemeClr val="tx1"/>
+                </a:solidFill>
+                <a:latin typeface="Aptos Mono" panose="020F0502020204030204" pitchFamily="49" charset="0"/>
+                <a:ea typeface="Tahoma" panose="020B0604030504040204" pitchFamily="34" charset="0"/>
+                <a:cs typeface="Tahoma" panose="020B0604030504040204" pitchFamily="34" charset="0"/>
+              </a:rPr>
+              <a:t>Nome da pasta</a:t>
+            </a:r>
+          </a:p>
+        </p:txBody>
+      </p:sp>
+      <p:sp>
+        <p:nvSpPr>
+          <p:cNvPr id="15" name="Rectangle: Rounded Corners 14">
+            <a:extLst>
+              <a:ext uri="{FF2B5EF4-FFF2-40B4-BE49-F238E27FC236}">
+                <a16:creationId xmlns:a16="http://schemas.microsoft.com/office/drawing/2014/main" id="{B2FE0449-5A68-500E-6921-4BD685833237}"/>
+              </a:ext>
+            </a:extLst>
+          </p:cNvPr>
+          <p:cNvSpPr/>
+          <p:nvPr/>
+        </p:nvSpPr>
+        <p:spPr>
+          <a:xfrm>
+            <a:off x="9240520" y="2219682"/>
+            <a:ext cx="1894840" cy="864156"/>
+          </a:xfrm>
+          <a:prstGeom prst="roundRect">
+            <a:avLst/>
+          </a:prstGeom>
+          <a:gradFill>
+            <a:gsLst>
+              <a:gs pos="0">
+                <a:schemeClr val="accent6">
+                  <a:lumMod val="75000"/>
+                </a:schemeClr>
+              </a:gs>
+              <a:gs pos="92000">
+                <a:schemeClr val="accent6">
+                  <a:lumMod val="105000"/>
+                  <a:satMod val="103000"/>
+                  <a:tint val="73000"/>
+                </a:schemeClr>
+              </a:gs>
+              <a:gs pos="100000">
+                <a:schemeClr val="accent6">
+                  <a:lumMod val="105000"/>
+                  <a:satMod val="109000"/>
+                  <a:tint val="81000"/>
+                </a:schemeClr>
+              </a:gs>
+            </a:gsLst>
+            <a:lin ang="5400000" scaled="0"/>
+          </a:gradFill>
+          <a:ln>
+            <a:noFill/>
+          </a:ln>
+        </p:spPr>
+        <p:style>
+          <a:lnRef idx="0">
+            <a:scrgbClr r="0" g="0" b="0"/>
+          </a:lnRef>
+          <a:fillRef idx="0">
+            <a:scrgbClr r="0" g="0" b="0"/>
+          </a:fillRef>
+          <a:effectRef idx="0">
+            <a:scrgbClr r="0" g="0" b="0"/>
+          </a:effectRef>
+          <a:fontRef idx="minor">
+            <a:schemeClr val="lt1"/>
+          </a:fontRef>
+        </p:style>
+        <p:txBody>
+          <a:bodyPr rtlCol="0" anchor="ctr"/>
+          <a:lstStyle/>
+          <a:p>
+            <a:pPr algn="ctr"/>
+            <a:r>
+              <a:rPr lang="pt-PT" dirty="0">
+                <a:solidFill>
+                  <a:schemeClr val="tx1"/>
+                </a:solidFill>
+                <a:latin typeface="Aptos Mono" panose="020F0502020204030204" pitchFamily="49" charset="0"/>
+                <a:ea typeface="Tahoma" panose="020B0604030504040204" pitchFamily="34" charset="0"/>
+                <a:cs typeface="Tahoma" panose="020B0604030504040204" pitchFamily="34" charset="0"/>
+              </a:rPr>
+              <a:t>Nome da pasta</a:t>
+            </a:r>
+          </a:p>
+        </p:txBody>
+      </p:sp>
+      <p:sp>
+        <p:nvSpPr>
+          <p:cNvPr id="18" name="Rectangle: Rounded Corners 17">
+            <a:extLst>
+              <a:ext uri="{FF2B5EF4-FFF2-40B4-BE49-F238E27FC236}">
+                <a16:creationId xmlns:a16="http://schemas.microsoft.com/office/drawing/2014/main" id="{D570042C-1639-138D-AED9-9C9B00ED55CE}"/>
+              </a:ext>
+            </a:extLst>
+          </p:cNvPr>
+          <p:cNvSpPr/>
+          <p:nvPr/>
+        </p:nvSpPr>
+        <p:spPr>
+          <a:xfrm>
+            <a:off x="7198360" y="3260972"/>
+            <a:ext cx="1894840" cy="864156"/>
+          </a:xfrm>
+          <a:prstGeom prst="roundRect">
+            <a:avLst/>
+          </a:prstGeom>
+          <a:gradFill>
+            <a:gsLst>
+              <a:gs pos="0">
+                <a:schemeClr val="accent6">
+                  <a:lumMod val="75000"/>
+                </a:schemeClr>
+              </a:gs>
+              <a:gs pos="92000">
+                <a:schemeClr val="accent6">
+                  <a:lumMod val="105000"/>
+                  <a:satMod val="103000"/>
+                  <a:tint val="73000"/>
+                </a:schemeClr>
+              </a:gs>
+              <a:gs pos="100000">
+                <a:schemeClr val="accent6">
+                  <a:lumMod val="105000"/>
+                  <a:satMod val="109000"/>
+                  <a:tint val="81000"/>
+                </a:schemeClr>
+              </a:gs>
+            </a:gsLst>
+            <a:lin ang="5400000" scaled="0"/>
+          </a:gradFill>
+          <a:ln>
+            <a:noFill/>
+          </a:ln>
+        </p:spPr>
+        <p:style>
+          <a:lnRef idx="0">
+            <a:scrgbClr r="0" g="0" b="0"/>
+          </a:lnRef>
+          <a:fillRef idx="0">
+            <a:scrgbClr r="0" g="0" b="0"/>
+          </a:fillRef>
+          <a:effectRef idx="0">
+            <a:scrgbClr r="0" g="0" b="0"/>
+          </a:effectRef>
+          <a:fontRef idx="minor">
+            <a:schemeClr val="lt1"/>
+          </a:fontRef>
+        </p:style>
+        <p:txBody>
+          <a:bodyPr rtlCol="0" anchor="ctr"/>
+          <a:lstStyle/>
+          <a:p>
+            <a:pPr algn="ctr"/>
+            <a:r>
+              <a:rPr lang="pt-PT" dirty="0">
+                <a:solidFill>
+                  <a:schemeClr val="tx1"/>
+                </a:solidFill>
+                <a:latin typeface="Aptos Mono" panose="020F0502020204030204" pitchFamily="49" charset="0"/>
+                <a:ea typeface="Tahoma" panose="020B0604030504040204" pitchFamily="34" charset="0"/>
+                <a:cs typeface="Tahoma" panose="020B0604030504040204" pitchFamily="34" charset="0"/>
+              </a:rPr>
+              <a:t>Nome da pasta</a:t>
+            </a:r>
+          </a:p>
+        </p:txBody>
+      </p:sp>
+      <p:sp>
+        <p:nvSpPr>
+          <p:cNvPr id="21" name="Rectangle: Rounded Corners 20">
+            <a:extLst>
+              <a:ext uri="{FF2B5EF4-FFF2-40B4-BE49-F238E27FC236}">
+                <a16:creationId xmlns:a16="http://schemas.microsoft.com/office/drawing/2014/main" id="{6498FB05-51EE-1B8C-1B67-D676761445FB}"/>
+              </a:ext>
+            </a:extLst>
+          </p:cNvPr>
+          <p:cNvSpPr/>
+          <p:nvPr/>
+        </p:nvSpPr>
+        <p:spPr>
+          <a:xfrm>
+            <a:off x="9240520" y="3260972"/>
+            <a:ext cx="1894840" cy="864156"/>
+          </a:xfrm>
+          <a:prstGeom prst="roundRect">
+            <a:avLst/>
+          </a:prstGeom>
+          <a:gradFill>
+            <a:gsLst>
+              <a:gs pos="0">
+                <a:schemeClr val="accent6">
+                  <a:lumMod val="75000"/>
+                </a:schemeClr>
+              </a:gs>
+              <a:gs pos="92000">
+                <a:schemeClr val="accent6">
+                  <a:lumMod val="105000"/>
+                  <a:satMod val="103000"/>
+                  <a:tint val="73000"/>
+                </a:schemeClr>
+              </a:gs>
+              <a:gs pos="100000">
+                <a:schemeClr val="accent6">
+                  <a:lumMod val="105000"/>
+                  <a:satMod val="109000"/>
+                  <a:tint val="81000"/>
+                </a:schemeClr>
+              </a:gs>
+            </a:gsLst>
+            <a:lin ang="5400000" scaled="0"/>
+          </a:gradFill>
+          <a:ln>
+            <a:noFill/>
+          </a:ln>
+        </p:spPr>
+        <p:style>
+          <a:lnRef idx="0">
+            <a:scrgbClr r="0" g="0" b="0"/>
+          </a:lnRef>
+          <a:fillRef idx="0">
+            <a:scrgbClr r="0" g="0" b="0"/>
+          </a:fillRef>
+          <a:effectRef idx="0">
+            <a:scrgbClr r="0" g="0" b="0"/>
+          </a:effectRef>
+          <a:fontRef idx="minor">
+            <a:schemeClr val="lt1"/>
+          </a:fontRef>
+        </p:style>
+        <p:txBody>
+          <a:bodyPr rtlCol="0" anchor="ctr"/>
+          <a:lstStyle/>
+          <a:p>
+            <a:pPr algn="ctr"/>
+            <a:r>
+              <a:rPr lang="pt-PT" dirty="0">
+                <a:solidFill>
+                  <a:schemeClr val="tx1"/>
+                </a:solidFill>
+                <a:latin typeface="Aptos Mono" panose="020F0502020204030204" pitchFamily="49" charset="0"/>
+                <a:ea typeface="Tahoma" panose="020B0604030504040204" pitchFamily="34" charset="0"/>
+                <a:cs typeface="Tahoma" panose="020B0604030504040204" pitchFamily="34" charset="0"/>
+              </a:rPr>
+              <a:t>Nome da pasta</a:t>
+            </a:r>
+          </a:p>
+        </p:txBody>
+      </p:sp>
+      <p:sp>
+        <p:nvSpPr>
+          <p:cNvPr id="25" name="Rectangle: Rounded Corners 24">
+            <a:extLst>
+              <a:ext uri="{FF2B5EF4-FFF2-40B4-BE49-F238E27FC236}">
+                <a16:creationId xmlns:a16="http://schemas.microsoft.com/office/drawing/2014/main" id="{68D86DA3-ABB2-F233-CB9E-1160D34F49ED}"/>
+              </a:ext>
+            </a:extLst>
+          </p:cNvPr>
+          <p:cNvSpPr/>
+          <p:nvPr/>
+        </p:nvSpPr>
+        <p:spPr>
+          <a:xfrm>
+            <a:off x="7198360" y="4216012"/>
+            <a:ext cx="1894840" cy="864156"/>
+          </a:xfrm>
+          <a:prstGeom prst="roundRect">
+            <a:avLst/>
+          </a:prstGeom>
+          <a:gradFill>
+            <a:gsLst>
+              <a:gs pos="0">
+                <a:schemeClr val="accent6">
+                  <a:lumMod val="75000"/>
+                </a:schemeClr>
+              </a:gs>
+              <a:gs pos="92000">
+                <a:schemeClr val="accent6">
+                  <a:lumMod val="105000"/>
+                  <a:satMod val="103000"/>
+                  <a:tint val="73000"/>
+                </a:schemeClr>
+              </a:gs>
+              <a:gs pos="100000">
+                <a:schemeClr val="accent6">
+                  <a:lumMod val="105000"/>
+                  <a:satMod val="109000"/>
+                  <a:tint val="81000"/>
+                </a:schemeClr>
+              </a:gs>
+            </a:gsLst>
+            <a:lin ang="5400000" scaled="0"/>
+          </a:gradFill>
+          <a:ln>
+            <a:noFill/>
+          </a:ln>
+        </p:spPr>
+        <p:style>
+          <a:lnRef idx="0">
+            <a:scrgbClr r="0" g="0" b="0"/>
+          </a:lnRef>
+          <a:fillRef idx="0">
+            <a:scrgbClr r="0" g="0" b="0"/>
+          </a:fillRef>
+          <a:effectRef idx="0">
+            <a:scrgbClr r="0" g="0" b="0"/>
+          </a:effectRef>
+          <a:fontRef idx="minor">
+            <a:schemeClr val="lt1"/>
+          </a:fontRef>
+        </p:style>
+        <p:txBody>
+          <a:bodyPr rtlCol="0" anchor="ctr"/>
+          <a:lstStyle/>
+          <a:p>
+            <a:pPr algn="ctr"/>
+            <a:r>
+              <a:rPr lang="pt-PT" dirty="0">
+                <a:solidFill>
+                  <a:schemeClr val="tx1"/>
+                </a:solidFill>
+                <a:latin typeface="Aptos Mono" panose="020F0502020204030204" pitchFamily="49" charset="0"/>
+                <a:ea typeface="Tahoma" panose="020B0604030504040204" pitchFamily="34" charset="0"/>
+                <a:cs typeface="Tahoma" panose="020B0604030504040204" pitchFamily="34" charset="0"/>
+              </a:rPr>
+              <a:t>Nome da pasta</a:t>
+            </a:r>
+          </a:p>
+        </p:txBody>
+      </p:sp>
+      <p:sp>
+        <p:nvSpPr>
+          <p:cNvPr id="29" name="Rectangle: Rounded Corners 28">
+            <a:extLst>
+              <a:ext uri="{FF2B5EF4-FFF2-40B4-BE49-F238E27FC236}">
+                <a16:creationId xmlns:a16="http://schemas.microsoft.com/office/drawing/2014/main" id="{B35CBC97-E7E9-20EE-4DF7-4E43C4BE46D7}"/>
+              </a:ext>
+            </a:extLst>
+          </p:cNvPr>
+          <p:cNvSpPr/>
+          <p:nvPr/>
+        </p:nvSpPr>
+        <p:spPr>
+          <a:xfrm>
+            <a:off x="9240520" y="4216012"/>
+            <a:ext cx="1894840" cy="864156"/>
+          </a:xfrm>
+          <a:prstGeom prst="roundRect">
+            <a:avLst/>
+          </a:prstGeom>
+          <a:gradFill>
+            <a:gsLst>
+              <a:gs pos="0">
+                <a:schemeClr val="accent6">
+                  <a:lumMod val="75000"/>
+                </a:schemeClr>
+              </a:gs>
+              <a:gs pos="92000">
+                <a:schemeClr val="accent6">
+                  <a:lumMod val="105000"/>
+                  <a:satMod val="103000"/>
+                  <a:tint val="73000"/>
+                </a:schemeClr>
+              </a:gs>
+              <a:gs pos="100000">
+                <a:schemeClr val="accent6">
+                  <a:lumMod val="105000"/>
+                  <a:satMod val="109000"/>
+                  <a:tint val="81000"/>
+                </a:schemeClr>
+              </a:gs>
+            </a:gsLst>
+            <a:lin ang="5400000" scaled="0"/>
+          </a:gradFill>
+          <a:ln>
+            <a:noFill/>
+          </a:ln>
+        </p:spPr>
+        <p:style>
+          <a:lnRef idx="0">
+            <a:scrgbClr r="0" g="0" b="0"/>
+          </a:lnRef>
+          <a:fillRef idx="0">
+            <a:scrgbClr r="0" g="0" b="0"/>
+          </a:fillRef>
+          <a:effectRef idx="0">
+            <a:scrgbClr r="0" g="0" b="0"/>
+          </a:effectRef>
+          <a:fontRef idx="minor">
+            <a:schemeClr val="lt1"/>
+          </a:fontRef>
+        </p:style>
+        <p:txBody>
+          <a:bodyPr rtlCol="0" anchor="ctr"/>
+          <a:lstStyle/>
+          <a:p>
+            <a:pPr algn="ctr"/>
+            <a:r>
+              <a:rPr lang="pt-PT" dirty="0">
+                <a:solidFill>
+                  <a:schemeClr val="tx1"/>
+                </a:solidFill>
+                <a:latin typeface="Aptos Mono" panose="020F0502020204030204" pitchFamily="49" charset="0"/>
+                <a:ea typeface="Tahoma" panose="020B0604030504040204" pitchFamily="34" charset="0"/>
+                <a:cs typeface="Tahoma" panose="020B0604030504040204" pitchFamily="34" charset="0"/>
+              </a:rPr>
+              <a:t>Nome da pasta</a:t>
+            </a:r>
+          </a:p>
+        </p:txBody>
+      </p:sp>
+      <p:sp>
+        <p:nvSpPr>
+          <p:cNvPr id="31" name="Rectangle: Rounded Corners 30">
+            <a:extLst>
+              <a:ext uri="{FF2B5EF4-FFF2-40B4-BE49-F238E27FC236}">
+                <a16:creationId xmlns:a16="http://schemas.microsoft.com/office/drawing/2014/main" id="{4C1655F9-B7A9-8075-7552-99ED1990E7EA}"/>
+              </a:ext>
+            </a:extLst>
+          </p:cNvPr>
+          <p:cNvSpPr/>
+          <p:nvPr/>
+        </p:nvSpPr>
+        <p:spPr>
+          <a:xfrm>
+            <a:off x="7198360" y="5263276"/>
+            <a:ext cx="1894840" cy="864156"/>
+          </a:xfrm>
+          <a:prstGeom prst="roundRect">
+            <a:avLst/>
+          </a:prstGeom>
+          <a:gradFill>
+            <a:gsLst>
+              <a:gs pos="0">
+                <a:schemeClr val="accent6">
+                  <a:lumMod val="75000"/>
+                </a:schemeClr>
+              </a:gs>
+              <a:gs pos="92000">
+                <a:schemeClr val="accent6">
+                  <a:lumMod val="105000"/>
+                  <a:satMod val="103000"/>
+                  <a:tint val="73000"/>
+                </a:schemeClr>
+              </a:gs>
+              <a:gs pos="100000">
+                <a:schemeClr val="accent6">
+                  <a:lumMod val="105000"/>
+                  <a:satMod val="109000"/>
+                  <a:tint val="81000"/>
+                </a:schemeClr>
+              </a:gs>
+            </a:gsLst>
+            <a:lin ang="5400000" scaled="0"/>
+          </a:gradFill>
+          <a:ln>
+            <a:noFill/>
+          </a:ln>
+        </p:spPr>
+        <p:style>
+          <a:lnRef idx="0">
+            <a:scrgbClr r="0" g="0" b="0"/>
+          </a:lnRef>
+          <a:fillRef idx="0">
+            <a:scrgbClr r="0" g="0" b="0"/>
+          </a:fillRef>
+          <a:effectRef idx="0">
+            <a:scrgbClr r="0" g="0" b="0"/>
+          </a:effectRef>
+          <a:fontRef idx="minor">
+            <a:schemeClr val="lt1"/>
+          </a:fontRef>
+        </p:style>
+        <p:txBody>
+          <a:bodyPr rtlCol="0" anchor="ctr"/>
+          <a:lstStyle/>
+          <a:p>
+            <a:pPr algn="ctr"/>
+            <a:r>
+              <a:rPr lang="pt-PT" dirty="0">
+                <a:solidFill>
+                  <a:schemeClr val="tx1"/>
+                </a:solidFill>
+                <a:latin typeface="Aptos Mono" panose="020F0502020204030204" pitchFamily="49" charset="0"/>
+                <a:ea typeface="Tahoma" panose="020B0604030504040204" pitchFamily="34" charset="0"/>
+                <a:cs typeface="Tahoma" panose="020B0604030504040204" pitchFamily="34" charset="0"/>
+              </a:rPr>
+              <a:t>Nome da pasta</a:t>
+            </a:r>
+          </a:p>
+        </p:txBody>
+      </p:sp>
+      <p:sp>
+        <p:nvSpPr>
+          <p:cNvPr id="33" name="Rectangle: Rounded Corners 32">
+            <a:extLst>
+              <a:ext uri="{FF2B5EF4-FFF2-40B4-BE49-F238E27FC236}">
+                <a16:creationId xmlns:a16="http://schemas.microsoft.com/office/drawing/2014/main" id="{86DC9900-4416-58CE-8C61-BCB657B8F0BB}"/>
+              </a:ext>
+            </a:extLst>
+          </p:cNvPr>
+          <p:cNvSpPr/>
+          <p:nvPr/>
+        </p:nvSpPr>
+        <p:spPr>
+          <a:xfrm>
+            <a:off x="9240520" y="5263276"/>
+            <a:ext cx="1894840" cy="864156"/>
+          </a:xfrm>
+          <a:prstGeom prst="roundRect">
+            <a:avLst/>
+          </a:prstGeom>
+          <a:gradFill>
+            <a:gsLst>
+              <a:gs pos="0">
+                <a:schemeClr val="accent6">
+                  <a:lumMod val="75000"/>
+                </a:schemeClr>
+              </a:gs>
+              <a:gs pos="92000">
+                <a:schemeClr val="accent6">
+                  <a:lumMod val="105000"/>
+                  <a:satMod val="103000"/>
+                  <a:tint val="73000"/>
+                </a:schemeClr>
+              </a:gs>
+              <a:gs pos="100000">
+                <a:schemeClr val="accent6">
+                  <a:lumMod val="105000"/>
+                  <a:satMod val="109000"/>
+                  <a:tint val="81000"/>
+                </a:schemeClr>
+              </a:gs>
+            </a:gsLst>
+            <a:lin ang="5400000" scaled="0"/>
+          </a:gradFill>
+          <a:ln>
+            <a:noFill/>
+          </a:ln>
+        </p:spPr>
+        <p:style>
+          <a:lnRef idx="0">
+            <a:scrgbClr r="0" g="0" b="0"/>
+          </a:lnRef>
+          <a:fillRef idx="0">
+            <a:scrgbClr r="0" g="0" b="0"/>
+          </a:fillRef>
+          <a:effectRef idx="0">
+            <a:scrgbClr r="0" g="0" b="0"/>
+          </a:effectRef>
+          <a:fontRef idx="minor">
+            <a:schemeClr val="lt1"/>
+          </a:fontRef>
+        </p:style>
+        <p:txBody>
+          <a:bodyPr rtlCol="0" anchor="ctr"/>
+          <a:lstStyle/>
+          <a:p>
+            <a:pPr algn="ctr"/>
+            <a:r>
+              <a:rPr lang="pt-PT" dirty="0">
+                <a:solidFill>
+                  <a:schemeClr val="tx1"/>
+                </a:solidFill>
+                <a:latin typeface="Aptos Mono" panose="020F0502020204030204" pitchFamily="49" charset="0"/>
+                <a:ea typeface="Tahoma" panose="020B0604030504040204" pitchFamily="34" charset="0"/>
+                <a:cs typeface="Tahoma" panose="020B0604030504040204" pitchFamily="34" charset="0"/>
+              </a:rPr>
+              <a:t>Nome da pasta</a:t>
+            </a:r>
+          </a:p>
+        </p:txBody>
+      </p:sp>
+    </p:spTree>
+    <p:extLst>
+      <p:ext uri="{BB962C8B-B14F-4D97-AF65-F5344CB8AC3E}">
+        <p14:creationId xmlns:p14="http://schemas.microsoft.com/office/powerpoint/2010/main" val="2425597695"/>
+      </p:ext>
+    </p:extLst>
+  </p:cSld>
+  <p:clrMapOvr>
+    <a:masterClrMapping/>
+  </p:clrMapOvr>
+</p:sld>
+</file>
+
+<file path=ppt/slides/slide6.xml><?xml version="1.0" encoding="utf-8"?>
+<p:sld xmlns:a="http://schemas.openxmlformats.org/drawingml/2006/main" xmlns:r="http://schemas.openxmlformats.org/officeDocument/2006/relationships" xmlns:p="http://schemas.openxmlformats.org/presentationml/2006/main">
+  <p:cSld>
+    <p:spTree>
+      <p:nvGrpSpPr>
+        <p:cNvPr id="1" name="">
+          <a:extLst>
+            <a:ext uri="{FF2B5EF4-FFF2-40B4-BE49-F238E27FC236}">
+              <a16:creationId xmlns:a16="http://schemas.microsoft.com/office/drawing/2014/main" id="{3A5EAF49-3E92-F5A2-B07F-C9F02CAEA8CD}"/>
+            </a:ext>
+          </a:extLst>
+        </p:cNvPr>
+        <p:cNvGrpSpPr/>
+        <p:nvPr/>
+      </p:nvGrpSpPr>
+      <p:grpSpPr>
+        <a:xfrm>
+          <a:off x="0" y="0"/>
+          <a:ext cx="0" cy="0"/>
+          <a:chOff x="0" y="0"/>
+          <a:chExt cx="0" cy="0"/>
+        </a:xfrm>
+      </p:grpSpPr>
+      <p:sp>
+        <p:nvSpPr>
+          <p:cNvPr id="23" name="Rectangle 22">
+            <a:extLst>
+              <a:ext uri="{FF2B5EF4-FFF2-40B4-BE49-F238E27FC236}">
+                <a16:creationId xmlns:a16="http://schemas.microsoft.com/office/drawing/2014/main" id="{38DB8017-4A12-44B2-E927-C31669944D6E}"/>
+              </a:ext>
+            </a:extLst>
+          </p:cNvPr>
+          <p:cNvSpPr/>
+          <p:nvPr/>
+        </p:nvSpPr>
+        <p:spPr>
+          <a:xfrm>
+            <a:off x="7051040" y="435987"/>
+            <a:ext cx="4297680" cy="5986026"/>
+          </a:xfrm>
+          <a:prstGeom prst="rect">
+            <a:avLst/>
+          </a:prstGeom>
+          <a:solidFill>
+            <a:schemeClr val="tx2">
+              <a:lumMod val="50000"/>
+              <a:lumOff val="50000"/>
+            </a:schemeClr>
+          </a:solidFill>
+        </p:spPr>
+        <p:style>
+          <a:lnRef idx="2">
+            <a:schemeClr val="accent1">
+              <a:shade val="15000"/>
+            </a:schemeClr>
+          </a:lnRef>
+          <a:fillRef idx="1">
+            <a:schemeClr val="accent1"/>
+          </a:fillRef>
+          <a:effectRef idx="0">
+            <a:schemeClr val="accent1"/>
+          </a:effectRef>
+          <a:fontRef idx="minor">
+            <a:schemeClr val="lt1"/>
+          </a:fontRef>
+        </p:style>
+        <p:txBody>
+          <a:bodyPr rtlCol="0" anchor="t" anchorCtr="0"/>
+          <a:lstStyle/>
+          <a:p>
+            <a:pPr algn="ctr"/>
+            <a:endParaRPr lang="pt-PT" sz="3000" dirty="0">
+              <a:solidFill>
+                <a:schemeClr val="bg1"/>
+              </a:solidFill>
+            </a:endParaRPr>
+          </a:p>
+        </p:txBody>
+      </p:sp>
+      <p:sp>
+        <p:nvSpPr>
+          <p:cNvPr id="3" name="Rectangle: Rounded Corners 2">
+            <a:extLst>
+              <a:ext uri="{FF2B5EF4-FFF2-40B4-BE49-F238E27FC236}">
+                <a16:creationId xmlns:a16="http://schemas.microsoft.com/office/drawing/2014/main" id="{12A9FD55-609A-E3E3-DB83-A3E3DE687DA8}"/>
+              </a:ext>
+            </a:extLst>
+          </p:cNvPr>
+          <p:cNvSpPr/>
+          <p:nvPr/>
+        </p:nvSpPr>
+        <p:spPr>
+          <a:xfrm>
+            <a:off x="7198360" y="1159806"/>
+            <a:ext cx="1828800" cy="1502113"/>
+          </a:xfrm>
+          <a:prstGeom prst="roundRect">
+            <a:avLst/>
+          </a:prstGeom>
+          <a:gradFill>
+            <a:gsLst>
+              <a:gs pos="0">
+                <a:schemeClr val="accent6">
+                  <a:lumMod val="75000"/>
+                </a:schemeClr>
+              </a:gs>
+              <a:gs pos="92000">
+                <a:schemeClr val="accent6">
+                  <a:lumMod val="105000"/>
+                  <a:satMod val="103000"/>
+                  <a:tint val="73000"/>
+                </a:schemeClr>
+              </a:gs>
+              <a:gs pos="100000">
+                <a:schemeClr val="accent6">
+                  <a:lumMod val="105000"/>
+                  <a:satMod val="109000"/>
+                  <a:tint val="81000"/>
+                </a:schemeClr>
+              </a:gs>
+            </a:gsLst>
+            <a:lin ang="5400000" scaled="0"/>
+          </a:gradFill>
+          <a:ln>
+            <a:noFill/>
+          </a:ln>
+        </p:spPr>
+        <p:style>
+          <a:lnRef idx="0">
+            <a:scrgbClr r="0" g="0" b="0"/>
+          </a:lnRef>
+          <a:fillRef idx="0">
+            <a:scrgbClr r="0" g="0" b="0"/>
+          </a:fillRef>
+          <a:effectRef idx="0">
+            <a:scrgbClr r="0" g="0" b="0"/>
+          </a:effectRef>
+          <a:fontRef idx="minor">
+            <a:schemeClr val="lt1"/>
+          </a:fontRef>
+        </p:style>
+        <p:txBody>
+          <a:bodyPr rtlCol="0" anchor="t"/>
+          <a:lstStyle/>
+          <a:p>
+            <a:r>
+              <a:rPr lang="pt-PT" dirty="0">
+                <a:solidFill>
+                  <a:schemeClr val="tx1"/>
+                </a:solidFill>
+                <a:latin typeface="Aptos Mono" panose="020F0502020204030204" pitchFamily="49" charset="0"/>
+                <a:ea typeface="Tahoma" panose="020B0604030504040204" pitchFamily="34" charset="0"/>
+                <a:cs typeface="Tahoma" panose="020B0604030504040204" pitchFamily="34" charset="0"/>
+              </a:rPr>
+              <a:t>Imagem</a:t>
+            </a:r>
+          </a:p>
+          <a:p>
+            <a:endParaRPr lang="pt-PT" dirty="0">
+              <a:solidFill>
+                <a:schemeClr val="tx1"/>
+              </a:solidFill>
+              <a:latin typeface="Aptos Mono" panose="020F0502020204030204" pitchFamily="49" charset="0"/>
+              <a:ea typeface="Tahoma" panose="020B0604030504040204" pitchFamily="34" charset="0"/>
+              <a:cs typeface="Tahoma" panose="020B0604030504040204" pitchFamily="34" charset="0"/>
+            </a:endParaRPr>
+          </a:p>
+          <a:p>
+            <a:r>
+              <a:rPr lang="pt-PT" dirty="0" err="1">
+                <a:solidFill>
+                  <a:schemeClr val="tx1"/>
+                </a:solidFill>
+                <a:latin typeface="Aptos Mono" panose="020F0502020204030204" pitchFamily="49" charset="0"/>
+                <a:ea typeface="Tahoma" panose="020B0604030504040204" pitchFamily="34" charset="0"/>
+                <a:cs typeface="Tahoma" panose="020B0604030504040204" pitchFamily="34" charset="0"/>
+              </a:rPr>
+              <a:t>Album</a:t>
+            </a:r>
+            <a:endParaRPr lang="pt-PT" dirty="0">
+              <a:solidFill>
+                <a:schemeClr val="tx1"/>
+              </a:solidFill>
+              <a:latin typeface="Aptos Mono" panose="020F0502020204030204" pitchFamily="49" charset="0"/>
+              <a:ea typeface="Tahoma" panose="020B0604030504040204" pitchFamily="34" charset="0"/>
+              <a:cs typeface="Tahoma" panose="020B0604030504040204" pitchFamily="34" charset="0"/>
+            </a:endParaRPr>
+          </a:p>
+          <a:p>
+            <a:r>
+              <a:rPr lang="pt-PT" dirty="0">
+                <a:solidFill>
+                  <a:schemeClr val="tx1"/>
+                </a:solidFill>
+                <a:latin typeface="Aptos Mono" panose="020F0502020204030204" pitchFamily="49" charset="0"/>
+                <a:ea typeface="Tahoma" panose="020B0604030504040204" pitchFamily="34" charset="0"/>
+                <a:cs typeface="Tahoma" panose="020B0604030504040204" pitchFamily="34" charset="0"/>
+              </a:rPr>
+              <a:t>Artista</a:t>
+            </a:r>
+          </a:p>
+          <a:p>
+            <a:r>
+              <a:rPr lang="pt-PT" dirty="0">
+                <a:solidFill>
+                  <a:schemeClr val="tx1"/>
+                </a:solidFill>
+                <a:latin typeface="Aptos Mono" panose="020F0502020204030204" pitchFamily="49" charset="0"/>
+                <a:ea typeface="Tahoma" panose="020B0604030504040204" pitchFamily="34" charset="0"/>
+                <a:cs typeface="Tahoma" panose="020B0604030504040204" pitchFamily="34" charset="0"/>
+              </a:rPr>
+              <a:t>Nº musicas</a:t>
+            </a:r>
+          </a:p>
+        </p:txBody>
+      </p:sp>
+      <p:sp>
+        <p:nvSpPr>
+          <p:cNvPr id="4" name="TextBox 3">
+            <a:extLst>
+              <a:ext uri="{FF2B5EF4-FFF2-40B4-BE49-F238E27FC236}">
+                <a16:creationId xmlns:a16="http://schemas.microsoft.com/office/drawing/2014/main" id="{66EC5771-2E18-2784-8551-883B003F4EF6}"/>
+              </a:ext>
+            </a:extLst>
+          </p:cNvPr>
+          <p:cNvSpPr txBox="1"/>
+          <p:nvPr/>
+        </p:nvSpPr>
+        <p:spPr>
+          <a:xfrm>
+            <a:off x="7081520" y="515481"/>
+            <a:ext cx="747384" cy="369332"/>
+          </a:xfrm>
+          <a:prstGeom prst="rect">
+            <a:avLst/>
+          </a:prstGeom>
+          <a:noFill/>
+        </p:spPr>
+        <p:txBody>
+          <a:bodyPr wrap="none" rtlCol="0">
+            <a:spAutoFit/>
+          </a:bodyPr>
+          <a:lstStyle/>
+          <a:p>
+            <a:r>
+              <a:rPr lang="pt-PT" dirty="0">
+                <a:solidFill>
+                  <a:schemeClr val="bg1"/>
+                </a:solidFill>
+              </a:rPr>
+              <a:t>voltar</a:t>
+            </a:r>
+          </a:p>
+        </p:txBody>
+      </p:sp>
+      <p:sp>
+        <p:nvSpPr>
+          <p:cNvPr id="28" name="TextBox 27">
+            <a:extLst>
+              <a:ext uri="{FF2B5EF4-FFF2-40B4-BE49-F238E27FC236}">
+                <a16:creationId xmlns:a16="http://schemas.microsoft.com/office/drawing/2014/main" id="{C095B126-F722-CE05-0E95-0A23DA7A8137}"/>
+              </a:ext>
+            </a:extLst>
+          </p:cNvPr>
+          <p:cNvSpPr txBox="1"/>
+          <p:nvPr/>
+        </p:nvSpPr>
+        <p:spPr>
+          <a:xfrm>
+            <a:off x="934720" y="329922"/>
+            <a:ext cx="2351926" cy="553998"/>
+          </a:xfrm>
+          <a:prstGeom prst="rect">
+            <a:avLst/>
+          </a:prstGeom>
+          <a:noFill/>
+        </p:spPr>
+        <p:txBody>
+          <a:bodyPr wrap="none" rtlCol="0">
+            <a:spAutoFit/>
+          </a:bodyPr>
+          <a:lstStyle/>
+          <a:p>
+            <a:r>
+              <a:rPr lang="pt-PT" sz="3000" dirty="0"/>
+              <a:t>Menu </a:t>
+            </a:r>
+            <a:r>
+              <a:rPr lang="pt-PT" sz="3000" dirty="0" err="1"/>
+              <a:t>Albuns</a:t>
+            </a:r>
+            <a:endParaRPr lang="pt-PT" sz="3000" dirty="0"/>
+          </a:p>
+        </p:txBody>
+      </p:sp>
+      <p:sp>
+        <p:nvSpPr>
+          <p:cNvPr id="5" name="Rectangle: Rounded Corners 4">
+            <a:extLst>
+              <a:ext uri="{FF2B5EF4-FFF2-40B4-BE49-F238E27FC236}">
+                <a16:creationId xmlns:a16="http://schemas.microsoft.com/office/drawing/2014/main" id="{052EB103-E32C-97D4-07D2-9E147A1DB319}"/>
+              </a:ext>
+            </a:extLst>
+          </p:cNvPr>
+          <p:cNvSpPr/>
+          <p:nvPr/>
+        </p:nvSpPr>
+        <p:spPr>
+          <a:xfrm>
+            <a:off x="9273540" y="1159805"/>
+            <a:ext cx="1828800" cy="1502113"/>
+          </a:xfrm>
+          <a:prstGeom prst="roundRect">
+            <a:avLst/>
+          </a:prstGeom>
+          <a:gradFill>
+            <a:gsLst>
+              <a:gs pos="0">
+                <a:schemeClr val="accent6">
+                  <a:lumMod val="75000"/>
+                </a:schemeClr>
+              </a:gs>
+              <a:gs pos="92000">
+                <a:schemeClr val="accent6">
+                  <a:lumMod val="105000"/>
+                  <a:satMod val="103000"/>
+                  <a:tint val="73000"/>
+                </a:schemeClr>
+              </a:gs>
+              <a:gs pos="100000">
+                <a:schemeClr val="accent6">
+                  <a:lumMod val="105000"/>
+                  <a:satMod val="109000"/>
+                  <a:tint val="81000"/>
+                </a:schemeClr>
+              </a:gs>
+            </a:gsLst>
+            <a:lin ang="5400000" scaled="0"/>
+          </a:gradFill>
+          <a:ln>
+            <a:noFill/>
+          </a:ln>
+        </p:spPr>
+        <p:style>
+          <a:lnRef idx="0">
+            <a:scrgbClr r="0" g="0" b="0"/>
+          </a:lnRef>
+          <a:fillRef idx="0">
+            <a:scrgbClr r="0" g="0" b="0"/>
+          </a:fillRef>
+          <a:effectRef idx="0">
+            <a:scrgbClr r="0" g="0" b="0"/>
+          </a:effectRef>
+          <a:fontRef idx="minor">
+            <a:schemeClr val="lt1"/>
+          </a:fontRef>
+        </p:style>
+        <p:txBody>
+          <a:bodyPr rtlCol="0" anchor="t"/>
+          <a:lstStyle/>
+          <a:p>
+            <a:r>
+              <a:rPr lang="pt-PT" dirty="0">
+                <a:solidFill>
+                  <a:schemeClr val="tx1"/>
+                </a:solidFill>
+                <a:latin typeface="Aptos Mono" panose="020F0502020204030204" pitchFamily="49" charset="0"/>
+                <a:ea typeface="Tahoma" panose="020B0604030504040204" pitchFamily="34" charset="0"/>
+                <a:cs typeface="Tahoma" panose="020B0604030504040204" pitchFamily="34" charset="0"/>
+              </a:rPr>
+              <a:t>Imagem</a:t>
+            </a:r>
+          </a:p>
+          <a:p>
+            <a:endParaRPr lang="pt-PT" dirty="0">
+              <a:solidFill>
+                <a:schemeClr val="tx1"/>
+              </a:solidFill>
+              <a:latin typeface="Aptos Mono" panose="020F0502020204030204" pitchFamily="49" charset="0"/>
+              <a:ea typeface="Tahoma" panose="020B0604030504040204" pitchFamily="34" charset="0"/>
+              <a:cs typeface="Tahoma" panose="020B0604030504040204" pitchFamily="34" charset="0"/>
+            </a:endParaRPr>
+          </a:p>
+          <a:p>
+            <a:r>
+              <a:rPr lang="pt-PT" dirty="0" err="1">
+                <a:solidFill>
+                  <a:schemeClr val="tx1"/>
+                </a:solidFill>
+                <a:latin typeface="Aptos Mono" panose="020F0502020204030204" pitchFamily="49" charset="0"/>
+                <a:ea typeface="Tahoma" panose="020B0604030504040204" pitchFamily="34" charset="0"/>
+                <a:cs typeface="Tahoma" panose="020B0604030504040204" pitchFamily="34" charset="0"/>
+              </a:rPr>
+              <a:t>Album</a:t>
+            </a:r>
+            <a:endParaRPr lang="pt-PT" dirty="0">
+              <a:solidFill>
+                <a:schemeClr val="tx1"/>
+              </a:solidFill>
+              <a:latin typeface="Aptos Mono" panose="020F0502020204030204" pitchFamily="49" charset="0"/>
+              <a:ea typeface="Tahoma" panose="020B0604030504040204" pitchFamily="34" charset="0"/>
+              <a:cs typeface="Tahoma" panose="020B0604030504040204" pitchFamily="34" charset="0"/>
+            </a:endParaRPr>
+          </a:p>
+          <a:p>
+            <a:r>
+              <a:rPr lang="pt-PT" dirty="0">
+                <a:solidFill>
+                  <a:schemeClr val="tx1"/>
+                </a:solidFill>
+                <a:latin typeface="Aptos Mono" panose="020F0502020204030204" pitchFamily="49" charset="0"/>
+                <a:ea typeface="Tahoma" panose="020B0604030504040204" pitchFamily="34" charset="0"/>
+                <a:cs typeface="Tahoma" panose="020B0604030504040204" pitchFamily="34" charset="0"/>
+              </a:rPr>
+              <a:t>Artista</a:t>
+            </a:r>
+          </a:p>
+          <a:p>
+            <a:r>
+              <a:rPr lang="pt-PT" dirty="0">
+                <a:solidFill>
+                  <a:schemeClr val="tx1"/>
+                </a:solidFill>
+                <a:latin typeface="Aptos Mono" panose="020F0502020204030204" pitchFamily="49" charset="0"/>
+                <a:ea typeface="Tahoma" panose="020B0604030504040204" pitchFamily="34" charset="0"/>
+                <a:cs typeface="Tahoma" panose="020B0604030504040204" pitchFamily="34" charset="0"/>
+              </a:rPr>
+              <a:t>Nº musicas</a:t>
+            </a:r>
+          </a:p>
+        </p:txBody>
+      </p:sp>
+      <p:sp>
+        <p:nvSpPr>
+          <p:cNvPr id="8" name="Rectangle: Rounded Corners 7">
+            <a:extLst>
+              <a:ext uri="{FF2B5EF4-FFF2-40B4-BE49-F238E27FC236}">
+                <a16:creationId xmlns:a16="http://schemas.microsoft.com/office/drawing/2014/main" id="{9D8DCE62-6F20-57E5-5FAB-EFF4D20B585F}"/>
+              </a:ext>
+            </a:extLst>
+          </p:cNvPr>
+          <p:cNvSpPr/>
+          <p:nvPr/>
+        </p:nvSpPr>
+        <p:spPr>
+          <a:xfrm>
+            <a:off x="7198360" y="2793534"/>
+            <a:ext cx="1828800" cy="1502113"/>
+          </a:xfrm>
+          <a:prstGeom prst="roundRect">
+            <a:avLst/>
+          </a:prstGeom>
+          <a:gradFill>
+            <a:gsLst>
+              <a:gs pos="0">
+                <a:schemeClr val="accent6">
+                  <a:lumMod val="75000"/>
+                </a:schemeClr>
+              </a:gs>
+              <a:gs pos="92000">
+                <a:schemeClr val="accent6">
+                  <a:lumMod val="105000"/>
+                  <a:satMod val="103000"/>
+                  <a:tint val="73000"/>
+                </a:schemeClr>
+              </a:gs>
+              <a:gs pos="100000">
+                <a:schemeClr val="accent6">
+                  <a:lumMod val="105000"/>
+                  <a:satMod val="109000"/>
+                  <a:tint val="81000"/>
+                </a:schemeClr>
+              </a:gs>
+            </a:gsLst>
+            <a:lin ang="5400000" scaled="0"/>
+          </a:gradFill>
+          <a:ln>
+            <a:noFill/>
+          </a:ln>
+        </p:spPr>
+        <p:style>
+          <a:lnRef idx="0">
+            <a:scrgbClr r="0" g="0" b="0"/>
+          </a:lnRef>
+          <a:fillRef idx="0">
+            <a:scrgbClr r="0" g="0" b="0"/>
+          </a:fillRef>
+          <a:effectRef idx="0">
+            <a:scrgbClr r="0" g="0" b="0"/>
+          </a:effectRef>
+          <a:fontRef idx="minor">
+            <a:schemeClr val="lt1"/>
+          </a:fontRef>
+        </p:style>
+        <p:txBody>
+          <a:bodyPr rtlCol="0" anchor="t"/>
+          <a:lstStyle/>
+          <a:p>
+            <a:r>
+              <a:rPr lang="pt-PT" dirty="0">
+                <a:solidFill>
+                  <a:schemeClr val="tx1"/>
+                </a:solidFill>
+                <a:latin typeface="Aptos Mono" panose="020F0502020204030204" pitchFamily="49" charset="0"/>
+                <a:ea typeface="Tahoma" panose="020B0604030504040204" pitchFamily="34" charset="0"/>
+                <a:cs typeface="Tahoma" panose="020B0604030504040204" pitchFamily="34" charset="0"/>
+              </a:rPr>
+              <a:t>Imagem</a:t>
+            </a:r>
+          </a:p>
+          <a:p>
+            <a:endParaRPr lang="pt-PT" dirty="0">
+              <a:solidFill>
+                <a:schemeClr val="tx1"/>
+              </a:solidFill>
+              <a:latin typeface="Aptos Mono" panose="020F0502020204030204" pitchFamily="49" charset="0"/>
+              <a:ea typeface="Tahoma" panose="020B0604030504040204" pitchFamily="34" charset="0"/>
+              <a:cs typeface="Tahoma" panose="020B0604030504040204" pitchFamily="34" charset="0"/>
+            </a:endParaRPr>
+          </a:p>
+          <a:p>
+            <a:r>
+              <a:rPr lang="pt-PT" dirty="0" err="1">
+                <a:solidFill>
+                  <a:schemeClr val="tx1"/>
+                </a:solidFill>
+                <a:latin typeface="Aptos Mono" panose="020F0502020204030204" pitchFamily="49" charset="0"/>
+                <a:ea typeface="Tahoma" panose="020B0604030504040204" pitchFamily="34" charset="0"/>
+                <a:cs typeface="Tahoma" panose="020B0604030504040204" pitchFamily="34" charset="0"/>
+              </a:rPr>
+              <a:t>Album</a:t>
+            </a:r>
+            <a:endParaRPr lang="pt-PT" dirty="0">
+              <a:solidFill>
+                <a:schemeClr val="tx1"/>
+              </a:solidFill>
+              <a:latin typeface="Aptos Mono" panose="020F0502020204030204" pitchFamily="49" charset="0"/>
+              <a:ea typeface="Tahoma" panose="020B0604030504040204" pitchFamily="34" charset="0"/>
+              <a:cs typeface="Tahoma" panose="020B0604030504040204" pitchFamily="34" charset="0"/>
+            </a:endParaRPr>
+          </a:p>
+          <a:p>
+            <a:r>
+              <a:rPr lang="pt-PT" dirty="0">
+                <a:solidFill>
+                  <a:schemeClr val="tx1"/>
+                </a:solidFill>
+                <a:latin typeface="Aptos Mono" panose="020F0502020204030204" pitchFamily="49" charset="0"/>
+                <a:ea typeface="Tahoma" panose="020B0604030504040204" pitchFamily="34" charset="0"/>
+                <a:cs typeface="Tahoma" panose="020B0604030504040204" pitchFamily="34" charset="0"/>
+              </a:rPr>
+              <a:t>Artista</a:t>
+            </a:r>
+          </a:p>
+          <a:p>
+            <a:r>
+              <a:rPr lang="pt-PT" dirty="0">
+                <a:solidFill>
+                  <a:schemeClr val="tx1"/>
+                </a:solidFill>
+                <a:latin typeface="Aptos Mono" panose="020F0502020204030204" pitchFamily="49" charset="0"/>
+                <a:ea typeface="Tahoma" panose="020B0604030504040204" pitchFamily="34" charset="0"/>
+                <a:cs typeface="Tahoma" panose="020B0604030504040204" pitchFamily="34" charset="0"/>
+              </a:rPr>
+              <a:t>Nº musicas</a:t>
+            </a:r>
+          </a:p>
+        </p:txBody>
+      </p:sp>
+      <p:sp>
+        <p:nvSpPr>
+          <p:cNvPr id="11" name="Rectangle: Rounded Corners 10">
+            <a:extLst>
+              <a:ext uri="{FF2B5EF4-FFF2-40B4-BE49-F238E27FC236}">
+                <a16:creationId xmlns:a16="http://schemas.microsoft.com/office/drawing/2014/main" id="{463555DB-3AEC-9368-C56C-60C5A2F0ABE3}"/>
+              </a:ext>
+            </a:extLst>
+          </p:cNvPr>
+          <p:cNvSpPr/>
+          <p:nvPr/>
+        </p:nvSpPr>
+        <p:spPr>
+          <a:xfrm>
+            <a:off x="9273540" y="2793533"/>
+            <a:ext cx="1828800" cy="1502113"/>
+          </a:xfrm>
+          <a:prstGeom prst="roundRect">
+            <a:avLst/>
+          </a:prstGeom>
+          <a:gradFill>
+            <a:gsLst>
+              <a:gs pos="0">
+                <a:schemeClr val="accent6">
+                  <a:lumMod val="75000"/>
+                </a:schemeClr>
+              </a:gs>
+              <a:gs pos="92000">
+                <a:schemeClr val="accent6">
+                  <a:lumMod val="105000"/>
+                  <a:satMod val="103000"/>
+                  <a:tint val="73000"/>
+                </a:schemeClr>
+              </a:gs>
+              <a:gs pos="100000">
+                <a:schemeClr val="accent6">
+                  <a:lumMod val="105000"/>
+                  <a:satMod val="109000"/>
+                  <a:tint val="81000"/>
+                </a:schemeClr>
+              </a:gs>
+            </a:gsLst>
+            <a:lin ang="5400000" scaled="0"/>
+          </a:gradFill>
+          <a:ln>
+            <a:noFill/>
+          </a:ln>
+        </p:spPr>
+        <p:style>
+          <a:lnRef idx="0">
+            <a:scrgbClr r="0" g="0" b="0"/>
+          </a:lnRef>
+          <a:fillRef idx="0">
+            <a:scrgbClr r="0" g="0" b="0"/>
+          </a:fillRef>
+          <a:effectRef idx="0">
+            <a:scrgbClr r="0" g="0" b="0"/>
+          </a:effectRef>
+          <a:fontRef idx="minor">
+            <a:schemeClr val="lt1"/>
+          </a:fontRef>
+        </p:style>
+        <p:txBody>
+          <a:bodyPr rtlCol="0" anchor="t"/>
+          <a:lstStyle/>
+          <a:p>
+            <a:r>
+              <a:rPr lang="pt-PT" dirty="0">
+                <a:solidFill>
+                  <a:schemeClr val="tx1"/>
+                </a:solidFill>
+                <a:latin typeface="Aptos Mono" panose="020F0502020204030204" pitchFamily="49" charset="0"/>
+                <a:ea typeface="Tahoma" panose="020B0604030504040204" pitchFamily="34" charset="0"/>
+                <a:cs typeface="Tahoma" panose="020B0604030504040204" pitchFamily="34" charset="0"/>
+              </a:rPr>
+              <a:t>Imagem</a:t>
+            </a:r>
+          </a:p>
+          <a:p>
+            <a:endParaRPr lang="pt-PT" dirty="0">
+              <a:solidFill>
+                <a:schemeClr val="tx1"/>
+              </a:solidFill>
+              <a:latin typeface="Aptos Mono" panose="020F0502020204030204" pitchFamily="49" charset="0"/>
+              <a:ea typeface="Tahoma" panose="020B0604030504040204" pitchFamily="34" charset="0"/>
+              <a:cs typeface="Tahoma" panose="020B0604030504040204" pitchFamily="34" charset="0"/>
+            </a:endParaRPr>
+          </a:p>
+          <a:p>
+            <a:r>
+              <a:rPr lang="pt-PT" dirty="0" err="1">
+                <a:solidFill>
+                  <a:schemeClr val="tx1"/>
+                </a:solidFill>
+                <a:latin typeface="Aptos Mono" panose="020F0502020204030204" pitchFamily="49" charset="0"/>
+                <a:ea typeface="Tahoma" panose="020B0604030504040204" pitchFamily="34" charset="0"/>
+                <a:cs typeface="Tahoma" panose="020B0604030504040204" pitchFamily="34" charset="0"/>
+              </a:rPr>
+              <a:t>Album</a:t>
+            </a:r>
+            <a:endParaRPr lang="pt-PT" dirty="0">
+              <a:solidFill>
+                <a:schemeClr val="tx1"/>
+              </a:solidFill>
+              <a:latin typeface="Aptos Mono" panose="020F0502020204030204" pitchFamily="49" charset="0"/>
+              <a:ea typeface="Tahoma" panose="020B0604030504040204" pitchFamily="34" charset="0"/>
+              <a:cs typeface="Tahoma" panose="020B0604030504040204" pitchFamily="34" charset="0"/>
+            </a:endParaRPr>
+          </a:p>
+          <a:p>
+            <a:r>
+              <a:rPr lang="pt-PT" dirty="0">
+                <a:solidFill>
+                  <a:schemeClr val="tx1"/>
+                </a:solidFill>
+                <a:latin typeface="Aptos Mono" panose="020F0502020204030204" pitchFamily="49" charset="0"/>
+                <a:ea typeface="Tahoma" panose="020B0604030504040204" pitchFamily="34" charset="0"/>
+                <a:cs typeface="Tahoma" panose="020B0604030504040204" pitchFamily="34" charset="0"/>
+              </a:rPr>
+              <a:t>Artista</a:t>
+            </a:r>
+          </a:p>
+          <a:p>
+            <a:r>
+              <a:rPr lang="pt-PT" dirty="0">
+                <a:solidFill>
+                  <a:schemeClr val="tx1"/>
+                </a:solidFill>
+                <a:latin typeface="Aptos Mono" panose="020F0502020204030204" pitchFamily="49" charset="0"/>
+                <a:ea typeface="Tahoma" panose="020B0604030504040204" pitchFamily="34" charset="0"/>
+                <a:cs typeface="Tahoma" panose="020B0604030504040204" pitchFamily="34" charset="0"/>
+              </a:rPr>
+              <a:t>Nº musicas</a:t>
+            </a:r>
+          </a:p>
+        </p:txBody>
+      </p:sp>
+      <p:sp>
+        <p:nvSpPr>
+          <p:cNvPr id="13" name="Rectangle: Rounded Corners 12">
+            <a:extLst>
+              <a:ext uri="{FF2B5EF4-FFF2-40B4-BE49-F238E27FC236}">
+                <a16:creationId xmlns:a16="http://schemas.microsoft.com/office/drawing/2014/main" id="{624C9E86-3CBB-0818-E80A-3BDDEA1D9385}"/>
+              </a:ext>
+            </a:extLst>
+          </p:cNvPr>
+          <p:cNvSpPr/>
+          <p:nvPr/>
+        </p:nvSpPr>
+        <p:spPr>
+          <a:xfrm>
+            <a:off x="7198360" y="4427262"/>
+            <a:ext cx="1828800" cy="1502113"/>
+          </a:xfrm>
+          <a:prstGeom prst="roundRect">
+            <a:avLst/>
+          </a:prstGeom>
+          <a:gradFill>
+            <a:gsLst>
+              <a:gs pos="0">
+                <a:schemeClr val="accent6">
+                  <a:lumMod val="75000"/>
+                </a:schemeClr>
+              </a:gs>
+              <a:gs pos="92000">
+                <a:schemeClr val="accent6">
+                  <a:lumMod val="105000"/>
+                  <a:satMod val="103000"/>
+                  <a:tint val="73000"/>
+                </a:schemeClr>
+              </a:gs>
+              <a:gs pos="100000">
+                <a:schemeClr val="accent6">
+                  <a:lumMod val="105000"/>
+                  <a:satMod val="109000"/>
+                  <a:tint val="81000"/>
+                </a:schemeClr>
+              </a:gs>
+            </a:gsLst>
+            <a:lin ang="5400000" scaled="0"/>
+          </a:gradFill>
+          <a:ln>
+            <a:noFill/>
+          </a:ln>
+        </p:spPr>
+        <p:style>
+          <a:lnRef idx="0">
+            <a:scrgbClr r="0" g="0" b="0"/>
+          </a:lnRef>
+          <a:fillRef idx="0">
+            <a:scrgbClr r="0" g="0" b="0"/>
+          </a:fillRef>
+          <a:effectRef idx="0">
+            <a:scrgbClr r="0" g="0" b="0"/>
+          </a:effectRef>
+          <a:fontRef idx="minor">
+            <a:schemeClr val="lt1"/>
+          </a:fontRef>
+        </p:style>
+        <p:txBody>
+          <a:bodyPr rtlCol="0" anchor="t"/>
+          <a:lstStyle/>
+          <a:p>
+            <a:r>
+              <a:rPr lang="pt-PT" dirty="0">
+                <a:solidFill>
+                  <a:schemeClr val="tx1"/>
+                </a:solidFill>
+                <a:latin typeface="Aptos Mono" panose="020F0502020204030204" pitchFamily="49" charset="0"/>
+                <a:ea typeface="Tahoma" panose="020B0604030504040204" pitchFamily="34" charset="0"/>
+                <a:cs typeface="Tahoma" panose="020B0604030504040204" pitchFamily="34" charset="0"/>
+              </a:rPr>
+              <a:t>Imagem</a:t>
+            </a:r>
+          </a:p>
+          <a:p>
+            <a:endParaRPr lang="pt-PT" dirty="0">
+              <a:solidFill>
+                <a:schemeClr val="tx1"/>
+              </a:solidFill>
+              <a:latin typeface="Aptos Mono" panose="020F0502020204030204" pitchFamily="49" charset="0"/>
+              <a:ea typeface="Tahoma" panose="020B0604030504040204" pitchFamily="34" charset="0"/>
+              <a:cs typeface="Tahoma" panose="020B0604030504040204" pitchFamily="34" charset="0"/>
+            </a:endParaRPr>
+          </a:p>
+          <a:p>
+            <a:r>
+              <a:rPr lang="pt-PT" dirty="0" err="1">
+                <a:solidFill>
+                  <a:schemeClr val="tx1"/>
+                </a:solidFill>
+                <a:latin typeface="Aptos Mono" panose="020F0502020204030204" pitchFamily="49" charset="0"/>
+                <a:ea typeface="Tahoma" panose="020B0604030504040204" pitchFamily="34" charset="0"/>
+                <a:cs typeface="Tahoma" panose="020B0604030504040204" pitchFamily="34" charset="0"/>
+              </a:rPr>
+              <a:t>Album</a:t>
+            </a:r>
+            <a:endParaRPr lang="pt-PT" dirty="0">
+              <a:solidFill>
+                <a:schemeClr val="tx1"/>
+              </a:solidFill>
+              <a:latin typeface="Aptos Mono" panose="020F0502020204030204" pitchFamily="49" charset="0"/>
+              <a:ea typeface="Tahoma" panose="020B0604030504040204" pitchFamily="34" charset="0"/>
+              <a:cs typeface="Tahoma" panose="020B0604030504040204" pitchFamily="34" charset="0"/>
+            </a:endParaRPr>
+          </a:p>
+          <a:p>
+            <a:r>
+              <a:rPr lang="pt-PT" dirty="0">
+                <a:solidFill>
+                  <a:schemeClr val="tx1"/>
+                </a:solidFill>
+                <a:latin typeface="Aptos Mono" panose="020F0502020204030204" pitchFamily="49" charset="0"/>
+                <a:ea typeface="Tahoma" panose="020B0604030504040204" pitchFamily="34" charset="0"/>
+                <a:cs typeface="Tahoma" panose="020B0604030504040204" pitchFamily="34" charset="0"/>
+              </a:rPr>
+              <a:t>Artista</a:t>
+            </a:r>
+          </a:p>
+          <a:p>
+            <a:r>
+              <a:rPr lang="pt-PT" dirty="0">
+                <a:solidFill>
+                  <a:schemeClr val="tx1"/>
+                </a:solidFill>
+                <a:latin typeface="Aptos Mono" panose="020F0502020204030204" pitchFamily="49" charset="0"/>
+                <a:ea typeface="Tahoma" panose="020B0604030504040204" pitchFamily="34" charset="0"/>
+                <a:cs typeface="Tahoma" panose="020B0604030504040204" pitchFamily="34" charset="0"/>
+              </a:rPr>
+              <a:t>Nº musicas</a:t>
+            </a:r>
+          </a:p>
+        </p:txBody>
+      </p:sp>
+      <p:sp>
+        <p:nvSpPr>
+          <p:cNvPr id="16" name="Rectangle: Rounded Corners 15">
+            <a:extLst>
+              <a:ext uri="{FF2B5EF4-FFF2-40B4-BE49-F238E27FC236}">
+                <a16:creationId xmlns:a16="http://schemas.microsoft.com/office/drawing/2014/main" id="{79604313-9110-819D-33AA-C0139229F4D2}"/>
+              </a:ext>
+            </a:extLst>
+          </p:cNvPr>
+          <p:cNvSpPr/>
+          <p:nvPr/>
+        </p:nvSpPr>
+        <p:spPr>
+          <a:xfrm>
+            <a:off x="9273540" y="4427261"/>
+            <a:ext cx="1828800" cy="1502113"/>
+          </a:xfrm>
+          <a:prstGeom prst="roundRect">
+            <a:avLst/>
+          </a:prstGeom>
+          <a:gradFill>
+            <a:gsLst>
+              <a:gs pos="0">
+                <a:schemeClr val="accent6">
+                  <a:lumMod val="75000"/>
+                </a:schemeClr>
+              </a:gs>
+              <a:gs pos="92000">
+                <a:schemeClr val="accent6">
+                  <a:lumMod val="105000"/>
+                  <a:satMod val="103000"/>
+                  <a:tint val="73000"/>
+                </a:schemeClr>
+              </a:gs>
+              <a:gs pos="100000">
+                <a:schemeClr val="accent6">
+                  <a:lumMod val="105000"/>
+                  <a:satMod val="109000"/>
+                  <a:tint val="81000"/>
+                </a:schemeClr>
+              </a:gs>
+            </a:gsLst>
+            <a:lin ang="5400000" scaled="0"/>
+          </a:gradFill>
+          <a:ln>
+            <a:noFill/>
+          </a:ln>
+        </p:spPr>
+        <p:style>
+          <a:lnRef idx="0">
+            <a:scrgbClr r="0" g="0" b="0"/>
+          </a:lnRef>
+          <a:fillRef idx="0">
+            <a:scrgbClr r="0" g="0" b="0"/>
+          </a:fillRef>
+          <a:effectRef idx="0">
+            <a:scrgbClr r="0" g="0" b="0"/>
+          </a:effectRef>
+          <a:fontRef idx="minor">
+            <a:schemeClr val="lt1"/>
+          </a:fontRef>
+        </p:style>
+        <p:txBody>
+          <a:bodyPr rtlCol="0" anchor="t"/>
+          <a:lstStyle/>
+          <a:p>
+            <a:r>
+              <a:rPr lang="pt-PT" dirty="0">
+                <a:solidFill>
+                  <a:schemeClr val="tx1"/>
+                </a:solidFill>
+                <a:latin typeface="Aptos Mono" panose="020F0502020204030204" pitchFamily="49" charset="0"/>
+                <a:ea typeface="Tahoma" panose="020B0604030504040204" pitchFamily="34" charset="0"/>
+                <a:cs typeface="Tahoma" panose="020B0604030504040204" pitchFamily="34" charset="0"/>
+              </a:rPr>
+              <a:t>Imagem</a:t>
+            </a:r>
+          </a:p>
+          <a:p>
+            <a:endParaRPr lang="pt-PT" dirty="0">
+              <a:solidFill>
+                <a:schemeClr val="tx1"/>
+              </a:solidFill>
+              <a:latin typeface="Aptos Mono" panose="020F0502020204030204" pitchFamily="49" charset="0"/>
+              <a:ea typeface="Tahoma" panose="020B0604030504040204" pitchFamily="34" charset="0"/>
+              <a:cs typeface="Tahoma" panose="020B0604030504040204" pitchFamily="34" charset="0"/>
+            </a:endParaRPr>
+          </a:p>
+          <a:p>
+            <a:r>
+              <a:rPr lang="pt-PT" dirty="0" err="1">
+                <a:solidFill>
+                  <a:schemeClr val="tx1"/>
+                </a:solidFill>
+                <a:latin typeface="Aptos Mono" panose="020F0502020204030204" pitchFamily="49" charset="0"/>
+                <a:ea typeface="Tahoma" panose="020B0604030504040204" pitchFamily="34" charset="0"/>
+                <a:cs typeface="Tahoma" panose="020B0604030504040204" pitchFamily="34" charset="0"/>
+              </a:rPr>
+              <a:t>Album</a:t>
+            </a:r>
+            <a:endParaRPr lang="pt-PT" dirty="0">
+              <a:solidFill>
+                <a:schemeClr val="tx1"/>
+              </a:solidFill>
+              <a:latin typeface="Aptos Mono" panose="020F0502020204030204" pitchFamily="49" charset="0"/>
+              <a:ea typeface="Tahoma" panose="020B0604030504040204" pitchFamily="34" charset="0"/>
+              <a:cs typeface="Tahoma" panose="020B0604030504040204" pitchFamily="34" charset="0"/>
+            </a:endParaRPr>
+          </a:p>
+          <a:p>
+            <a:r>
+              <a:rPr lang="pt-PT" dirty="0">
+                <a:solidFill>
+                  <a:schemeClr val="tx1"/>
+                </a:solidFill>
+                <a:latin typeface="Aptos Mono" panose="020F0502020204030204" pitchFamily="49" charset="0"/>
+                <a:ea typeface="Tahoma" panose="020B0604030504040204" pitchFamily="34" charset="0"/>
+                <a:cs typeface="Tahoma" panose="020B0604030504040204" pitchFamily="34" charset="0"/>
+              </a:rPr>
+              <a:t>Artista</a:t>
+            </a:r>
+          </a:p>
+          <a:p>
+            <a:r>
+              <a:rPr lang="pt-PT" dirty="0">
+                <a:solidFill>
+                  <a:schemeClr val="tx1"/>
+                </a:solidFill>
+                <a:latin typeface="Aptos Mono" panose="020F0502020204030204" pitchFamily="49" charset="0"/>
+                <a:ea typeface="Tahoma" panose="020B0604030504040204" pitchFamily="34" charset="0"/>
+                <a:cs typeface="Tahoma" panose="020B0604030504040204" pitchFamily="34" charset="0"/>
+              </a:rPr>
+              <a:t>Nº musicas</a:t>
+            </a:r>
+          </a:p>
+        </p:txBody>
+      </p:sp>
+    </p:spTree>
+    <p:extLst>
+      <p:ext uri="{BB962C8B-B14F-4D97-AF65-F5344CB8AC3E}">
+        <p14:creationId xmlns:p14="http://schemas.microsoft.com/office/powerpoint/2010/main" val="1828831319"/>
+      </p:ext>
+    </p:extLst>
+  </p:cSld>
+  <p:clrMapOvr>
+    <a:masterClrMapping/>
+  </p:clrMapOvr>
+</p:sld>
+</file>
+
+<file path=ppt/slides/slide7.xml><?xml version="1.0" encoding="utf-8"?>
+<p:sld xmlns:a="http://schemas.openxmlformats.org/drawingml/2006/main" xmlns:r="http://schemas.openxmlformats.org/officeDocument/2006/relationships" xmlns:p="http://schemas.openxmlformats.org/presentationml/2006/main">
+  <p:cSld>
+    <p:spTree>
+      <p:nvGrpSpPr>
+        <p:cNvPr id="1" name="">
+          <a:extLst>
+            <a:ext uri="{FF2B5EF4-FFF2-40B4-BE49-F238E27FC236}">
+              <a16:creationId xmlns:a16="http://schemas.microsoft.com/office/drawing/2014/main" id="{D18BE0DD-00C0-53AB-6CBB-C9411CB29278}"/>
+            </a:ext>
+          </a:extLst>
+        </p:cNvPr>
+        <p:cNvGrpSpPr/>
+        <p:nvPr/>
+      </p:nvGrpSpPr>
+      <p:grpSpPr>
+        <a:xfrm>
+          <a:off x="0" y="0"/>
+          <a:ext cx="0" cy="0"/>
+          <a:chOff x="0" y="0"/>
+          <a:chExt cx="0" cy="0"/>
+        </a:xfrm>
+      </p:grpSpPr>
+      <p:sp>
+        <p:nvSpPr>
+          <p:cNvPr id="23" name="Rectangle 22">
+            <a:extLst>
+              <a:ext uri="{FF2B5EF4-FFF2-40B4-BE49-F238E27FC236}">
+                <a16:creationId xmlns:a16="http://schemas.microsoft.com/office/drawing/2014/main" id="{EDD58176-633C-2568-07EA-5188A6E0438D}"/>
+              </a:ext>
+            </a:extLst>
+          </p:cNvPr>
+          <p:cNvSpPr/>
+          <p:nvPr/>
+        </p:nvSpPr>
+        <p:spPr>
+          <a:xfrm>
+            <a:off x="7051040" y="435987"/>
+            <a:ext cx="4297680" cy="5986026"/>
+          </a:xfrm>
+          <a:prstGeom prst="rect">
+            <a:avLst/>
+          </a:prstGeom>
+          <a:solidFill>
+            <a:schemeClr val="tx2">
+              <a:lumMod val="50000"/>
+              <a:lumOff val="50000"/>
+            </a:schemeClr>
+          </a:solidFill>
+        </p:spPr>
+        <p:style>
+          <a:lnRef idx="2">
+            <a:schemeClr val="accent1">
+              <a:shade val="15000"/>
+            </a:schemeClr>
+          </a:lnRef>
+          <a:fillRef idx="1">
+            <a:schemeClr val="accent1"/>
+          </a:fillRef>
+          <a:effectRef idx="0">
+            <a:schemeClr val="accent1"/>
+          </a:effectRef>
+          <a:fontRef idx="minor">
+            <a:schemeClr val="lt1"/>
+          </a:fontRef>
+        </p:style>
+        <p:txBody>
+          <a:bodyPr rtlCol="0" anchor="t" anchorCtr="0"/>
+          <a:lstStyle/>
+          <a:p>
+            <a:pPr algn="ctr"/>
+            <a:endParaRPr lang="pt-PT" sz="3000" dirty="0">
+              <a:solidFill>
+                <a:schemeClr val="bg1"/>
+              </a:solidFill>
+            </a:endParaRPr>
+          </a:p>
+        </p:txBody>
+      </p:sp>
+      <p:sp>
+        <p:nvSpPr>
+          <p:cNvPr id="3" name="Rectangle: Rounded Corners 2">
+            <a:extLst>
+              <a:ext uri="{FF2B5EF4-FFF2-40B4-BE49-F238E27FC236}">
+                <a16:creationId xmlns:a16="http://schemas.microsoft.com/office/drawing/2014/main" id="{65114A3F-BA70-C12B-3FE7-D456193ACFF7}"/>
+              </a:ext>
+            </a:extLst>
+          </p:cNvPr>
+          <p:cNvSpPr/>
+          <p:nvPr/>
+        </p:nvSpPr>
+        <p:spPr>
+          <a:xfrm>
+            <a:off x="7198360" y="1159806"/>
+            <a:ext cx="1828800" cy="1502113"/>
+          </a:xfrm>
+          <a:prstGeom prst="roundRect">
+            <a:avLst/>
+          </a:prstGeom>
+          <a:gradFill>
+            <a:gsLst>
+              <a:gs pos="0">
+                <a:schemeClr val="accent6">
+                  <a:lumMod val="75000"/>
+                </a:schemeClr>
+              </a:gs>
+              <a:gs pos="92000">
+                <a:schemeClr val="accent6">
+                  <a:lumMod val="105000"/>
+                  <a:satMod val="103000"/>
+                  <a:tint val="73000"/>
+                </a:schemeClr>
+              </a:gs>
+              <a:gs pos="100000">
+                <a:schemeClr val="accent6">
+                  <a:lumMod val="105000"/>
+                  <a:satMod val="109000"/>
+                  <a:tint val="81000"/>
+                </a:schemeClr>
+              </a:gs>
+            </a:gsLst>
+            <a:lin ang="5400000" scaled="0"/>
+          </a:gradFill>
+          <a:ln>
+            <a:noFill/>
+          </a:ln>
+        </p:spPr>
+        <p:style>
+          <a:lnRef idx="0">
+            <a:scrgbClr r="0" g="0" b="0"/>
+          </a:lnRef>
+          <a:fillRef idx="0">
+            <a:scrgbClr r="0" g="0" b="0"/>
+          </a:fillRef>
+          <a:effectRef idx="0">
+            <a:scrgbClr r="0" g="0" b="0"/>
+          </a:effectRef>
+          <a:fontRef idx="minor">
+            <a:schemeClr val="lt1"/>
+          </a:fontRef>
+        </p:style>
+        <p:txBody>
+          <a:bodyPr rtlCol="0" anchor="t"/>
+          <a:lstStyle/>
+          <a:p>
+            <a:r>
+              <a:rPr lang="pt-PT" dirty="0">
+                <a:solidFill>
+                  <a:schemeClr val="tx1"/>
+                </a:solidFill>
+                <a:latin typeface="Aptos Mono" panose="020F0502020204030204" pitchFamily="49" charset="0"/>
+                <a:ea typeface="Tahoma" panose="020B0604030504040204" pitchFamily="34" charset="0"/>
+                <a:cs typeface="Tahoma" panose="020B0604030504040204" pitchFamily="34" charset="0"/>
+              </a:rPr>
+              <a:t>Imagem</a:t>
+            </a:r>
+          </a:p>
+          <a:p>
+            <a:endParaRPr lang="pt-PT" dirty="0">
+              <a:solidFill>
+                <a:schemeClr val="tx1"/>
+              </a:solidFill>
+              <a:latin typeface="Aptos Mono" panose="020F0502020204030204" pitchFamily="49" charset="0"/>
+              <a:ea typeface="Tahoma" panose="020B0604030504040204" pitchFamily="34" charset="0"/>
+              <a:cs typeface="Tahoma" panose="020B0604030504040204" pitchFamily="34" charset="0"/>
+            </a:endParaRPr>
+          </a:p>
+          <a:p>
+            <a:r>
+              <a:rPr lang="pt-PT" dirty="0">
+                <a:solidFill>
+                  <a:schemeClr val="tx1"/>
+                </a:solidFill>
+                <a:latin typeface="Aptos Mono" panose="020F0502020204030204" pitchFamily="49" charset="0"/>
+                <a:ea typeface="Tahoma" panose="020B0604030504040204" pitchFamily="34" charset="0"/>
+                <a:cs typeface="Tahoma" panose="020B0604030504040204" pitchFamily="34" charset="0"/>
+              </a:rPr>
+              <a:t>Artista</a:t>
+            </a:r>
+          </a:p>
+          <a:p>
+            <a:r>
+              <a:rPr lang="pt-PT" dirty="0">
+                <a:solidFill>
+                  <a:schemeClr val="tx1"/>
+                </a:solidFill>
+                <a:latin typeface="Aptos Mono" panose="020F0502020204030204" pitchFamily="49" charset="0"/>
+                <a:ea typeface="Tahoma" panose="020B0604030504040204" pitchFamily="34" charset="0"/>
+                <a:cs typeface="Tahoma" panose="020B0604030504040204" pitchFamily="34" charset="0"/>
+              </a:rPr>
+              <a:t>Nº </a:t>
+            </a:r>
+            <a:r>
+              <a:rPr lang="pt-PT" dirty="0" err="1">
+                <a:solidFill>
+                  <a:schemeClr val="tx1"/>
+                </a:solidFill>
+                <a:latin typeface="Aptos Mono" panose="020F0502020204030204" pitchFamily="49" charset="0"/>
+                <a:ea typeface="Tahoma" panose="020B0604030504040204" pitchFamily="34" charset="0"/>
+                <a:cs typeface="Tahoma" panose="020B0604030504040204" pitchFamily="34" charset="0"/>
+              </a:rPr>
+              <a:t>Albuns</a:t>
+            </a:r>
+            <a:endParaRPr lang="pt-PT" dirty="0">
+              <a:solidFill>
+                <a:schemeClr val="tx1"/>
+              </a:solidFill>
+              <a:latin typeface="Aptos Mono" panose="020F0502020204030204" pitchFamily="49" charset="0"/>
+              <a:ea typeface="Tahoma" panose="020B0604030504040204" pitchFamily="34" charset="0"/>
+              <a:cs typeface="Tahoma" panose="020B0604030504040204" pitchFamily="34" charset="0"/>
+            </a:endParaRPr>
+          </a:p>
+        </p:txBody>
+      </p:sp>
+      <p:sp>
+        <p:nvSpPr>
+          <p:cNvPr id="4" name="TextBox 3">
+            <a:extLst>
+              <a:ext uri="{FF2B5EF4-FFF2-40B4-BE49-F238E27FC236}">
+                <a16:creationId xmlns:a16="http://schemas.microsoft.com/office/drawing/2014/main" id="{6410BC27-A9EF-13F1-C01A-D5DA3053ED07}"/>
+              </a:ext>
+            </a:extLst>
+          </p:cNvPr>
+          <p:cNvSpPr txBox="1"/>
+          <p:nvPr/>
+        </p:nvSpPr>
+        <p:spPr>
+          <a:xfrm>
+            <a:off x="7081520" y="515481"/>
+            <a:ext cx="747384" cy="369332"/>
+          </a:xfrm>
+          <a:prstGeom prst="rect">
+            <a:avLst/>
+          </a:prstGeom>
+          <a:noFill/>
+        </p:spPr>
+        <p:txBody>
+          <a:bodyPr wrap="none" rtlCol="0">
+            <a:spAutoFit/>
+          </a:bodyPr>
+          <a:lstStyle/>
+          <a:p>
+            <a:r>
+              <a:rPr lang="pt-PT" dirty="0">
+                <a:solidFill>
+                  <a:schemeClr val="bg1"/>
+                </a:solidFill>
+              </a:rPr>
+              <a:t>voltar</a:t>
+            </a:r>
+          </a:p>
+        </p:txBody>
+      </p:sp>
+      <p:sp>
+        <p:nvSpPr>
+          <p:cNvPr id="28" name="TextBox 27">
+            <a:extLst>
+              <a:ext uri="{FF2B5EF4-FFF2-40B4-BE49-F238E27FC236}">
+                <a16:creationId xmlns:a16="http://schemas.microsoft.com/office/drawing/2014/main" id="{9F89C0A4-656E-0F18-CCEA-B00540659B3F}"/>
+              </a:ext>
+            </a:extLst>
+          </p:cNvPr>
+          <p:cNvSpPr txBox="1"/>
+          <p:nvPr/>
+        </p:nvSpPr>
+        <p:spPr>
+          <a:xfrm>
+            <a:off x="934720" y="329922"/>
+            <a:ext cx="2468433" cy="553998"/>
+          </a:xfrm>
+          <a:prstGeom prst="rect">
+            <a:avLst/>
+          </a:prstGeom>
+          <a:noFill/>
+        </p:spPr>
+        <p:txBody>
+          <a:bodyPr wrap="none" rtlCol="0">
+            <a:spAutoFit/>
+          </a:bodyPr>
+          <a:lstStyle/>
+          <a:p>
+            <a:r>
+              <a:rPr lang="pt-PT" sz="3000" dirty="0"/>
+              <a:t>Menu Artistas</a:t>
+            </a:r>
+          </a:p>
+        </p:txBody>
+      </p:sp>
+      <p:sp>
+        <p:nvSpPr>
+          <p:cNvPr id="6" name="Rectangle: Rounded Corners 5">
+            <a:extLst>
+              <a:ext uri="{FF2B5EF4-FFF2-40B4-BE49-F238E27FC236}">
+                <a16:creationId xmlns:a16="http://schemas.microsoft.com/office/drawing/2014/main" id="{2E0C44E9-B899-BAD0-9A8F-DE24C1A97F68}"/>
+              </a:ext>
+            </a:extLst>
+          </p:cNvPr>
+          <p:cNvSpPr/>
+          <p:nvPr/>
+        </p:nvSpPr>
+        <p:spPr>
+          <a:xfrm>
+            <a:off x="9273540" y="1159805"/>
+            <a:ext cx="1828800" cy="1502113"/>
+          </a:xfrm>
+          <a:prstGeom prst="roundRect">
+            <a:avLst/>
+          </a:prstGeom>
+          <a:gradFill>
+            <a:gsLst>
+              <a:gs pos="0">
+                <a:schemeClr val="accent6">
+                  <a:lumMod val="75000"/>
+                </a:schemeClr>
+              </a:gs>
+              <a:gs pos="92000">
+                <a:schemeClr val="accent6">
+                  <a:lumMod val="105000"/>
+                  <a:satMod val="103000"/>
+                  <a:tint val="73000"/>
+                </a:schemeClr>
+              </a:gs>
+              <a:gs pos="100000">
+                <a:schemeClr val="accent6">
+                  <a:lumMod val="105000"/>
+                  <a:satMod val="109000"/>
+                  <a:tint val="81000"/>
+                </a:schemeClr>
+              </a:gs>
+            </a:gsLst>
+            <a:lin ang="5400000" scaled="0"/>
+          </a:gradFill>
+          <a:ln>
+            <a:noFill/>
+          </a:ln>
+        </p:spPr>
+        <p:style>
+          <a:lnRef idx="0">
+            <a:scrgbClr r="0" g="0" b="0"/>
+          </a:lnRef>
+          <a:fillRef idx="0">
+            <a:scrgbClr r="0" g="0" b="0"/>
+          </a:fillRef>
+          <a:effectRef idx="0">
+            <a:scrgbClr r="0" g="0" b="0"/>
+          </a:effectRef>
+          <a:fontRef idx="minor">
+            <a:schemeClr val="lt1"/>
+          </a:fontRef>
+        </p:style>
+        <p:txBody>
+          <a:bodyPr rtlCol="0" anchor="t"/>
+          <a:lstStyle/>
+          <a:p>
+            <a:r>
+              <a:rPr lang="pt-PT" dirty="0">
+                <a:solidFill>
+                  <a:schemeClr val="tx1"/>
+                </a:solidFill>
+                <a:latin typeface="Aptos Mono" panose="020F0502020204030204" pitchFamily="49" charset="0"/>
+                <a:ea typeface="Tahoma" panose="020B0604030504040204" pitchFamily="34" charset="0"/>
+                <a:cs typeface="Tahoma" panose="020B0604030504040204" pitchFamily="34" charset="0"/>
+              </a:rPr>
+              <a:t>Imagem</a:t>
+            </a:r>
+          </a:p>
+          <a:p>
+            <a:endParaRPr lang="pt-PT" dirty="0">
+              <a:solidFill>
+                <a:schemeClr val="tx1"/>
+              </a:solidFill>
+              <a:latin typeface="Aptos Mono" panose="020F0502020204030204" pitchFamily="49" charset="0"/>
+              <a:ea typeface="Tahoma" panose="020B0604030504040204" pitchFamily="34" charset="0"/>
+              <a:cs typeface="Tahoma" panose="020B0604030504040204" pitchFamily="34" charset="0"/>
+            </a:endParaRPr>
+          </a:p>
+          <a:p>
+            <a:r>
+              <a:rPr lang="pt-PT" dirty="0">
+                <a:solidFill>
+                  <a:schemeClr val="tx1"/>
+                </a:solidFill>
+                <a:latin typeface="Aptos Mono" panose="020F0502020204030204" pitchFamily="49" charset="0"/>
+                <a:ea typeface="Tahoma" panose="020B0604030504040204" pitchFamily="34" charset="0"/>
+                <a:cs typeface="Tahoma" panose="020B0604030504040204" pitchFamily="34" charset="0"/>
+              </a:rPr>
+              <a:t>Artista</a:t>
+            </a:r>
+          </a:p>
+          <a:p>
+            <a:r>
+              <a:rPr lang="pt-PT" dirty="0">
+                <a:solidFill>
+                  <a:schemeClr val="tx1"/>
+                </a:solidFill>
+                <a:latin typeface="Aptos Mono" panose="020F0502020204030204" pitchFamily="49" charset="0"/>
+                <a:ea typeface="Tahoma" panose="020B0604030504040204" pitchFamily="34" charset="0"/>
+                <a:cs typeface="Tahoma" panose="020B0604030504040204" pitchFamily="34" charset="0"/>
+              </a:rPr>
+              <a:t>Nº </a:t>
+            </a:r>
+            <a:r>
+              <a:rPr lang="pt-PT" dirty="0" err="1">
+                <a:solidFill>
+                  <a:schemeClr val="tx1"/>
+                </a:solidFill>
+                <a:latin typeface="Aptos Mono" panose="020F0502020204030204" pitchFamily="49" charset="0"/>
+                <a:ea typeface="Tahoma" panose="020B0604030504040204" pitchFamily="34" charset="0"/>
+                <a:cs typeface="Tahoma" panose="020B0604030504040204" pitchFamily="34" charset="0"/>
+              </a:rPr>
+              <a:t>Albuns</a:t>
+            </a:r>
+            <a:endParaRPr lang="pt-PT" dirty="0">
+              <a:solidFill>
+                <a:schemeClr val="tx1"/>
+              </a:solidFill>
+              <a:latin typeface="Aptos Mono" panose="020F0502020204030204" pitchFamily="49" charset="0"/>
+              <a:ea typeface="Tahoma" panose="020B0604030504040204" pitchFamily="34" charset="0"/>
+              <a:cs typeface="Tahoma" panose="020B0604030504040204" pitchFamily="34" charset="0"/>
+            </a:endParaRPr>
+          </a:p>
+        </p:txBody>
+      </p:sp>
+      <p:sp>
+        <p:nvSpPr>
+          <p:cNvPr id="9" name="Rectangle: Rounded Corners 8">
+            <a:extLst>
+              <a:ext uri="{FF2B5EF4-FFF2-40B4-BE49-F238E27FC236}">
+                <a16:creationId xmlns:a16="http://schemas.microsoft.com/office/drawing/2014/main" id="{9B28258D-E739-6113-94F1-C6456C43CE1F}"/>
+              </a:ext>
+            </a:extLst>
+          </p:cNvPr>
+          <p:cNvSpPr/>
+          <p:nvPr/>
+        </p:nvSpPr>
+        <p:spPr>
+          <a:xfrm>
+            <a:off x="7198360" y="2902356"/>
+            <a:ext cx="1828800" cy="1502113"/>
+          </a:xfrm>
+          <a:prstGeom prst="roundRect">
+            <a:avLst/>
+          </a:prstGeom>
+          <a:gradFill>
+            <a:gsLst>
+              <a:gs pos="0">
+                <a:schemeClr val="accent6">
+                  <a:lumMod val="75000"/>
+                </a:schemeClr>
+              </a:gs>
+              <a:gs pos="92000">
+                <a:schemeClr val="accent6">
+                  <a:lumMod val="105000"/>
+                  <a:satMod val="103000"/>
+                  <a:tint val="73000"/>
+                </a:schemeClr>
+              </a:gs>
+              <a:gs pos="100000">
+                <a:schemeClr val="accent6">
+                  <a:lumMod val="105000"/>
+                  <a:satMod val="109000"/>
+                  <a:tint val="81000"/>
+                </a:schemeClr>
+              </a:gs>
+            </a:gsLst>
+            <a:lin ang="5400000" scaled="0"/>
+          </a:gradFill>
+          <a:ln>
+            <a:noFill/>
+          </a:ln>
+        </p:spPr>
+        <p:style>
+          <a:lnRef idx="0">
+            <a:scrgbClr r="0" g="0" b="0"/>
+          </a:lnRef>
+          <a:fillRef idx="0">
+            <a:scrgbClr r="0" g="0" b="0"/>
+          </a:fillRef>
+          <a:effectRef idx="0">
+            <a:scrgbClr r="0" g="0" b="0"/>
+          </a:effectRef>
+          <a:fontRef idx="minor">
+            <a:schemeClr val="lt1"/>
+          </a:fontRef>
+        </p:style>
+        <p:txBody>
+          <a:bodyPr rtlCol="0" anchor="t"/>
+          <a:lstStyle/>
+          <a:p>
+            <a:r>
+              <a:rPr lang="pt-PT" dirty="0">
+                <a:solidFill>
+                  <a:schemeClr val="tx1"/>
+                </a:solidFill>
+                <a:latin typeface="Aptos Mono" panose="020F0502020204030204" pitchFamily="49" charset="0"/>
+                <a:ea typeface="Tahoma" panose="020B0604030504040204" pitchFamily="34" charset="0"/>
+                <a:cs typeface="Tahoma" panose="020B0604030504040204" pitchFamily="34" charset="0"/>
+              </a:rPr>
+              <a:t>Imagem</a:t>
+            </a:r>
+          </a:p>
+          <a:p>
+            <a:endParaRPr lang="pt-PT" dirty="0">
+              <a:solidFill>
+                <a:schemeClr val="tx1"/>
+              </a:solidFill>
+              <a:latin typeface="Aptos Mono" panose="020F0502020204030204" pitchFamily="49" charset="0"/>
+              <a:ea typeface="Tahoma" panose="020B0604030504040204" pitchFamily="34" charset="0"/>
+              <a:cs typeface="Tahoma" panose="020B0604030504040204" pitchFamily="34" charset="0"/>
+            </a:endParaRPr>
+          </a:p>
+          <a:p>
+            <a:r>
+              <a:rPr lang="pt-PT" dirty="0">
+                <a:solidFill>
+                  <a:schemeClr val="tx1"/>
+                </a:solidFill>
+                <a:latin typeface="Aptos Mono" panose="020F0502020204030204" pitchFamily="49" charset="0"/>
+                <a:ea typeface="Tahoma" panose="020B0604030504040204" pitchFamily="34" charset="0"/>
+                <a:cs typeface="Tahoma" panose="020B0604030504040204" pitchFamily="34" charset="0"/>
+              </a:rPr>
+              <a:t>Artista</a:t>
+            </a:r>
+          </a:p>
+          <a:p>
+            <a:r>
+              <a:rPr lang="pt-PT" dirty="0">
+                <a:solidFill>
+                  <a:schemeClr val="tx1"/>
+                </a:solidFill>
+                <a:latin typeface="Aptos Mono" panose="020F0502020204030204" pitchFamily="49" charset="0"/>
+                <a:ea typeface="Tahoma" panose="020B0604030504040204" pitchFamily="34" charset="0"/>
+                <a:cs typeface="Tahoma" panose="020B0604030504040204" pitchFamily="34" charset="0"/>
+              </a:rPr>
+              <a:t>Nº </a:t>
+            </a:r>
+            <a:r>
+              <a:rPr lang="pt-PT" dirty="0" err="1">
+                <a:solidFill>
+                  <a:schemeClr val="tx1"/>
+                </a:solidFill>
+                <a:latin typeface="Aptos Mono" panose="020F0502020204030204" pitchFamily="49" charset="0"/>
+                <a:ea typeface="Tahoma" panose="020B0604030504040204" pitchFamily="34" charset="0"/>
+                <a:cs typeface="Tahoma" panose="020B0604030504040204" pitchFamily="34" charset="0"/>
+              </a:rPr>
+              <a:t>Albuns</a:t>
+            </a:r>
+            <a:endParaRPr lang="pt-PT" dirty="0">
+              <a:solidFill>
+                <a:schemeClr val="tx1"/>
+              </a:solidFill>
+              <a:latin typeface="Aptos Mono" panose="020F0502020204030204" pitchFamily="49" charset="0"/>
+              <a:ea typeface="Tahoma" panose="020B0604030504040204" pitchFamily="34" charset="0"/>
+              <a:cs typeface="Tahoma" panose="020B0604030504040204" pitchFamily="34" charset="0"/>
+            </a:endParaRPr>
+          </a:p>
+        </p:txBody>
+      </p:sp>
+      <p:sp>
+        <p:nvSpPr>
+          <p:cNvPr id="12" name="Rectangle: Rounded Corners 11">
+            <a:extLst>
+              <a:ext uri="{FF2B5EF4-FFF2-40B4-BE49-F238E27FC236}">
+                <a16:creationId xmlns:a16="http://schemas.microsoft.com/office/drawing/2014/main" id="{03EC734E-858B-4DC4-370D-2CB642391EBA}"/>
+              </a:ext>
+            </a:extLst>
+          </p:cNvPr>
+          <p:cNvSpPr/>
+          <p:nvPr/>
+        </p:nvSpPr>
+        <p:spPr>
+          <a:xfrm>
+            <a:off x="9273540" y="2902355"/>
+            <a:ext cx="1828800" cy="1502113"/>
+          </a:xfrm>
+          <a:prstGeom prst="roundRect">
+            <a:avLst/>
+          </a:prstGeom>
+          <a:gradFill>
+            <a:gsLst>
+              <a:gs pos="0">
+                <a:schemeClr val="accent6">
+                  <a:lumMod val="75000"/>
+                </a:schemeClr>
+              </a:gs>
+              <a:gs pos="92000">
+                <a:schemeClr val="accent6">
+                  <a:lumMod val="105000"/>
+                  <a:satMod val="103000"/>
+                  <a:tint val="73000"/>
+                </a:schemeClr>
+              </a:gs>
+              <a:gs pos="100000">
+                <a:schemeClr val="accent6">
+                  <a:lumMod val="105000"/>
+                  <a:satMod val="109000"/>
+                  <a:tint val="81000"/>
+                </a:schemeClr>
+              </a:gs>
+            </a:gsLst>
+            <a:lin ang="5400000" scaled="0"/>
+          </a:gradFill>
+          <a:ln>
+            <a:noFill/>
+          </a:ln>
+        </p:spPr>
+        <p:style>
+          <a:lnRef idx="0">
+            <a:scrgbClr r="0" g="0" b="0"/>
+          </a:lnRef>
+          <a:fillRef idx="0">
+            <a:scrgbClr r="0" g="0" b="0"/>
+          </a:fillRef>
+          <a:effectRef idx="0">
+            <a:scrgbClr r="0" g="0" b="0"/>
+          </a:effectRef>
+          <a:fontRef idx="minor">
+            <a:schemeClr val="lt1"/>
+          </a:fontRef>
+        </p:style>
+        <p:txBody>
+          <a:bodyPr rtlCol="0" anchor="t"/>
+          <a:lstStyle/>
+          <a:p>
+            <a:r>
+              <a:rPr lang="pt-PT" dirty="0">
+                <a:solidFill>
+                  <a:schemeClr val="tx1"/>
+                </a:solidFill>
+                <a:latin typeface="Aptos Mono" panose="020F0502020204030204" pitchFamily="49" charset="0"/>
+                <a:ea typeface="Tahoma" panose="020B0604030504040204" pitchFamily="34" charset="0"/>
+                <a:cs typeface="Tahoma" panose="020B0604030504040204" pitchFamily="34" charset="0"/>
+              </a:rPr>
+              <a:t>Imagem</a:t>
+            </a:r>
+          </a:p>
+          <a:p>
+            <a:endParaRPr lang="pt-PT" dirty="0">
+              <a:solidFill>
+                <a:schemeClr val="tx1"/>
+              </a:solidFill>
+              <a:latin typeface="Aptos Mono" panose="020F0502020204030204" pitchFamily="49" charset="0"/>
+              <a:ea typeface="Tahoma" panose="020B0604030504040204" pitchFamily="34" charset="0"/>
+              <a:cs typeface="Tahoma" panose="020B0604030504040204" pitchFamily="34" charset="0"/>
+            </a:endParaRPr>
+          </a:p>
+          <a:p>
+            <a:r>
+              <a:rPr lang="pt-PT" dirty="0">
+                <a:solidFill>
+                  <a:schemeClr val="tx1"/>
+                </a:solidFill>
+                <a:latin typeface="Aptos Mono" panose="020F0502020204030204" pitchFamily="49" charset="0"/>
+                <a:ea typeface="Tahoma" panose="020B0604030504040204" pitchFamily="34" charset="0"/>
+                <a:cs typeface="Tahoma" panose="020B0604030504040204" pitchFamily="34" charset="0"/>
+              </a:rPr>
+              <a:t>Artista</a:t>
+            </a:r>
+          </a:p>
+          <a:p>
+            <a:r>
+              <a:rPr lang="pt-PT" dirty="0">
+                <a:solidFill>
+                  <a:schemeClr val="tx1"/>
+                </a:solidFill>
+                <a:latin typeface="Aptos Mono" panose="020F0502020204030204" pitchFamily="49" charset="0"/>
+                <a:ea typeface="Tahoma" panose="020B0604030504040204" pitchFamily="34" charset="0"/>
+                <a:cs typeface="Tahoma" panose="020B0604030504040204" pitchFamily="34" charset="0"/>
+              </a:rPr>
+              <a:t>Nº </a:t>
+            </a:r>
+            <a:r>
+              <a:rPr lang="pt-PT" dirty="0" err="1">
+                <a:solidFill>
+                  <a:schemeClr val="tx1"/>
+                </a:solidFill>
+                <a:latin typeface="Aptos Mono" panose="020F0502020204030204" pitchFamily="49" charset="0"/>
+                <a:ea typeface="Tahoma" panose="020B0604030504040204" pitchFamily="34" charset="0"/>
+                <a:cs typeface="Tahoma" panose="020B0604030504040204" pitchFamily="34" charset="0"/>
+              </a:rPr>
+              <a:t>Albuns</a:t>
+            </a:r>
+            <a:endParaRPr lang="pt-PT" dirty="0">
+              <a:solidFill>
+                <a:schemeClr val="tx1"/>
+              </a:solidFill>
+              <a:latin typeface="Aptos Mono" panose="020F0502020204030204" pitchFamily="49" charset="0"/>
+              <a:ea typeface="Tahoma" panose="020B0604030504040204" pitchFamily="34" charset="0"/>
+              <a:cs typeface="Tahoma" panose="020B0604030504040204" pitchFamily="34" charset="0"/>
+            </a:endParaRPr>
+          </a:p>
+        </p:txBody>
+      </p:sp>
+      <p:sp>
+        <p:nvSpPr>
+          <p:cNvPr id="15" name="Rectangle: Rounded Corners 14">
+            <a:extLst>
+              <a:ext uri="{FF2B5EF4-FFF2-40B4-BE49-F238E27FC236}">
+                <a16:creationId xmlns:a16="http://schemas.microsoft.com/office/drawing/2014/main" id="{806291B3-BC31-1727-7718-96443E73A60B}"/>
+              </a:ext>
+            </a:extLst>
+          </p:cNvPr>
+          <p:cNvSpPr/>
+          <p:nvPr/>
+        </p:nvSpPr>
+        <p:spPr>
+          <a:xfrm>
+            <a:off x="7309196" y="4644905"/>
+            <a:ext cx="1828800" cy="1502113"/>
+          </a:xfrm>
+          <a:prstGeom prst="roundRect">
+            <a:avLst/>
+          </a:prstGeom>
+          <a:gradFill>
+            <a:gsLst>
+              <a:gs pos="0">
+                <a:schemeClr val="accent6">
+                  <a:lumMod val="75000"/>
+                </a:schemeClr>
+              </a:gs>
+              <a:gs pos="92000">
+                <a:schemeClr val="accent6">
+                  <a:lumMod val="105000"/>
+                  <a:satMod val="103000"/>
+                  <a:tint val="73000"/>
+                </a:schemeClr>
+              </a:gs>
+              <a:gs pos="100000">
+                <a:schemeClr val="accent6">
+                  <a:lumMod val="105000"/>
+                  <a:satMod val="109000"/>
+                  <a:tint val="81000"/>
+                </a:schemeClr>
+              </a:gs>
+            </a:gsLst>
+            <a:lin ang="5400000" scaled="0"/>
+          </a:gradFill>
+          <a:ln>
+            <a:noFill/>
+          </a:ln>
+        </p:spPr>
+        <p:style>
+          <a:lnRef idx="0">
+            <a:scrgbClr r="0" g="0" b="0"/>
+          </a:lnRef>
+          <a:fillRef idx="0">
+            <a:scrgbClr r="0" g="0" b="0"/>
+          </a:fillRef>
+          <a:effectRef idx="0">
+            <a:scrgbClr r="0" g="0" b="0"/>
+          </a:effectRef>
+          <a:fontRef idx="minor">
+            <a:schemeClr val="lt1"/>
+          </a:fontRef>
+        </p:style>
+        <p:txBody>
+          <a:bodyPr rtlCol="0" anchor="t"/>
+          <a:lstStyle/>
+          <a:p>
+            <a:r>
+              <a:rPr lang="pt-PT" dirty="0">
+                <a:solidFill>
+                  <a:schemeClr val="tx1"/>
+                </a:solidFill>
+                <a:latin typeface="Aptos Mono" panose="020F0502020204030204" pitchFamily="49" charset="0"/>
+                <a:ea typeface="Tahoma" panose="020B0604030504040204" pitchFamily="34" charset="0"/>
+                <a:cs typeface="Tahoma" panose="020B0604030504040204" pitchFamily="34" charset="0"/>
+              </a:rPr>
+              <a:t>Imagem</a:t>
+            </a:r>
+          </a:p>
+          <a:p>
+            <a:endParaRPr lang="pt-PT" dirty="0">
+              <a:solidFill>
+                <a:schemeClr val="tx1"/>
+              </a:solidFill>
+              <a:latin typeface="Aptos Mono" panose="020F0502020204030204" pitchFamily="49" charset="0"/>
+              <a:ea typeface="Tahoma" panose="020B0604030504040204" pitchFamily="34" charset="0"/>
+              <a:cs typeface="Tahoma" panose="020B0604030504040204" pitchFamily="34" charset="0"/>
+            </a:endParaRPr>
+          </a:p>
+          <a:p>
+            <a:r>
+              <a:rPr lang="pt-PT" dirty="0">
+                <a:solidFill>
+                  <a:schemeClr val="tx1"/>
+                </a:solidFill>
+                <a:latin typeface="Aptos Mono" panose="020F0502020204030204" pitchFamily="49" charset="0"/>
+                <a:ea typeface="Tahoma" panose="020B0604030504040204" pitchFamily="34" charset="0"/>
+                <a:cs typeface="Tahoma" panose="020B0604030504040204" pitchFamily="34" charset="0"/>
+              </a:rPr>
+              <a:t>Artista</a:t>
+            </a:r>
+          </a:p>
+          <a:p>
+            <a:r>
+              <a:rPr lang="pt-PT" dirty="0">
+                <a:solidFill>
+                  <a:schemeClr val="tx1"/>
+                </a:solidFill>
+                <a:latin typeface="Aptos Mono" panose="020F0502020204030204" pitchFamily="49" charset="0"/>
+                <a:ea typeface="Tahoma" panose="020B0604030504040204" pitchFamily="34" charset="0"/>
+                <a:cs typeface="Tahoma" panose="020B0604030504040204" pitchFamily="34" charset="0"/>
+              </a:rPr>
+              <a:t>Nº </a:t>
+            </a:r>
+            <a:r>
+              <a:rPr lang="pt-PT" dirty="0" err="1">
+                <a:solidFill>
+                  <a:schemeClr val="tx1"/>
+                </a:solidFill>
+                <a:latin typeface="Aptos Mono" panose="020F0502020204030204" pitchFamily="49" charset="0"/>
+                <a:ea typeface="Tahoma" panose="020B0604030504040204" pitchFamily="34" charset="0"/>
+                <a:cs typeface="Tahoma" panose="020B0604030504040204" pitchFamily="34" charset="0"/>
+              </a:rPr>
+              <a:t>Albuns</a:t>
+            </a:r>
+            <a:endParaRPr lang="pt-PT" dirty="0">
+              <a:solidFill>
+                <a:schemeClr val="tx1"/>
+              </a:solidFill>
+              <a:latin typeface="Aptos Mono" panose="020F0502020204030204" pitchFamily="49" charset="0"/>
+              <a:ea typeface="Tahoma" panose="020B0604030504040204" pitchFamily="34" charset="0"/>
+              <a:cs typeface="Tahoma" panose="020B0604030504040204" pitchFamily="34" charset="0"/>
+            </a:endParaRPr>
+          </a:p>
+        </p:txBody>
+      </p:sp>
+      <p:sp>
+        <p:nvSpPr>
+          <p:cNvPr id="18" name="Rectangle: Rounded Corners 17">
+            <a:extLst>
+              <a:ext uri="{FF2B5EF4-FFF2-40B4-BE49-F238E27FC236}">
+                <a16:creationId xmlns:a16="http://schemas.microsoft.com/office/drawing/2014/main" id="{CA1C1124-E437-1259-A9E8-77322A588990}"/>
+              </a:ext>
+            </a:extLst>
+          </p:cNvPr>
+          <p:cNvSpPr/>
+          <p:nvPr/>
+        </p:nvSpPr>
+        <p:spPr>
+          <a:xfrm>
+            <a:off x="9384376" y="4644904"/>
+            <a:ext cx="1828800" cy="1502113"/>
+          </a:xfrm>
+          <a:prstGeom prst="roundRect">
+            <a:avLst/>
+          </a:prstGeom>
+          <a:gradFill>
+            <a:gsLst>
+              <a:gs pos="0">
+                <a:schemeClr val="accent6">
+                  <a:lumMod val="75000"/>
+                </a:schemeClr>
+              </a:gs>
+              <a:gs pos="92000">
+                <a:schemeClr val="accent6">
+                  <a:lumMod val="105000"/>
+                  <a:satMod val="103000"/>
+                  <a:tint val="73000"/>
+                </a:schemeClr>
+              </a:gs>
+              <a:gs pos="100000">
+                <a:schemeClr val="accent6">
+                  <a:lumMod val="105000"/>
+                  <a:satMod val="109000"/>
+                  <a:tint val="81000"/>
+                </a:schemeClr>
+              </a:gs>
+            </a:gsLst>
+            <a:lin ang="5400000" scaled="0"/>
+          </a:gradFill>
+          <a:ln>
+            <a:noFill/>
+          </a:ln>
+        </p:spPr>
+        <p:style>
+          <a:lnRef idx="0">
+            <a:scrgbClr r="0" g="0" b="0"/>
+          </a:lnRef>
+          <a:fillRef idx="0">
+            <a:scrgbClr r="0" g="0" b="0"/>
+          </a:fillRef>
+          <a:effectRef idx="0">
+            <a:scrgbClr r="0" g="0" b="0"/>
+          </a:effectRef>
+          <a:fontRef idx="minor">
+            <a:schemeClr val="lt1"/>
+          </a:fontRef>
+        </p:style>
+        <p:txBody>
+          <a:bodyPr rtlCol="0" anchor="t"/>
+          <a:lstStyle/>
+          <a:p>
+            <a:r>
+              <a:rPr lang="pt-PT" dirty="0">
+                <a:solidFill>
+                  <a:schemeClr val="tx1"/>
+                </a:solidFill>
+                <a:latin typeface="Aptos Mono" panose="020F0502020204030204" pitchFamily="49" charset="0"/>
+                <a:ea typeface="Tahoma" panose="020B0604030504040204" pitchFamily="34" charset="0"/>
+                <a:cs typeface="Tahoma" panose="020B0604030504040204" pitchFamily="34" charset="0"/>
+              </a:rPr>
+              <a:t>Imagem</a:t>
+            </a:r>
+          </a:p>
+          <a:p>
+            <a:endParaRPr lang="pt-PT" dirty="0">
+              <a:solidFill>
+                <a:schemeClr val="tx1"/>
+              </a:solidFill>
+              <a:latin typeface="Aptos Mono" panose="020F0502020204030204" pitchFamily="49" charset="0"/>
+              <a:ea typeface="Tahoma" panose="020B0604030504040204" pitchFamily="34" charset="0"/>
+              <a:cs typeface="Tahoma" panose="020B0604030504040204" pitchFamily="34" charset="0"/>
+            </a:endParaRPr>
+          </a:p>
+          <a:p>
+            <a:r>
+              <a:rPr lang="pt-PT" dirty="0">
+                <a:solidFill>
+                  <a:schemeClr val="tx1"/>
+                </a:solidFill>
+                <a:latin typeface="Aptos Mono" panose="020F0502020204030204" pitchFamily="49" charset="0"/>
+                <a:ea typeface="Tahoma" panose="020B0604030504040204" pitchFamily="34" charset="0"/>
+                <a:cs typeface="Tahoma" panose="020B0604030504040204" pitchFamily="34" charset="0"/>
+              </a:rPr>
+              <a:t>Artista</a:t>
+            </a:r>
+          </a:p>
+          <a:p>
+            <a:r>
+              <a:rPr lang="pt-PT" dirty="0">
+                <a:solidFill>
+                  <a:schemeClr val="tx1"/>
+                </a:solidFill>
+                <a:latin typeface="Aptos Mono" panose="020F0502020204030204" pitchFamily="49" charset="0"/>
+                <a:ea typeface="Tahoma" panose="020B0604030504040204" pitchFamily="34" charset="0"/>
+                <a:cs typeface="Tahoma" panose="020B0604030504040204" pitchFamily="34" charset="0"/>
+              </a:rPr>
+              <a:t>Nº </a:t>
+            </a:r>
+            <a:r>
+              <a:rPr lang="pt-PT" dirty="0" err="1">
+                <a:solidFill>
+                  <a:schemeClr val="tx1"/>
+                </a:solidFill>
+                <a:latin typeface="Aptos Mono" panose="020F0502020204030204" pitchFamily="49" charset="0"/>
+                <a:ea typeface="Tahoma" panose="020B0604030504040204" pitchFamily="34" charset="0"/>
+                <a:cs typeface="Tahoma" panose="020B0604030504040204" pitchFamily="34" charset="0"/>
+              </a:rPr>
+              <a:t>Albuns</a:t>
+            </a:r>
+            <a:endParaRPr lang="pt-PT" dirty="0">
+              <a:solidFill>
+                <a:schemeClr val="tx1"/>
+              </a:solidFill>
+              <a:latin typeface="Aptos Mono" panose="020F0502020204030204" pitchFamily="49" charset="0"/>
+              <a:ea typeface="Tahoma" panose="020B0604030504040204" pitchFamily="34" charset="0"/>
+              <a:cs typeface="Tahoma" panose="020B0604030504040204" pitchFamily="34" charset="0"/>
+            </a:endParaRPr>
+          </a:p>
+        </p:txBody>
+      </p:sp>
+    </p:spTree>
+    <p:extLst>
+      <p:ext uri="{BB962C8B-B14F-4D97-AF65-F5344CB8AC3E}">
+        <p14:creationId xmlns:p14="http://schemas.microsoft.com/office/powerpoint/2010/main" val="3478805729"/>
+      </p:ext>
+    </p:extLst>
+  </p:cSld>
+  <p:clrMapOvr>
+    <a:masterClrMapping/>
+  </p:clrMapOvr>
+</p:sld>
+</file>
+
+<file path=ppt/slides/slide8.xml><?xml version="1.0" encoding="utf-8"?>
+<p:sld xmlns:a="http://schemas.openxmlformats.org/drawingml/2006/main" xmlns:r="http://schemas.openxmlformats.org/officeDocument/2006/relationships" xmlns:p="http://schemas.openxmlformats.org/presentationml/2006/main">
+  <p:cSld>
+    <p:spTree>
+      <p:nvGrpSpPr>
+        <p:cNvPr id="1" name="">
+          <a:extLst>
+            <a:ext uri="{FF2B5EF4-FFF2-40B4-BE49-F238E27FC236}">
+              <a16:creationId xmlns:a16="http://schemas.microsoft.com/office/drawing/2014/main" id="{289F0658-13B9-3FE7-1725-0CC857FC7DB2}"/>
+            </a:ext>
+          </a:extLst>
+        </p:cNvPr>
+        <p:cNvGrpSpPr/>
+        <p:nvPr/>
+      </p:nvGrpSpPr>
+      <p:grpSpPr>
+        <a:xfrm>
+          <a:off x="0" y="0"/>
+          <a:ext cx="0" cy="0"/>
+          <a:chOff x="0" y="0"/>
+          <a:chExt cx="0" cy="0"/>
+        </a:xfrm>
+      </p:grpSpPr>
+      <p:sp>
+        <p:nvSpPr>
+          <p:cNvPr id="23" name="Rectangle 22">
+            <a:extLst>
+              <a:ext uri="{FF2B5EF4-FFF2-40B4-BE49-F238E27FC236}">
+                <a16:creationId xmlns:a16="http://schemas.microsoft.com/office/drawing/2014/main" id="{E6F34142-F04A-DA1D-3D3B-C80C267034E9}"/>
+              </a:ext>
+            </a:extLst>
+          </p:cNvPr>
+          <p:cNvSpPr/>
+          <p:nvPr/>
+        </p:nvSpPr>
+        <p:spPr>
+          <a:xfrm>
+            <a:off x="7051040" y="435987"/>
+            <a:ext cx="4297680" cy="5986026"/>
+          </a:xfrm>
+          <a:prstGeom prst="rect">
+            <a:avLst/>
+          </a:prstGeom>
+          <a:solidFill>
+            <a:schemeClr val="tx2">
+              <a:lumMod val="50000"/>
+              <a:lumOff val="50000"/>
+            </a:schemeClr>
+          </a:solidFill>
+        </p:spPr>
+        <p:style>
+          <a:lnRef idx="2">
+            <a:schemeClr val="accent1">
+              <a:shade val="15000"/>
+            </a:schemeClr>
+          </a:lnRef>
+          <a:fillRef idx="1">
+            <a:schemeClr val="accent1"/>
+          </a:fillRef>
+          <a:effectRef idx="0">
+            <a:schemeClr val="accent1"/>
+          </a:effectRef>
+          <a:fontRef idx="minor">
+            <a:schemeClr val="lt1"/>
+          </a:fontRef>
+        </p:style>
+        <p:txBody>
+          <a:bodyPr rtlCol="0" anchor="t" anchorCtr="0"/>
+          <a:lstStyle/>
+          <a:p>
+            <a:pPr algn="ctr"/>
+            <a:endParaRPr lang="pt-PT" sz="3000" dirty="0">
+              <a:solidFill>
+                <a:schemeClr val="bg1"/>
+              </a:solidFill>
+            </a:endParaRPr>
+          </a:p>
+        </p:txBody>
+      </p:sp>
+      <p:sp>
+        <p:nvSpPr>
+          <p:cNvPr id="3" name="Rectangle: Rounded Corners 2">
+            <a:extLst>
+              <a:ext uri="{FF2B5EF4-FFF2-40B4-BE49-F238E27FC236}">
+                <a16:creationId xmlns:a16="http://schemas.microsoft.com/office/drawing/2014/main" id="{C5254BEF-CE25-4AA6-E52D-4131AF987A55}"/>
+              </a:ext>
+            </a:extLst>
+          </p:cNvPr>
+          <p:cNvSpPr/>
+          <p:nvPr/>
+        </p:nvSpPr>
+        <p:spPr>
+          <a:xfrm>
+            <a:off x="7198360" y="1159806"/>
+            <a:ext cx="1828800" cy="1502113"/>
+          </a:xfrm>
+          <a:prstGeom prst="roundRect">
+            <a:avLst/>
+          </a:prstGeom>
+          <a:gradFill>
+            <a:gsLst>
+              <a:gs pos="0">
+                <a:schemeClr val="accent6">
+                  <a:lumMod val="75000"/>
+                </a:schemeClr>
+              </a:gs>
+              <a:gs pos="92000">
+                <a:schemeClr val="accent6">
+                  <a:lumMod val="105000"/>
+                  <a:satMod val="103000"/>
+                  <a:tint val="73000"/>
+                </a:schemeClr>
+              </a:gs>
+              <a:gs pos="100000">
+                <a:schemeClr val="accent6">
+                  <a:lumMod val="105000"/>
+                  <a:satMod val="109000"/>
+                  <a:tint val="81000"/>
+                </a:schemeClr>
+              </a:gs>
+            </a:gsLst>
+            <a:lin ang="5400000" scaled="0"/>
+          </a:gradFill>
+          <a:ln>
+            <a:noFill/>
+          </a:ln>
+        </p:spPr>
+        <p:style>
+          <a:lnRef idx="0">
+            <a:scrgbClr r="0" g="0" b="0"/>
+          </a:lnRef>
+          <a:fillRef idx="0">
+            <a:scrgbClr r="0" g="0" b="0"/>
+          </a:fillRef>
+          <a:effectRef idx="0">
+            <a:scrgbClr r="0" g="0" b="0"/>
+          </a:effectRef>
+          <a:fontRef idx="minor">
+            <a:schemeClr val="lt1"/>
+          </a:fontRef>
+        </p:style>
+        <p:txBody>
+          <a:bodyPr rtlCol="0" anchor="t"/>
+          <a:lstStyle/>
+          <a:p>
+            <a:r>
+              <a:rPr lang="pt-PT" dirty="0">
+                <a:solidFill>
+                  <a:schemeClr val="tx1"/>
+                </a:solidFill>
+                <a:latin typeface="Aptos Mono" panose="020F0502020204030204" pitchFamily="49" charset="0"/>
+                <a:ea typeface="Tahoma" panose="020B0604030504040204" pitchFamily="34" charset="0"/>
+                <a:cs typeface="Tahoma" panose="020B0604030504040204" pitchFamily="34" charset="0"/>
+              </a:rPr>
+              <a:t>Nome da lista</a:t>
+            </a:r>
+          </a:p>
+          <a:p>
+            <a:endParaRPr lang="pt-PT" dirty="0">
+              <a:solidFill>
+                <a:schemeClr val="tx1"/>
+              </a:solidFill>
+              <a:latin typeface="Aptos Mono" panose="020F0502020204030204" pitchFamily="49" charset="0"/>
+              <a:ea typeface="Tahoma" panose="020B0604030504040204" pitchFamily="34" charset="0"/>
+              <a:cs typeface="Tahoma" panose="020B0604030504040204" pitchFamily="34" charset="0"/>
+            </a:endParaRPr>
+          </a:p>
+          <a:p>
+            <a:r>
+              <a:rPr lang="pt-PT" dirty="0">
+                <a:solidFill>
+                  <a:schemeClr val="tx1"/>
+                </a:solidFill>
+                <a:latin typeface="Aptos Mono" panose="020F0502020204030204" pitchFamily="49" charset="0"/>
+                <a:ea typeface="Tahoma" panose="020B0604030504040204" pitchFamily="34" charset="0"/>
+                <a:cs typeface="Tahoma" panose="020B0604030504040204" pitchFamily="34" charset="0"/>
+              </a:rPr>
+              <a:t>Nº Faixas</a:t>
+            </a:r>
+          </a:p>
+        </p:txBody>
+      </p:sp>
+      <p:sp>
+        <p:nvSpPr>
+          <p:cNvPr id="4" name="TextBox 3">
+            <a:extLst>
+              <a:ext uri="{FF2B5EF4-FFF2-40B4-BE49-F238E27FC236}">
+                <a16:creationId xmlns:a16="http://schemas.microsoft.com/office/drawing/2014/main" id="{96E6608E-CF83-2699-46DF-50454A2E7ECA}"/>
+              </a:ext>
+            </a:extLst>
+          </p:cNvPr>
+          <p:cNvSpPr txBox="1"/>
+          <p:nvPr/>
+        </p:nvSpPr>
+        <p:spPr>
+          <a:xfrm>
+            <a:off x="7081520" y="515481"/>
+            <a:ext cx="747384" cy="369332"/>
+          </a:xfrm>
+          <a:prstGeom prst="rect">
+            <a:avLst/>
+          </a:prstGeom>
+          <a:noFill/>
+        </p:spPr>
+        <p:txBody>
+          <a:bodyPr wrap="none" rtlCol="0">
+            <a:spAutoFit/>
+          </a:bodyPr>
+          <a:lstStyle/>
+          <a:p>
+            <a:r>
+              <a:rPr lang="pt-PT" dirty="0">
+                <a:solidFill>
+                  <a:schemeClr val="bg1"/>
+                </a:solidFill>
+              </a:rPr>
+              <a:t>voltar</a:t>
+            </a:r>
+          </a:p>
+        </p:txBody>
+      </p:sp>
+      <p:sp>
+        <p:nvSpPr>
+          <p:cNvPr id="28" name="TextBox 27">
+            <a:extLst>
+              <a:ext uri="{FF2B5EF4-FFF2-40B4-BE49-F238E27FC236}">
+                <a16:creationId xmlns:a16="http://schemas.microsoft.com/office/drawing/2014/main" id="{BF79AB67-2779-0468-B8AD-1CA7E9C7DBD1}"/>
+              </a:ext>
+            </a:extLst>
+          </p:cNvPr>
+          <p:cNvSpPr txBox="1"/>
+          <p:nvPr/>
+        </p:nvSpPr>
+        <p:spPr>
+          <a:xfrm>
+            <a:off x="934720" y="329922"/>
+            <a:ext cx="2181495" cy="553998"/>
+          </a:xfrm>
+          <a:prstGeom prst="rect">
+            <a:avLst/>
+          </a:prstGeom>
+          <a:noFill/>
+        </p:spPr>
+        <p:txBody>
+          <a:bodyPr wrap="none" rtlCol="0">
+            <a:spAutoFit/>
+          </a:bodyPr>
+          <a:lstStyle/>
+          <a:p>
+            <a:r>
+              <a:rPr lang="pt-PT" sz="3000" dirty="0"/>
+              <a:t>Menu Listas</a:t>
+            </a:r>
+          </a:p>
+        </p:txBody>
+      </p:sp>
+      <p:sp>
+        <p:nvSpPr>
+          <p:cNvPr id="5" name="Rectangle: Rounded Corners 4">
+            <a:extLst>
+              <a:ext uri="{FF2B5EF4-FFF2-40B4-BE49-F238E27FC236}">
+                <a16:creationId xmlns:a16="http://schemas.microsoft.com/office/drawing/2014/main" id="{19F45DA2-5578-DA44-08EC-13D734AE5969}"/>
+              </a:ext>
+            </a:extLst>
+          </p:cNvPr>
+          <p:cNvSpPr/>
+          <p:nvPr/>
+        </p:nvSpPr>
+        <p:spPr>
+          <a:xfrm>
+            <a:off x="9295245" y="1159806"/>
+            <a:ext cx="1828800" cy="1502113"/>
+          </a:xfrm>
+          <a:prstGeom prst="roundRect">
+            <a:avLst/>
+          </a:prstGeom>
+          <a:gradFill>
+            <a:gsLst>
+              <a:gs pos="0">
+                <a:schemeClr val="accent6">
+                  <a:lumMod val="75000"/>
+                </a:schemeClr>
+              </a:gs>
+              <a:gs pos="92000">
+                <a:schemeClr val="accent6">
+                  <a:lumMod val="105000"/>
+                  <a:satMod val="103000"/>
+                  <a:tint val="73000"/>
+                </a:schemeClr>
+              </a:gs>
+              <a:gs pos="100000">
+                <a:schemeClr val="accent6">
+                  <a:lumMod val="105000"/>
+                  <a:satMod val="109000"/>
+                  <a:tint val="81000"/>
+                </a:schemeClr>
+              </a:gs>
+            </a:gsLst>
+            <a:lin ang="5400000" scaled="0"/>
+          </a:gradFill>
+          <a:ln>
+            <a:noFill/>
+          </a:ln>
+        </p:spPr>
+        <p:style>
+          <a:lnRef idx="0">
+            <a:scrgbClr r="0" g="0" b="0"/>
+          </a:lnRef>
+          <a:fillRef idx="0">
+            <a:scrgbClr r="0" g="0" b="0"/>
+          </a:fillRef>
+          <a:effectRef idx="0">
+            <a:scrgbClr r="0" g="0" b="0"/>
+          </a:effectRef>
+          <a:fontRef idx="minor">
+            <a:schemeClr val="lt1"/>
+          </a:fontRef>
+        </p:style>
+        <p:txBody>
+          <a:bodyPr rtlCol="0" anchor="t"/>
+          <a:lstStyle/>
+          <a:p>
+            <a:r>
+              <a:rPr lang="pt-PT" dirty="0">
+                <a:solidFill>
+                  <a:schemeClr val="tx1"/>
+                </a:solidFill>
+                <a:latin typeface="Aptos Mono" panose="020F0502020204030204" pitchFamily="49" charset="0"/>
+                <a:ea typeface="Tahoma" panose="020B0604030504040204" pitchFamily="34" charset="0"/>
+                <a:cs typeface="Tahoma" panose="020B0604030504040204" pitchFamily="34" charset="0"/>
+              </a:rPr>
+              <a:t>Nome da lista</a:t>
+            </a:r>
+          </a:p>
+          <a:p>
+            <a:endParaRPr lang="pt-PT" dirty="0">
+              <a:solidFill>
+                <a:schemeClr val="tx1"/>
+              </a:solidFill>
+              <a:latin typeface="Aptos Mono" panose="020F0502020204030204" pitchFamily="49" charset="0"/>
+              <a:ea typeface="Tahoma" panose="020B0604030504040204" pitchFamily="34" charset="0"/>
+              <a:cs typeface="Tahoma" panose="020B0604030504040204" pitchFamily="34" charset="0"/>
+            </a:endParaRPr>
+          </a:p>
+          <a:p>
+            <a:r>
+              <a:rPr lang="pt-PT" dirty="0">
+                <a:solidFill>
+                  <a:schemeClr val="tx1"/>
+                </a:solidFill>
+                <a:latin typeface="Aptos Mono" panose="020F0502020204030204" pitchFamily="49" charset="0"/>
+                <a:ea typeface="Tahoma" panose="020B0604030504040204" pitchFamily="34" charset="0"/>
+                <a:cs typeface="Tahoma" panose="020B0604030504040204" pitchFamily="34" charset="0"/>
+              </a:rPr>
+              <a:t>Nº Faixas</a:t>
+            </a:r>
+          </a:p>
+        </p:txBody>
+      </p:sp>
+      <p:sp>
+        <p:nvSpPr>
+          <p:cNvPr id="8" name="Rectangle: Rounded Corners 7">
+            <a:extLst>
+              <a:ext uri="{FF2B5EF4-FFF2-40B4-BE49-F238E27FC236}">
+                <a16:creationId xmlns:a16="http://schemas.microsoft.com/office/drawing/2014/main" id="{F9E3EBF7-32D0-46BA-FE1B-4089F042D687}"/>
+              </a:ext>
+            </a:extLst>
+          </p:cNvPr>
+          <p:cNvSpPr/>
+          <p:nvPr/>
+        </p:nvSpPr>
+        <p:spPr>
+          <a:xfrm>
+            <a:off x="7198360" y="2902356"/>
+            <a:ext cx="1828800" cy="1502113"/>
+          </a:xfrm>
+          <a:prstGeom prst="roundRect">
+            <a:avLst/>
+          </a:prstGeom>
+          <a:gradFill>
+            <a:gsLst>
+              <a:gs pos="0">
+                <a:schemeClr val="accent6">
+                  <a:lumMod val="75000"/>
+                </a:schemeClr>
+              </a:gs>
+              <a:gs pos="92000">
+                <a:schemeClr val="accent6">
+                  <a:lumMod val="105000"/>
+                  <a:satMod val="103000"/>
+                  <a:tint val="73000"/>
+                </a:schemeClr>
+              </a:gs>
+              <a:gs pos="100000">
+                <a:schemeClr val="accent6">
+                  <a:lumMod val="105000"/>
+                  <a:satMod val="109000"/>
+                  <a:tint val="81000"/>
+                </a:schemeClr>
+              </a:gs>
+            </a:gsLst>
+            <a:lin ang="5400000" scaled="0"/>
+          </a:gradFill>
+          <a:ln>
+            <a:noFill/>
+          </a:ln>
+        </p:spPr>
+        <p:style>
+          <a:lnRef idx="0">
+            <a:scrgbClr r="0" g="0" b="0"/>
+          </a:lnRef>
+          <a:fillRef idx="0">
+            <a:scrgbClr r="0" g="0" b="0"/>
+          </a:fillRef>
+          <a:effectRef idx="0">
+            <a:scrgbClr r="0" g="0" b="0"/>
+          </a:effectRef>
+          <a:fontRef idx="minor">
+            <a:schemeClr val="lt1"/>
+          </a:fontRef>
+        </p:style>
+        <p:txBody>
+          <a:bodyPr rtlCol="0" anchor="t"/>
+          <a:lstStyle/>
+          <a:p>
+            <a:r>
+              <a:rPr lang="pt-PT" dirty="0">
+                <a:solidFill>
+                  <a:schemeClr val="tx1"/>
+                </a:solidFill>
+                <a:latin typeface="Aptos Mono" panose="020F0502020204030204" pitchFamily="49" charset="0"/>
+                <a:ea typeface="Tahoma" panose="020B0604030504040204" pitchFamily="34" charset="0"/>
+                <a:cs typeface="Tahoma" panose="020B0604030504040204" pitchFamily="34" charset="0"/>
+              </a:rPr>
+              <a:t>Nome da lista</a:t>
+            </a:r>
+          </a:p>
+          <a:p>
+            <a:endParaRPr lang="pt-PT" dirty="0">
+              <a:solidFill>
+                <a:schemeClr val="tx1"/>
+              </a:solidFill>
+              <a:latin typeface="Aptos Mono" panose="020F0502020204030204" pitchFamily="49" charset="0"/>
+              <a:ea typeface="Tahoma" panose="020B0604030504040204" pitchFamily="34" charset="0"/>
+              <a:cs typeface="Tahoma" panose="020B0604030504040204" pitchFamily="34" charset="0"/>
+            </a:endParaRPr>
+          </a:p>
+          <a:p>
+            <a:r>
+              <a:rPr lang="pt-PT" dirty="0">
+                <a:solidFill>
+                  <a:schemeClr val="tx1"/>
+                </a:solidFill>
+                <a:latin typeface="Aptos Mono" panose="020F0502020204030204" pitchFamily="49" charset="0"/>
+                <a:ea typeface="Tahoma" panose="020B0604030504040204" pitchFamily="34" charset="0"/>
+                <a:cs typeface="Tahoma" panose="020B0604030504040204" pitchFamily="34" charset="0"/>
+              </a:rPr>
+              <a:t>Nº Faixas</a:t>
+            </a:r>
+          </a:p>
+        </p:txBody>
+      </p:sp>
+      <p:sp>
+        <p:nvSpPr>
+          <p:cNvPr id="11" name="Rectangle: Rounded Corners 10">
+            <a:extLst>
+              <a:ext uri="{FF2B5EF4-FFF2-40B4-BE49-F238E27FC236}">
+                <a16:creationId xmlns:a16="http://schemas.microsoft.com/office/drawing/2014/main" id="{88207B2C-1B61-34DA-4356-DF40D079D8F1}"/>
+              </a:ext>
+            </a:extLst>
+          </p:cNvPr>
+          <p:cNvSpPr/>
+          <p:nvPr/>
+        </p:nvSpPr>
+        <p:spPr>
+          <a:xfrm>
+            <a:off x="9295245" y="2902356"/>
+            <a:ext cx="1828800" cy="1502113"/>
+          </a:xfrm>
+          <a:prstGeom prst="roundRect">
+            <a:avLst/>
+          </a:prstGeom>
+          <a:gradFill>
+            <a:gsLst>
+              <a:gs pos="0">
+                <a:schemeClr val="accent6">
+                  <a:lumMod val="75000"/>
+                </a:schemeClr>
+              </a:gs>
+              <a:gs pos="92000">
+                <a:schemeClr val="accent6">
+                  <a:lumMod val="105000"/>
+                  <a:satMod val="103000"/>
+                  <a:tint val="73000"/>
+                </a:schemeClr>
+              </a:gs>
+              <a:gs pos="100000">
+                <a:schemeClr val="accent6">
+                  <a:lumMod val="105000"/>
+                  <a:satMod val="109000"/>
+                  <a:tint val="81000"/>
+                </a:schemeClr>
+              </a:gs>
+            </a:gsLst>
+            <a:lin ang="5400000" scaled="0"/>
+          </a:gradFill>
+          <a:ln>
+            <a:noFill/>
+          </a:ln>
+        </p:spPr>
+        <p:style>
+          <a:lnRef idx="0">
+            <a:scrgbClr r="0" g="0" b="0"/>
+          </a:lnRef>
+          <a:fillRef idx="0">
+            <a:scrgbClr r="0" g="0" b="0"/>
+          </a:fillRef>
+          <a:effectRef idx="0">
+            <a:scrgbClr r="0" g="0" b="0"/>
+          </a:effectRef>
+          <a:fontRef idx="minor">
+            <a:schemeClr val="lt1"/>
+          </a:fontRef>
+        </p:style>
+        <p:txBody>
+          <a:bodyPr rtlCol="0" anchor="t"/>
+          <a:lstStyle/>
+          <a:p>
+            <a:r>
+              <a:rPr lang="pt-PT" dirty="0">
+                <a:solidFill>
+                  <a:schemeClr val="tx1"/>
+                </a:solidFill>
+                <a:latin typeface="Aptos Mono" panose="020F0502020204030204" pitchFamily="49" charset="0"/>
+                <a:ea typeface="Tahoma" panose="020B0604030504040204" pitchFamily="34" charset="0"/>
+                <a:cs typeface="Tahoma" panose="020B0604030504040204" pitchFamily="34" charset="0"/>
+              </a:rPr>
+              <a:t>Nome da lista</a:t>
+            </a:r>
+          </a:p>
+          <a:p>
+            <a:endParaRPr lang="pt-PT" dirty="0">
+              <a:solidFill>
+                <a:schemeClr val="tx1"/>
+              </a:solidFill>
+              <a:latin typeface="Aptos Mono" panose="020F0502020204030204" pitchFamily="49" charset="0"/>
+              <a:ea typeface="Tahoma" panose="020B0604030504040204" pitchFamily="34" charset="0"/>
+              <a:cs typeface="Tahoma" panose="020B0604030504040204" pitchFamily="34" charset="0"/>
+            </a:endParaRPr>
+          </a:p>
+          <a:p>
+            <a:r>
+              <a:rPr lang="pt-PT" dirty="0">
+                <a:solidFill>
+                  <a:schemeClr val="tx1"/>
+                </a:solidFill>
+                <a:latin typeface="Aptos Mono" panose="020F0502020204030204" pitchFamily="49" charset="0"/>
+                <a:ea typeface="Tahoma" panose="020B0604030504040204" pitchFamily="34" charset="0"/>
+                <a:cs typeface="Tahoma" panose="020B0604030504040204" pitchFamily="34" charset="0"/>
+              </a:rPr>
+              <a:t>Nº Faixas</a:t>
+            </a:r>
+          </a:p>
+        </p:txBody>
+      </p:sp>
+      <p:sp>
+        <p:nvSpPr>
+          <p:cNvPr id="14" name="Rectangle: Rounded Corners 13">
+            <a:extLst>
+              <a:ext uri="{FF2B5EF4-FFF2-40B4-BE49-F238E27FC236}">
+                <a16:creationId xmlns:a16="http://schemas.microsoft.com/office/drawing/2014/main" id="{42649B7A-A985-F9DE-BD33-23EC272A2901}"/>
+              </a:ext>
+            </a:extLst>
+          </p:cNvPr>
+          <p:cNvSpPr/>
+          <p:nvPr/>
+        </p:nvSpPr>
+        <p:spPr>
+          <a:xfrm>
+            <a:off x="7275484" y="4644906"/>
+            <a:ext cx="1828800" cy="1502113"/>
+          </a:xfrm>
+          <a:prstGeom prst="roundRect">
+            <a:avLst/>
+          </a:prstGeom>
+          <a:gradFill>
+            <a:gsLst>
+              <a:gs pos="0">
+                <a:schemeClr val="accent6">
+                  <a:lumMod val="75000"/>
+                </a:schemeClr>
+              </a:gs>
+              <a:gs pos="92000">
+                <a:schemeClr val="accent6">
+                  <a:lumMod val="105000"/>
+                  <a:satMod val="103000"/>
+                  <a:tint val="73000"/>
+                </a:schemeClr>
+              </a:gs>
+              <a:gs pos="100000">
+                <a:schemeClr val="accent6">
+                  <a:lumMod val="105000"/>
+                  <a:satMod val="109000"/>
+                  <a:tint val="81000"/>
+                </a:schemeClr>
+              </a:gs>
+            </a:gsLst>
+            <a:lin ang="5400000" scaled="0"/>
+          </a:gradFill>
+          <a:ln>
+            <a:noFill/>
+          </a:ln>
+        </p:spPr>
+        <p:style>
+          <a:lnRef idx="0">
+            <a:scrgbClr r="0" g="0" b="0"/>
+          </a:lnRef>
+          <a:fillRef idx="0">
+            <a:scrgbClr r="0" g="0" b="0"/>
+          </a:fillRef>
+          <a:effectRef idx="0">
+            <a:scrgbClr r="0" g="0" b="0"/>
+          </a:effectRef>
+          <a:fontRef idx="minor">
+            <a:schemeClr val="lt1"/>
+          </a:fontRef>
+        </p:style>
+        <p:txBody>
+          <a:bodyPr rtlCol="0" anchor="t"/>
+          <a:lstStyle/>
+          <a:p>
+            <a:r>
+              <a:rPr lang="pt-PT" dirty="0">
+                <a:solidFill>
+                  <a:schemeClr val="tx1"/>
+                </a:solidFill>
+                <a:latin typeface="Aptos Mono" panose="020F0502020204030204" pitchFamily="49" charset="0"/>
+                <a:ea typeface="Tahoma" panose="020B0604030504040204" pitchFamily="34" charset="0"/>
+                <a:cs typeface="Tahoma" panose="020B0604030504040204" pitchFamily="34" charset="0"/>
+              </a:rPr>
+              <a:t>Nome da lista</a:t>
+            </a:r>
+          </a:p>
+          <a:p>
+            <a:endParaRPr lang="pt-PT" dirty="0">
+              <a:solidFill>
+                <a:schemeClr val="tx1"/>
+              </a:solidFill>
+              <a:latin typeface="Aptos Mono" panose="020F0502020204030204" pitchFamily="49" charset="0"/>
+              <a:ea typeface="Tahoma" panose="020B0604030504040204" pitchFamily="34" charset="0"/>
+              <a:cs typeface="Tahoma" panose="020B0604030504040204" pitchFamily="34" charset="0"/>
+            </a:endParaRPr>
+          </a:p>
+          <a:p>
+            <a:r>
+              <a:rPr lang="pt-PT" dirty="0">
+                <a:solidFill>
+                  <a:schemeClr val="tx1"/>
+                </a:solidFill>
+                <a:latin typeface="Aptos Mono" panose="020F0502020204030204" pitchFamily="49" charset="0"/>
+                <a:ea typeface="Tahoma" panose="020B0604030504040204" pitchFamily="34" charset="0"/>
+                <a:cs typeface="Tahoma" panose="020B0604030504040204" pitchFamily="34" charset="0"/>
+              </a:rPr>
+              <a:t>Nº Faixas</a:t>
+            </a:r>
+          </a:p>
+        </p:txBody>
+      </p:sp>
+      <p:sp>
+        <p:nvSpPr>
+          <p:cNvPr id="17" name="Rectangle: Rounded Corners 16">
+            <a:extLst>
+              <a:ext uri="{FF2B5EF4-FFF2-40B4-BE49-F238E27FC236}">
+                <a16:creationId xmlns:a16="http://schemas.microsoft.com/office/drawing/2014/main" id="{C388F5EC-633A-89F3-B94A-6E87D9BED35A}"/>
+              </a:ext>
+            </a:extLst>
+          </p:cNvPr>
+          <p:cNvSpPr/>
+          <p:nvPr/>
+        </p:nvSpPr>
+        <p:spPr>
+          <a:xfrm>
+            <a:off x="9372369" y="4644906"/>
+            <a:ext cx="1828800" cy="1502113"/>
+          </a:xfrm>
+          <a:prstGeom prst="roundRect">
+            <a:avLst/>
+          </a:prstGeom>
+          <a:gradFill>
+            <a:gsLst>
+              <a:gs pos="0">
+                <a:schemeClr val="accent6">
+                  <a:lumMod val="75000"/>
+                </a:schemeClr>
+              </a:gs>
+              <a:gs pos="92000">
+                <a:schemeClr val="accent6">
+                  <a:lumMod val="105000"/>
+                  <a:satMod val="103000"/>
+                  <a:tint val="73000"/>
+                </a:schemeClr>
+              </a:gs>
+              <a:gs pos="100000">
+                <a:schemeClr val="accent6">
+                  <a:lumMod val="105000"/>
+                  <a:satMod val="109000"/>
+                  <a:tint val="81000"/>
+                </a:schemeClr>
+              </a:gs>
+            </a:gsLst>
+            <a:lin ang="5400000" scaled="0"/>
+          </a:gradFill>
+          <a:ln>
+            <a:noFill/>
+          </a:ln>
+        </p:spPr>
+        <p:style>
+          <a:lnRef idx="0">
+            <a:scrgbClr r="0" g="0" b="0"/>
+          </a:lnRef>
+          <a:fillRef idx="0">
+            <a:scrgbClr r="0" g="0" b="0"/>
+          </a:fillRef>
+          <a:effectRef idx="0">
+            <a:scrgbClr r="0" g="0" b="0"/>
+          </a:effectRef>
+          <a:fontRef idx="minor">
+            <a:schemeClr val="lt1"/>
+          </a:fontRef>
+        </p:style>
+        <p:txBody>
+          <a:bodyPr rtlCol="0" anchor="t"/>
+          <a:lstStyle/>
+          <a:p>
+            <a:r>
+              <a:rPr lang="pt-PT" dirty="0">
+                <a:solidFill>
+                  <a:schemeClr val="tx1"/>
+                </a:solidFill>
+                <a:latin typeface="Aptos Mono" panose="020F0502020204030204" pitchFamily="49" charset="0"/>
+                <a:ea typeface="Tahoma" panose="020B0604030504040204" pitchFamily="34" charset="0"/>
+                <a:cs typeface="Tahoma" panose="020B0604030504040204" pitchFamily="34" charset="0"/>
+              </a:rPr>
+              <a:t>Nome da lista</a:t>
+            </a:r>
+          </a:p>
+          <a:p>
+            <a:endParaRPr lang="pt-PT" dirty="0">
+              <a:solidFill>
+                <a:schemeClr val="tx1"/>
+              </a:solidFill>
+              <a:latin typeface="Aptos Mono" panose="020F0502020204030204" pitchFamily="49" charset="0"/>
+              <a:ea typeface="Tahoma" panose="020B0604030504040204" pitchFamily="34" charset="0"/>
+              <a:cs typeface="Tahoma" panose="020B0604030504040204" pitchFamily="34" charset="0"/>
+            </a:endParaRPr>
+          </a:p>
+          <a:p>
+            <a:r>
+              <a:rPr lang="pt-PT" dirty="0">
+                <a:solidFill>
+                  <a:schemeClr val="tx1"/>
+                </a:solidFill>
+                <a:latin typeface="Aptos Mono" panose="020F0502020204030204" pitchFamily="49" charset="0"/>
+                <a:ea typeface="Tahoma" panose="020B0604030504040204" pitchFamily="34" charset="0"/>
+                <a:cs typeface="Tahoma" panose="020B0604030504040204" pitchFamily="34" charset="0"/>
+              </a:rPr>
+              <a:t>Nº Faixas</a:t>
+            </a:r>
+          </a:p>
+        </p:txBody>
+      </p:sp>
+    </p:spTree>
+    <p:extLst>
+      <p:ext uri="{BB962C8B-B14F-4D97-AF65-F5344CB8AC3E}">
+        <p14:creationId xmlns:p14="http://schemas.microsoft.com/office/powerpoint/2010/main" val="2306013841"/>
+      </p:ext>
+    </p:extLst>
+  </p:cSld>
+  <p:clrMapOvr>
+    <a:masterClrMapping/>
+  </p:clrMapOvr>
+</p:sld>
+</file>
+
+<file path=ppt/slides/slide9.xml><?xml version="1.0" encoding="utf-8"?>
+<p:sld xmlns:a="http://schemas.openxmlformats.org/drawingml/2006/main" xmlns:r="http://schemas.openxmlformats.org/officeDocument/2006/relationships" xmlns:p="http://schemas.openxmlformats.org/presentationml/2006/main">
+  <p:cSld>
+    <p:spTree>
+      <p:nvGrpSpPr>
+        <p:cNvPr id="1" name="">
+          <a:extLst>
+            <a:ext uri="{FF2B5EF4-FFF2-40B4-BE49-F238E27FC236}">
+              <a16:creationId xmlns:a16="http://schemas.microsoft.com/office/drawing/2014/main" id="{6B7A5218-2110-F701-3D90-9DA9F0B5B656}"/>
+            </a:ext>
+          </a:extLst>
+        </p:cNvPr>
+        <p:cNvGrpSpPr/>
+        <p:nvPr/>
+      </p:nvGrpSpPr>
+      <p:grpSpPr>
+        <a:xfrm>
+          <a:off x="0" y="0"/>
+          <a:ext cx="0" cy="0"/>
+          <a:chOff x="0" y="0"/>
+          <a:chExt cx="0" cy="0"/>
+        </a:xfrm>
+      </p:grpSpPr>
+      <p:sp>
+        <p:nvSpPr>
+          <p:cNvPr id="23" name="Rectangle 22">
+            <a:extLst>
+              <a:ext uri="{FF2B5EF4-FFF2-40B4-BE49-F238E27FC236}">
+                <a16:creationId xmlns:a16="http://schemas.microsoft.com/office/drawing/2014/main" id="{53EFBE6F-24E9-FA65-1D5B-487CFDA59B01}"/>
+              </a:ext>
+            </a:extLst>
+          </p:cNvPr>
+          <p:cNvSpPr/>
+          <p:nvPr/>
+        </p:nvSpPr>
+        <p:spPr>
+          <a:xfrm>
+            <a:off x="7051040" y="435987"/>
+            <a:ext cx="4297680" cy="5986026"/>
+          </a:xfrm>
+          <a:prstGeom prst="rect">
+            <a:avLst/>
+          </a:prstGeom>
+          <a:solidFill>
+            <a:schemeClr val="tx2">
+              <a:lumMod val="50000"/>
+              <a:lumOff val="50000"/>
+            </a:schemeClr>
+          </a:solidFill>
+        </p:spPr>
+        <p:style>
+          <a:lnRef idx="2">
+            <a:schemeClr val="accent1">
+              <a:shade val="15000"/>
+            </a:schemeClr>
+          </a:lnRef>
+          <a:fillRef idx="1">
+            <a:schemeClr val="accent1"/>
+          </a:fillRef>
+          <a:effectRef idx="0">
+            <a:schemeClr val="accent1"/>
+          </a:effectRef>
+          <a:fontRef idx="minor">
+            <a:schemeClr val="lt1"/>
+          </a:fontRef>
+        </p:style>
+        <p:txBody>
+          <a:bodyPr rtlCol="0" anchor="t" anchorCtr="0"/>
+          <a:lstStyle/>
+          <a:p>
+            <a:pPr algn="ctr"/>
+            <a:endParaRPr lang="pt-PT" sz="3000" dirty="0">
+              <a:solidFill>
+                <a:schemeClr val="bg1"/>
+              </a:solidFill>
+            </a:endParaRPr>
+          </a:p>
+        </p:txBody>
+      </p:sp>
+      <p:sp>
+        <p:nvSpPr>
+          <p:cNvPr id="3" name="Rectangle: Rounded Corners 2">
+            <a:extLst>
+              <a:ext uri="{FF2B5EF4-FFF2-40B4-BE49-F238E27FC236}">
+                <a16:creationId xmlns:a16="http://schemas.microsoft.com/office/drawing/2014/main" id="{24AF223C-1BFE-215F-6E48-807EE5CFCA5E}"/>
+              </a:ext>
+            </a:extLst>
+          </p:cNvPr>
+          <p:cNvSpPr/>
+          <p:nvPr/>
+        </p:nvSpPr>
+        <p:spPr>
+          <a:xfrm>
+            <a:off x="7229532" y="964307"/>
+            <a:ext cx="3940695" cy="1680376"/>
+          </a:xfrm>
+          <a:prstGeom prst="roundRect">
+            <a:avLst/>
+          </a:prstGeom>
+          <a:gradFill>
+            <a:gsLst>
+              <a:gs pos="0">
+                <a:schemeClr val="accent6">
+                  <a:lumMod val="75000"/>
+                </a:schemeClr>
+              </a:gs>
+              <a:gs pos="92000">
+                <a:schemeClr val="accent6">
+                  <a:lumMod val="105000"/>
+                  <a:satMod val="103000"/>
+                  <a:tint val="73000"/>
+                </a:schemeClr>
+              </a:gs>
+              <a:gs pos="100000">
+                <a:schemeClr val="accent6">
+                  <a:lumMod val="105000"/>
+                  <a:satMod val="109000"/>
+                  <a:tint val="81000"/>
+                </a:schemeClr>
+              </a:gs>
+            </a:gsLst>
+            <a:lin ang="5400000" scaled="0"/>
+          </a:gradFill>
+          <a:ln>
+            <a:noFill/>
+          </a:ln>
+        </p:spPr>
+        <p:style>
+          <a:lnRef idx="0">
+            <a:scrgbClr r="0" g="0" b="0"/>
+          </a:lnRef>
+          <a:fillRef idx="0">
+            <a:scrgbClr r="0" g="0" b="0"/>
+          </a:fillRef>
+          <a:effectRef idx="0">
+            <a:scrgbClr r="0" g="0" b="0"/>
+          </a:effectRef>
+          <a:fontRef idx="minor">
+            <a:schemeClr val="lt1"/>
+          </a:fontRef>
+        </p:style>
+        <p:txBody>
+          <a:bodyPr rtlCol="0" anchor="t"/>
+          <a:lstStyle/>
+          <a:p>
+            <a:r>
+              <a:rPr lang="pt-PT" dirty="0">
+                <a:solidFill>
+                  <a:schemeClr val="tx1"/>
+                </a:solidFill>
+                <a:latin typeface="Aptos Mono" panose="020F0502020204030204" pitchFamily="49" charset="0"/>
+                <a:ea typeface="Tahoma" panose="020B0604030504040204" pitchFamily="34" charset="0"/>
+                <a:cs typeface="Tahoma" panose="020B0604030504040204" pitchFamily="34" charset="0"/>
+              </a:rPr>
+              <a:t>Imagem</a:t>
+            </a:r>
+          </a:p>
+          <a:p>
+            <a:endParaRPr lang="pt-PT" dirty="0">
+              <a:solidFill>
+                <a:schemeClr val="tx1"/>
+              </a:solidFill>
+              <a:latin typeface="Aptos Mono" panose="020F0502020204030204" pitchFamily="49" charset="0"/>
+              <a:ea typeface="Tahoma" panose="020B0604030504040204" pitchFamily="34" charset="0"/>
+              <a:cs typeface="Tahoma" panose="020B0604030504040204" pitchFamily="34" charset="0"/>
+            </a:endParaRPr>
+          </a:p>
+          <a:p>
+            <a:r>
+              <a:rPr lang="pt-PT" dirty="0">
+                <a:solidFill>
+                  <a:schemeClr val="tx1"/>
+                </a:solidFill>
+                <a:latin typeface="Aptos Mono" panose="020F0502020204030204" pitchFamily="49" charset="0"/>
+                <a:ea typeface="Tahoma" panose="020B0604030504040204" pitchFamily="34" charset="0"/>
+                <a:cs typeface="Tahoma" panose="020B0604030504040204" pitchFamily="34" charset="0"/>
+              </a:rPr>
+              <a:t>Nome da rádio</a:t>
+            </a:r>
+          </a:p>
+          <a:p>
+            <a:endParaRPr lang="pt-PT" dirty="0">
+              <a:solidFill>
+                <a:schemeClr val="tx1"/>
+              </a:solidFill>
+              <a:latin typeface="Aptos Mono" panose="020F0502020204030204" pitchFamily="49" charset="0"/>
+              <a:ea typeface="Tahoma" panose="020B0604030504040204" pitchFamily="34" charset="0"/>
+              <a:cs typeface="Tahoma" panose="020B0604030504040204" pitchFamily="34" charset="0"/>
+            </a:endParaRPr>
+          </a:p>
+          <a:p>
+            <a:r>
+              <a:rPr lang="pt-PT" sz="1200" dirty="0">
+                <a:solidFill>
+                  <a:schemeClr val="tx1"/>
+                </a:solidFill>
+                <a:latin typeface="Aptos Mono" panose="020F0502020204030204" pitchFamily="49" charset="0"/>
+                <a:ea typeface="Tahoma" panose="020B0604030504040204" pitchFamily="34" charset="0"/>
+                <a:cs typeface="Tahoma" panose="020B0604030504040204" pitchFamily="34" charset="0"/>
+              </a:rPr>
+              <a:t>Se estiver a tocar mostra aqui essa </a:t>
+            </a:r>
+            <a:r>
+              <a:rPr lang="pt-PT" sz="1200" dirty="0" err="1">
+                <a:solidFill>
+                  <a:schemeClr val="tx1"/>
+                </a:solidFill>
+                <a:latin typeface="Aptos Mono" panose="020F0502020204030204" pitchFamily="49" charset="0"/>
+                <a:ea typeface="Tahoma" panose="020B0604030504040204" pitchFamily="34" charset="0"/>
+                <a:cs typeface="Tahoma" panose="020B0604030504040204" pitchFamily="34" charset="0"/>
+              </a:rPr>
+              <a:t>info</a:t>
+            </a:r>
+            <a:r>
+              <a:rPr lang="pt-PT" sz="1200" dirty="0">
+                <a:solidFill>
+                  <a:schemeClr val="tx1"/>
+                </a:solidFill>
+                <a:latin typeface="Aptos Mono" panose="020F0502020204030204" pitchFamily="49" charset="0"/>
+                <a:ea typeface="Tahoma" panose="020B0604030504040204" pitchFamily="34" charset="0"/>
+                <a:cs typeface="Tahoma" panose="020B0604030504040204" pitchFamily="34" charset="0"/>
+              </a:rPr>
+              <a:t> e muda a cor do botão</a:t>
+            </a:r>
+          </a:p>
+        </p:txBody>
+      </p:sp>
+      <p:sp>
+        <p:nvSpPr>
+          <p:cNvPr id="4" name="TextBox 3">
+            <a:extLst>
+              <a:ext uri="{FF2B5EF4-FFF2-40B4-BE49-F238E27FC236}">
+                <a16:creationId xmlns:a16="http://schemas.microsoft.com/office/drawing/2014/main" id="{AFB659B4-1884-1DB2-BB89-FCC611DAFF89}"/>
+              </a:ext>
+            </a:extLst>
+          </p:cNvPr>
+          <p:cNvSpPr txBox="1"/>
+          <p:nvPr/>
+        </p:nvSpPr>
+        <p:spPr>
+          <a:xfrm>
+            <a:off x="7081520" y="515481"/>
+            <a:ext cx="747384" cy="369332"/>
+          </a:xfrm>
+          <a:prstGeom prst="rect">
+            <a:avLst/>
+          </a:prstGeom>
+          <a:noFill/>
+        </p:spPr>
+        <p:txBody>
+          <a:bodyPr wrap="none" rtlCol="0">
+            <a:spAutoFit/>
+          </a:bodyPr>
+          <a:lstStyle/>
+          <a:p>
+            <a:r>
+              <a:rPr lang="pt-PT" dirty="0">
+                <a:solidFill>
+                  <a:schemeClr val="bg1"/>
+                </a:solidFill>
+              </a:rPr>
+              <a:t>voltar</a:t>
+            </a:r>
+          </a:p>
+        </p:txBody>
+      </p:sp>
+      <p:sp>
+        <p:nvSpPr>
+          <p:cNvPr id="28" name="TextBox 27">
+            <a:extLst>
+              <a:ext uri="{FF2B5EF4-FFF2-40B4-BE49-F238E27FC236}">
+                <a16:creationId xmlns:a16="http://schemas.microsoft.com/office/drawing/2014/main" id="{C6157290-0740-708A-0A37-3A36C86E80F9}"/>
+              </a:ext>
+            </a:extLst>
+          </p:cNvPr>
+          <p:cNvSpPr txBox="1"/>
+          <p:nvPr/>
+        </p:nvSpPr>
+        <p:spPr>
+          <a:xfrm>
+            <a:off x="934720" y="329922"/>
+            <a:ext cx="2508059" cy="553998"/>
+          </a:xfrm>
+          <a:prstGeom prst="rect">
+            <a:avLst/>
+          </a:prstGeom>
+          <a:noFill/>
+        </p:spPr>
+        <p:txBody>
+          <a:bodyPr wrap="none" rtlCol="0">
+            <a:spAutoFit/>
+          </a:bodyPr>
+          <a:lstStyle/>
+          <a:p>
+            <a:r>
+              <a:rPr lang="pt-PT" sz="3000" dirty="0"/>
+              <a:t>Rádios Online</a:t>
+            </a:r>
+          </a:p>
+        </p:txBody>
+      </p:sp>
+      <p:sp>
+        <p:nvSpPr>
+          <p:cNvPr id="12" name="Rectangle: Rounded Corners 11">
+            <a:extLst>
+              <a:ext uri="{FF2B5EF4-FFF2-40B4-BE49-F238E27FC236}">
+                <a16:creationId xmlns:a16="http://schemas.microsoft.com/office/drawing/2014/main" id="{59FFA4A5-1210-80DD-A031-B46F9AD0D268}"/>
+              </a:ext>
+            </a:extLst>
+          </p:cNvPr>
+          <p:cNvSpPr/>
+          <p:nvPr/>
+        </p:nvSpPr>
+        <p:spPr>
+          <a:xfrm>
+            <a:off x="7229531" y="2724177"/>
+            <a:ext cx="3940695" cy="1680376"/>
+          </a:xfrm>
+          <a:prstGeom prst="roundRect">
+            <a:avLst/>
+          </a:prstGeom>
+          <a:gradFill>
+            <a:gsLst>
+              <a:gs pos="0">
+                <a:schemeClr val="accent6">
+                  <a:lumMod val="75000"/>
+                </a:schemeClr>
+              </a:gs>
+              <a:gs pos="92000">
+                <a:schemeClr val="accent6">
+                  <a:lumMod val="105000"/>
+                  <a:satMod val="103000"/>
+                  <a:tint val="73000"/>
+                </a:schemeClr>
+              </a:gs>
+              <a:gs pos="100000">
+                <a:schemeClr val="accent6">
+                  <a:lumMod val="105000"/>
+                  <a:satMod val="109000"/>
+                  <a:tint val="81000"/>
+                </a:schemeClr>
+              </a:gs>
+            </a:gsLst>
+            <a:lin ang="5400000" scaled="0"/>
+          </a:gradFill>
+          <a:ln>
+            <a:noFill/>
+          </a:ln>
+        </p:spPr>
+        <p:style>
+          <a:lnRef idx="0">
+            <a:scrgbClr r="0" g="0" b="0"/>
+          </a:lnRef>
+          <a:fillRef idx="0">
+            <a:scrgbClr r="0" g="0" b="0"/>
+          </a:fillRef>
+          <a:effectRef idx="0">
+            <a:scrgbClr r="0" g="0" b="0"/>
+          </a:effectRef>
+          <a:fontRef idx="minor">
+            <a:schemeClr val="lt1"/>
+          </a:fontRef>
+        </p:style>
+        <p:txBody>
+          <a:bodyPr rtlCol="0" anchor="t"/>
+          <a:lstStyle/>
+          <a:p>
+            <a:r>
+              <a:rPr lang="pt-PT" dirty="0">
+                <a:solidFill>
+                  <a:schemeClr val="tx1"/>
+                </a:solidFill>
+                <a:latin typeface="Aptos Mono" panose="020F0502020204030204" pitchFamily="49" charset="0"/>
+                <a:ea typeface="Tahoma" panose="020B0604030504040204" pitchFamily="34" charset="0"/>
+                <a:cs typeface="Tahoma" panose="020B0604030504040204" pitchFamily="34" charset="0"/>
+              </a:rPr>
+              <a:t>Imagem</a:t>
+            </a:r>
+          </a:p>
+          <a:p>
+            <a:endParaRPr lang="pt-PT" dirty="0">
+              <a:solidFill>
+                <a:schemeClr val="tx1"/>
+              </a:solidFill>
+              <a:latin typeface="Aptos Mono" panose="020F0502020204030204" pitchFamily="49" charset="0"/>
+              <a:ea typeface="Tahoma" panose="020B0604030504040204" pitchFamily="34" charset="0"/>
+              <a:cs typeface="Tahoma" panose="020B0604030504040204" pitchFamily="34" charset="0"/>
+            </a:endParaRPr>
+          </a:p>
+          <a:p>
+            <a:r>
+              <a:rPr lang="pt-PT" dirty="0">
+                <a:solidFill>
+                  <a:schemeClr val="tx1"/>
+                </a:solidFill>
+                <a:latin typeface="Aptos Mono" panose="020F0502020204030204" pitchFamily="49" charset="0"/>
+                <a:ea typeface="Tahoma" panose="020B0604030504040204" pitchFamily="34" charset="0"/>
+                <a:cs typeface="Tahoma" panose="020B0604030504040204" pitchFamily="34" charset="0"/>
+              </a:rPr>
+              <a:t>Nome da rádio</a:t>
+            </a:r>
+          </a:p>
+          <a:p>
+            <a:endParaRPr lang="pt-PT" dirty="0">
+              <a:solidFill>
+                <a:schemeClr val="tx1"/>
+              </a:solidFill>
+              <a:latin typeface="Aptos Mono" panose="020F0502020204030204" pitchFamily="49" charset="0"/>
+              <a:ea typeface="Tahoma" panose="020B0604030504040204" pitchFamily="34" charset="0"/>
+              <a:cs typeface="Tahoma" panose="020B0604030504040204" pitchFamily="34" charset="0"/>
+            </a:endParaRPr>
+          </a:p>
+          <a:p>
+            <a:r>
+              <a:rPr lang="pt-PT" sz="1200" dirty="0">
+                <a:solidFill>
+                  <a:schemeClr val="tx1"/>
+                </a:solidFill>
+                <a:latin typeface="Aptos Mono" panose="020F0502020204030204" pitchFamily="49" charset="0"/>
+                <a:ea typeface="Tahoma" panose="020B0604030504040204" pitchFamily="34" charset="0"/>
+                <a:cs typeface="Tahoma" panose="020B0604030504040204" pitchFamily="34" charset="0"/>
+              </a:rPr>
+              <a:t>Se estiver a tocar mostra aqui essa </a:t>
+            </a:r>
+            <a:r>
+              <a:rPr lang="pt-PT" sz="1200" dirty="0" err="1">
+                <a:solidFill>
+                  <a:schemeClr val="tx1"/>
+                </a:solidFill>
+                <a:latin typeface="Aptos Mono" panose="020F0502020204030204" pitchFamily="49" charset="0"/>
+                <a:ea typeface="Tahoma" panose="020B0604030504040204" pitchFamily="34" charset="0"/>
+                <a:cs typeface="Tahoma" panose="020B0604030504040204" pitchFamily="34" charset="0"/>
+              </a:rPr>
+              <a:t>info</a:t>
+            </a:r>
+            <a:r>
+              <a:rPr lang="pt-PT" sz="1200" dirty="0">
+                <a:solidFill>
+                  <a:schemeClr val="tx1"/>
+                </a:solidFill>
+                <a:latin typeface="Aptos Mono" panose="020F0502020204030204" pitchFamily="49" charset="0"/>
+                <a:ea typeface="Tahoma" panose="020B0604030504040204" pitchFamily="34" charset="0"/>
+                <a:cs typeface="Tahoma" panose="020B0604030504040204" pitchFamily="34" charset="0"/>
+              </a:rPr>
+              <a:t> e muda a cor do botão</a:t>
+            </a:r>
+          </a:p>
+        </p:txBody>
+      </p:sp>
+      <p:sp>
+        <p:nvSpPr>
+          <p:cNvPr id="15" name="Rectangle: Rounded Corners 14">
+            <a:extLst>
+              <a:ext uri="{FF2B5EF4-FFF2-40B4-BE49-F238E27FC236}">
+                <a16:creationId xmlns:a16="http://schemas.microsoft.com/office/drawing/2014/main" id="{26872C19-6695-8098-6D4E-F193EFC0BA1D}"/>
+              </a:ext>
+            </a:extLst>
+          </p:cNvPr>
+          <p:cNvSpPr/>
+          <p:nvPr/>
+        </p:nvSpPr>
+        <p:spPr>
+          <a:xfrm>
+            <a:off x="7229531" y="4563541"/>
+            <a:ext cx="3940695" cy="1680376"/>
+          </a:xfrm>
+          <a:prstGeom prst="roundRect">
+            <a:avLst/>
+          </a:prstGeom>
+          <a:gradFill>
+            <a:gsLst>
+              <a:gs pos="0">
+                <a:schemeClr val="accent6">
+                  <a:lumMod val="75000"/>
+                </a:schemeClr>
+              </a:gs>
+              <a:gs pos="92000">
+                <a:schemeClr val="accent6">
+                  <a:lumMod val="105000"/>
+                  <a:satMod val="103000"/>
+                  <a:tint val="73000"/>
+                </a:schemeClr>
+              </a:gs>
+              <a:gs pos="100000">
+                <a:schemeClr val="accent6">
+                  <a:lumMod val="105000"/>
+                  <a:satMod val="109000"/>
+                  <a:tint val="81000"/>
+                </a:schemeClr>
+              </a:gs>
+            </a:gsLst>
+            <a:lin ang="5400000" scaled="0"/>
+          </a:gradFill>
+          <a:ln>
+            <a:noFill/>
+          </a:ln>
+        </p:spPr>
+        <p:style>
+          <a:lnRef idx="0">
+            <a:scrgbClr r="0" g="0" b="0"/>
+          </a:lnRef>
+          <a:fillRef idx="0">
+            <a:scrgbClr r="0" g="0" b="0"/>
+          </a:fillRef>
+          <a:effectRef idx="0">
+            <a:scrgbClr r="0" g="0" b="0"/>
+          </a:effectRef>
+          <a:fontRef idx="minor">
+            <a:schemeClr val="lt1"/>
+          </a:fontRef>
+        </p:style>
+        <p:txBody>
+          <a:bodyPr rtlCol="0" anchor="t"/>
+          <a:lstStyle/>
+          <a:p>
+            <a:r>
+              <a:rPr lang="pt-PT" dirty="0">
+                <a:solidFill>
+                  <a:schemeClr val="tx1"/>
+                </a:solidFill>
+                <a:latin typeface="Aptos Mono" panose="020F0502020204030204" pitchFamily="49" charset="0"/>
+                <a:ea typeface="Tahoma" panose="020B0604030504040204" pitchFamily="34" charset="0"/>
+                <a:cs typeface="Tahoma" panose="020B0604030504040204" pitchFamily="34" charset="0"/>
+              </a:rPr>
+              <a:t>Imagem</a:t>
+            </a:r>
+          </a:p>
+          <a:p>
+            <a:endParaRPr lang="pt-PT" dirty="0">
+              <a:solidFill>
+                <a:schemeClr val="tx1"/>
+              </a:solidFill>
+              <a:latin typeface="Aptos Mono" panose="020F0502020204030204" pitchFamily="49" charset="0"/>
+              <a:ea typeface="Tahoma" panose="020B0604030504040204" pitchFamily="34" charset="0"/>
+              <a:cs typeface="Tahoma" panose="020B0604030504040204" pitchFamily="34" charset="0"/>
+            </a:endParaRPr>
+          </a:p>
+          <a:p>
+            <a:r>
+              <a:rPr lang="pt-PT" dirty="0">
+                <a:solidFill>
+                  <a:schemeClr val="tx1"/>
+                </a:solidFill>
+                <a:latin typeface="Aptos Mono" panose="020F0502020204030204" pitchFamily="49" charset="0"/>
+                <a:ea typeface="Tahoma" panose="020B0604030504040204" pitchFamily="34" charset="0"/>
+                <a:cs typeface="Tahoma" panose="020B0604030504040204" pitchFamily="34" charset="0"/>
+              </a:rPr>
+              <a:t>Nome da rádio</a:t>
+            </a:r>
+          </a:p>
+          <a:p>
+            <a:endParaRPr lang="pt-PT" dirty="0">
+              <a:solidFill>
+                <a:schemeClr val="tx1"/>
+              </a:solidFill>
+              <a:latin typeface="Aptos Mono" panose="020F0502020204030204" pitchFamily="49" charset="0"/>
+              <a:ea typeface="Tahoma" panose="020B0604030504040204" pitchFamily="34" charset="0"/>
+              <a:cs typeface="Tahoma" panose="020B0604030504040204" pitchFamily="34" charset="0"/>
+            </a:endParaRPr>
+          </a:p>
+          <a:p>
+            <a:r>
+              <a:rPr lang="pt-PT" sz="1200" dirty="0">
+                <a:solidFill>
+                  <a:schemeClr val="tx1"/>
+                </a:solidFill>
+                <a:latin typeface="Aptos Mono" panose="020F0502020204030204" pitchFamily="49" charset="0"/>
+                <a:ea typeface="Tahoma" panose="020B0604030504040204" pitchFamily="34" charset="0"/>
+                <a:cs typeface="Tahoma" panose="020B0604030504040204" pitchFamily="34" charset="0"/>
+              </a:rPr>
+              <a:t>Se estiver a tocar mostra aqui essa </a:t>
+            </a:r>
+            <a:r>
+              <a:rPr lang="pt-PT" sz="1200" dirty="0" err="1">
+                <a:solidFill>
+                  <a:schemeClr val="tx1"/>
+                </a:solidFill>
+                <a:latin typeface="Aptos Mono" panose="020F0502020204030204" pitchFamily="49" charset="0"/>
+                <a:ea typeface="Tahoma" panose="020B0604030504040204" pitchFamily="34" charset="0"/>
+                <a:cs typeface="Tahoma" panose="020B0604030504040204" pitchFamily="34" charset="0"/>
+              </a:rPr>
+              <a:t>info</a:t>
+            </a:r>
+            <a:r>
+              <a:rPr lang="pt-PT" sz="1200" dirty="0">
+                <a:solidFill>
+                  <a:schemeClr val="tx1"/>
+                </a:solidFill>
+                <a:latin typeface="Aptos Mono" panose="020F0502020204030204" pitchFamily="49" charset="0"/>
+                <a:ea typeface="Tahoma" panose="020B0604030504040204" pitchFamily="34" charset="0"/>
+                <a:cs typeface="Tahoma" panose="020B0604030504040204" pitchFamily="34" charset="0"/>
+              </a:rPr>
+              <a:t> e muda a cor do botão</a:t>
+            </a:r>
+          </a:p>
+        </p:txBody>
+      </p:sp>
+    </p:spTree>
+    <p:extLst>
+      <p:ext uri="{BB962C8B-B14F-4D97-AF65-F5344CB8AC3E}">
+        <p14:creationId xmlns:p14="http://schemas.microsoft.com/office/powerpoint/2010/main" val="2331356895"/>
       </p:ext>
     </p:extLst>
   </p:cSld>
